--- a/slide/NMATTT_Cloud_Security_Demo.pptx
+++ b/slide/NMATTT_Cloud_Security_Demo.pptx
@@ -2,26 +2,26 @@
 <file path=ppt/presentation.xml><?xml version="1.0" encoding="utf-8"?>
 <p:presentation xmlns:p="http://schemas.openxmlformats.org/presentationml/2006/main">
   <p:sldMasterIdLst>
-    <p:sldMasterId xmlns:r="http://schemas.openxmlformats.org/officeDocument/2006/relationships" id="2147483648" r:id="R0343dc8e661f4cbe"/>
+    <p:sldMasterId xmlns:r="http://schemas.openxmlformats.org/officeDocument/2006/relationships" id="2147483648" r:id="R02e6f98103c1436e"/>
   </p:sldMasterIdLst>
   <p:notesMasterIdLst>
-    <p:notesMasterId xmlns:r="http://schemas.openxmlformats.org/officeDocument/2006/relationships" r:id="Ref3a2e562cfd46eb"/>
+    <p:notesMasterId xmlns:r="http://schemas.openxmlformats.org/officeDocument/2006/relationships" r:id="Re1d503e94a1345f3"/>
   </p:notesMasterIdLst>
   <p:sldIdLst>
-    <p:sldId xmlns:r="http://schemas.openxmlformats.org/officeDocument/2006/relationships" id="256" r:id="Rc67eca0593404bde"/>
-    <p:sldId xmlns:r="http://schemas.openxmlformats.org/officeDocument/2006/relationships" id="257" r:id="R5f138f538090458a"/>
-    <p:sldId xmlns:r="http://schemas.openxmlformats.org/officeDocument/2006/relationships" id="258" r:id="R1ccb0447fee5459f"/>
-    <p:sldId xmlns:r="http://schemas.openxmlformats.org/officeDocument/2006/relationships" id="259" r:id="R4d75e5f7dfdd4485"/>
-    <p:sldId xmlns:r="http://schemas.openxmlformats.org/officeDocument/2006/relationships" id="260" r:id="Rc967bd9e2ccc4754"/>
-    <p:sldId xmlns:r="http://schemas.openxmlformats.org/officeDocument/2006/relationships" id="261" r:id="R59fe926ba9344b00"/>
-    <p:sldId xmlns:r="http://schemas.openxmlformats.org/officeDocument/2006/relationships" id="262" r:id="Re39251e998fc43a6"/>
-    <p:sldId xmlns:r="http://schemas.openxmlformats.org/officeDocument/2006/relationships" id="263" r:id="Rcaff04571816461a"/>
-    <p:sldId xmlns:r="http://schemas.openxmlformats.org/officeDocument/2006/relationships" id="264" r:id="R5a9c1449824f47d8"/>
-    <p:sldId xmlns:r="http://schemas.openxmlformats.org/officeDocument/2006/relationships" id="265" r:id="R04fe6c8390414477"/>
-    <p:sldId xmlns:r="http://schemas.openxmlformats.org/officeDocument/2006/relationships" id="266" r:id="Rbca0719a1a144cba"/>
-    <p:sldId xmlns:r="http://schemas.openxmlformats.org/officeDocument/2006/relationships" id="267" r:id="R4caa27edad1f4c95"/>
-    <p:sldId xmlns:r="http://schemas.openxmlformats.org/officeDocument/2006/relationships" id="268" r:id="Rd14f4c745223408d"/>
-    <p:sldId xmlns:r="http://schemas.openxmlformats.org/officeDocument/2006/relationships" id="269" r:id="Rd7fd80fc18c54a0d"/>
+    <p:sldId xmlns:r="http://schemas.openxmlformats.org/officeDocument/2006/relationships" id="256" r:id="R6439d8e28e434101"/>
+    <p:sldId xmlns:r="http://schemas.openxmlformats.org/officeDocument/2006/relationships" id="257" r:id="R0384bccb8ff24e41"/>
+    <p:sldId xmlns:r="http://schemas.openxmlformats.org/officeDocument/2006/relationships" id="258" r:id="Rb50a7c2ab95545e0"/>
+    <p:sldId xmlns:r="http://schemas.openxmlformats.org/officeDocument/2006/relationships" id="259" r:id="R52d7f6d71a42417a"/>
+    <p:sldId xmlns:r="http://schemas.openxmlformats.org/officeDocument/2006/relationships" id="260" r:id="R94f31e46f57d41f3"/>
+    <p:sldId xmlns:r="http://schemas.openxmlformats.org/officeDocument/2006/relationships" id="261" r:id="Rb4121088d63e4acb"/>
+    <p:sldId xmlns:r="http://schemas.openxmlformats.org/officeDocument/2006/relationships" id="262" r:id="R36c012a1b51f4286"/>
+    <p:sldId xmlns:r="http://schemas.openxmlformats.org/officeDocument/2006/relationships" id="263" r:id="R263f3748c4c24eef"/>
+    <p:sldId xmlns:r="http://schemas.openxmlformats.org/officeDocument/2006/relationships" id="264" r:id="R381126678a9b4b83"/>
+    <p:sldId xmlns:r="http://schemas.openxmlformats.org/officeDocument/2006/relationships" id="265" r:id="Rca5d4e7bc61f4f8e"/>
+    <p:sldId xmlns:r="http://schemas.openxmlformats.org/officeDocument/2006/relationships" id="266" r:id="Rf3d0785b54ac49ba"/>
+    <p:sldId xmlns:r="http://schemas.openxmlformats.org/officeDocument/2006/relationships" id="267" r:id="R0e8837df105e4d4e"/>
+    <p:sldId xmlns:r="http://schemas.openxmlformats.org/officeDocument/2006/relationships" id="268" r:id="R031f1d0314a34b5e"/>
+    <p:sldId xmlns:r="http://schemas.openxmlformats.org/officeDocument/2006/relationships" id="269" r:id="R8c1a67cd24d04ad5"/>
   </p:sldIdLst>
   <p:sldSz cx="12192000" cy="6858000"/>
   <p:notesSz cx="6858000" cy="9144000"/>
@@ -1472,7 +1472,7 @@
   </p:cSld>
   <p:clrMap bg1="lt1" tx1="dk1" bg2="lt2" tx2="dk2" accent1="accent1" accent2="accent2" accent3="accent3" accent4="accent4" accent5="accent5" accent6="accent6" hlink="hlink" folHlink="folHlink"/>
   <p:sldLayoutIdLst>
-    <p:sldLayoutId xmlns:r="http://schemas.openxmlformats.org/officeDocument/2006/relationships" id="2147483649" r:id="R99a046758f5843f8"/>
+    <p:sldLayoutId xmlns:r="http://schemas.openxmlformats.org/officeDocument/2006/relationships" id="2147483649" r:id="R903580de43e94702"/>
   </p:sldLayoutIdLst>
   <p:txStyles>
     <p:titleStyle>
@@ -2023,7 +2023,7 @@
           <p:cNvPr id="1" name="">
             <a:extLst xmlns:a="http://schemas.openxmlformats.org/drawingml/2006/main">
               <a:ext uri="{FF2B5EF4-FFF2-40B4-BE49-F238E27FC236}">
-                <a16:creationId xmlns:a16="http://schemas.microsoft.com/office/drawing/2014/main" id="{88D17540-386F-4FD7-9A6D-6090BF5106F6}"/>
+                <a16:creationId xmlns:a16="http://schemas.microsoft.com/office/drawing/2014/main" id="{09FB4366-FA8C-4329-8A09-4BB0866FEEB2}"/>
               </a:ext>
             </a:extLst>
           </p:cNvPr>
@@ -2056,19 +2056,52 @@
           <p:cNvPr id="2" name="">
             <a:extLst xmlns:a="http://schemas.openxmlformats.org/drawingml/2006/main">
               <a:ext uri="{FF2B5EF4-FFF2-40B4-BE49-F238E27FC236}">
-                <a16:creationId xmlns:a16="http://schemas.microsoft.com/office/drawing/2014/main" id="{1AFEBA5D-3B2E-4E95-9781-66FD88CF9814}"/>
-              </a:ext>
-            </a:extLst>
-          </p:cNvPr>
-          <p:cNvSpPr>
-            <a:spLocks xmlns:a="http://schemas.openxmlformats.org/drawingml/2006/main" noGrp="1"/>
-          </p:cNvSpPr>
-          <p:nvPr/>
-        </p:nvSpPr>
-        <p:spPr>
-          <a:xfrm xmlns:a="http://schemas.openxmlformats.org/drawingml/2006/main">
-            <a:off x="666750" y="1143000"/>
-            <a:ext cx="7239000" cy="1428750"/>
+                <a16:creationId xmlns:a16="http://schemas.microsoft.com/office/drawing/2014/main" id="{667BFC6C-6ABD-4B47-965E-96F805FCC26C}"/>
+              </a:ext>
+            </a:extLst>
+          </p:cNvPr>
+          <p:cNvSpPr>
+            <a:spLocks xmlns:a="http://schemas.openxmlformats.org/drawingml/2006/main" noGrp="1"/>
+          </p:cNvSpPr>
+          <p:nvPr/>
+        </p:nvSpPr>
+        <p:spPr>
+          <a:xfrm xmlns:a="http://schemas.openxmlformats.org/drawingml/2006/main">
+            <a:off x="0" y="0"/>
+            <a:ext cx="171450" cy="6858000"/>
+          </a:xfrm>
+          <a:prstGeom xmlns:a="http://schemas.openxmlformats.org/drawingml/2006/main" prst="rect">
+            <a:avLst/>
+          </a:prstGeom>
+          <a:solidFill xmlns:a="http://schemas.openxmlformats.org/drawingml/2006/main">
+            <a:srgbClr val="1F4E79"/>
+          </a:solidFill>
+          <a:ln xmlns:a="http://schemas.openxmlformats.org/drawingml/2006/main" w="0">
+            <a:solidFill>
+              <a:srgbClr val="1F4E79"/>
+            </a:solidFill>
+            <a:prstDash val="solid"/>
+          </a:ln>
+        </p:spPr>
+      </p:sp>
+      <p:sp>
+        <p:nvSpPr>
+          <p:cNvPr id="3" name="">
+            <a:extLst xmlns:a="http://schemas.openxmlformats.org/drawingml/2006/main">
+              <a:ext uri="{FF2B5EF4-FFF2-40B4-BE49-F238E27FC236}">
+                <a16:creationId xmlns:a16="http://schemas.microsoft.com/office/drawing/2014/main" id="{99FBFAFF-E426-4D87-8C19-7D637F885680}"/>
+              </a:ext>
+            </a:extLst>
+          </p:cNvPr>
+          <p:cNvSpPr>
+            <a:spLocks xmlns:a="http://schemas.openxmlformats.org/drawingml/2006/main" noGrp="1"/>
+          </p:cNvSpPr>
+          <p:nvPr/>
+        </p:nvSpPr>
+        <p:spPr>
+          <a:xfrm xmlns:a="http://schemas.openxmlformats.org/drawingml/2006/main">
+            <a:off x="666750" y="666750"/>
+            <a:ext cx="4953000" cy="304800"/>
           </a:xfrm>
           <a:prstGeom xmlns:a="http://schemas.openxmlformats.org/drawingml/2006/main" prst="rect">
             <a:avLst/>
@@ -2084,58 +2117,41 @@
           <a:lstStyle xmlns:a="http://schemas.openxmlformats.org/drawingml/2006/main"/>
           <a:p xmlns:a="http://schemas.openxmlformats.org/drawingml/2006/main">
             <a:pPr algn="l">
-              <a:defRPr sz="3600" b="1">
-                <a:solidFill>
-                  <a:srgbClr val="17324D"/>
-                </a:solidFill>
-              </a:defRPr>
-            </a:pPr>
-            <a:r>
-              <a:rPr sz="3600" b="1">
-                <a:solidFill>
-                  <a:srgbClr val="17324D"/>
-                </a:solidFill>
-              </a:rPr>
-              <a:t>Điện toán đám mây và</a:t>
-            </a:r>
-          </a:p>
-          <a:p xmlns:a="http://schemas.openxmlformats.org/drawingml/2006/main">
-            <a:pPr algn="l">
-              <a:defRPr sz="3600" b="1">
-                <a:solidFill>
-                  <a:srgbClr val="17324D"/>
-                </a:solidFill>
-              </a:defRPr>
-            </a:pPr>
-            <a:r>
-              <a:rPr sz="3600" b="1">
-                <a:solidFill>
-                  <a:srgbClr val="17324D"/>
-                </a:solidFill>
-              </a:rPr>
-              <a:t>Bảo mật điện toán đám mây</a:t>
-            </a:r>
-          </a:p>
-        </p:txBody>
-      </p:sp>
-      <p:sp>
-        <p:nvSpPr>
-          <p:cNvPr id="3" name="">
-            <a:extLst xmlns:a="http://schemas.openxmlformats.org/drawingml/2006/main">
-              <a:ext uri="{FF2B5EF4-FFF2-40B4-BE49-F238E27FC236}">
-                <a16:creationId xmlns:a16="http://schemas.microsoft.com/office/drawing/2014/main" id="{B7B535FE-8414-40BA-A8B3-F5179D927FE9}"/>
-              </a:ext>
-            </a:extLst>
-          </p:cNvPr>
-          <p:cNvSpPr>
-            <a:spLocks xmlns:a="http://schemas.openxmlformats.org/drawingml/2006/main" noGrp="1"/>
-          </p:cNvSpPr>
-          <p:nvPr/>
-        </p:nvSpPr>
-        <p:spPr>
-          <a:xfrm xmlns:a="http://schemas.openxmlformats.org/drawingml/2006/main">
-            <a:off x="704850" y="2800350"/>
-            <a:ext cx="7429500" cy="381000"/>
+              <a:defRPr sz="1425" b="1">
+                <a:solidFill>
+                  <a:srgbClr val="1F4E79"/>
+                </a:solidFill>
+              </a:defRPr>
+            </a:pPr>
+            <a:r>
+              <a:rPr sz="1425" b="1">
+                <a:solidFill>
+                  <a:srgbClr val="1F4E79"/>
+                </a:solidFill>
+              </a:rPr>
+              <a:t>BÁO CÁO &amp; DEMO PROJECT</a:t>
+            </a:r>
+          </a:p>
+        </p:txBody>
+      </p:sp>
+      <p:sp>
+        <p:nvSpPr>
+          <p:cNvPr id="4" name="">
+            <a:extLst xmlns:a="http://schemas.openxmlformats.org/drawingml/2006/main">
+              <a:ext uri="{FF2B5EF4-FFF2-40B4-BE49-F238E27FC236}">
+                <a16:creationId xmlns:a16="http://schemas.microsoft.com/office/drawing/2014/main" id="{675C4AC1-E2AE-4B62-8918-63AE6E60AD80}"/>
+              </a:ext>
+            </a:extLst>
+          </p:cNvPr>
+          <p:cNvSpPr>
+            <a:spLocks xmlns:a="http://schemas.openxmlformats.org/drawingml/2006/main" noGrp="1"/>
+          </p:cNvSpPr>
+          <p:nvPr/>
+        </p:nvSpPr>
+        <p:spPr>
+          <a:xfrm xmlns:a="http://schemas.openxmlformats.org/drawingml/2006/main">
+            <a:off x="666750" y="1123950"/>
+            <a:ext cx="7239000" cy="1428750"/>
           </a:xfrm>
           <a:prstGeom xmlns:a="http://schemas.openxmlformats.org/drawingml/2006/main" prst="rect">
             <a:avLst/>
@@ -2151,41 +2167,58 @@
           <a:lstStyle xmlns:a="http://schemas.openxmlformats.org/drawingml/2006/main"/>
           <a:p xmlns:a="http://schemas.openxmlformats.org/drawingml/2006/main">
             <a:pPr algn="l">
-              <a:defRPr sz="1800" b="0">
-                <a:solidFill>
-                  <a:srgbClr val="5F6B7A"/>
-                </a:solidFill>
-              </a:defRPr>
-            </a:pPr>
-            <a:r>
-              <a:rPr sz="1800" b="0">
-                <a:solidFill>
-                  <a:srgbClr val="5F6B7A"/>
-                </a:solidFill>
-              </a:rPr>
-              <a:t>Phân tích rủi ro, lỗ hổng và cơ chế bảo vệ dữ liệu</a:t>
-            </a:r>
-          </a:p>
-        </p:txBody>
-      </p:sp>
-      <p:sp>
-        <p:nvSpPr>
-          <p:cNvPr id="4" name="">
-            <a:extLst xmlns:a="http://schemas.openxmlformats.org/drawingml/2006/main">
-              <a:ext uri="{FF2B5EF4-FFF2-40B4-BE49-F238E27FC236}">
-                <a16:creationId xmlns:a16="http://schemas.microsoft.com/office/drawing/2014/main" id="{59F60F00-D2F9-46AE-8E56-3FAD695A219E}"/>
-              </a:ext>
-            </a:extLst>
-          </p:cNvPr>
-          <p:cNvSpPr>
-            <a:spLocks xmlns:a="http://schemas.openxmlformats.org/drawingml/2006/main" noGrp="1"/>
-          </p:cNvSpPr>
-          <p:nvPr/>
-        </p:nvSpPr>
-        <p:spPr>
-          <a:xfrm xmlns:a="http://schemas.openxmlformats.org/drawingml/2006/main">
-            <a:off x="704850" y="5143500"/>
-            <a:ext cx="7429500" cy="742950"/>
+              <a:defRPr sz="3750" b="1">
+                <a:solidFill>
+                  <a:srgbClr val="17324D"/>
+                </a:solidFill>
+              </a:defRPr>
+            </a:pPr>
+            <a:r>
+              <a:rPr sz="3750" b="1">
+                <a:solidFill>
+                  <a:srgbClr val="17324D"/>
+                </a:solidFill>
+              </a:rPr>
+              <a:t>Điện toán đám mây và</a:t>
+            </a:r>
+          </a:p>
+          <a:p xmlns:a="http://schemas.openxmlformats.org/drawingml/2006/main">
+            <a:pPr algn="l">
+              <a:defRPr sz="3750" b="1">
+                <a:solidFill>
+                  <a:srgbClr val="17324D"/>
+                </a:solidFill>
+              </a:defRPr>
+            </a:pPr>
+            <a:r>
+              <a:rPr sz="3750" b="1">
+                <a:solidFill>
+                  <a:srgbClr val="17324D"/>
+                </a:solidFill>
+              </a:rPr>
+              <a:t>Bảo mật điện toán đám mây</a:t>
+            </a:r>
+          </a:p>
+        </p:txBody>
+      </p:sp>
+      <p:sp>
+        <p:nvSpPr>
+          <p:cNvPr id="5" name="">
+            <a:extLst xmlns:a="http://schemas.openxmlformats.org/drawingml/2006/main">
+              <a:ext uri="{FF2B5EF4-FFF2-40B4-BE49-F238E27FC236}">
+                <a16:creationId xmlns:a16="http://schemas.microsoft.com/office/drawing/2014/main" id="{4146C86A-486C-4E0F-939E-23B972EC7B14}"/>
+              </a:ext>
+            </a:extLst>
+          </p:cNvPr>
+          <p:cNvSpPr>
+            <a:spLocks xmlns:a="http://schemas.openxmlformats.org/drawingml/2006/main" noGrp="1"/>
+          </p:cNvSpPr>
+          <p:nvPr/>
+        </p:nvSpPr>
+        <p:spPr>
+          <a:xfrm xmlns:a="http://schemas.openxmlformats.org/drawingml/2006/main">
+            <a:off x="704850" y="2857500"/>
+            <a:ext cx="7953375" cy="400050"/>
           </a:xfrm>
           <a:prstGeom xmlns:a="http://schemas.openxmlformats.org/drawingml/2006/main" prst="rect">
             <a:avLst/>
@@ -2201,21 +2234,54 @@
           <a:lstStyle xmlns:a="http://schemas.openxmlformats.org/drawingml/2006/main"/>
           <a:p xmlns:a="http://schemas.openxmlformats.org/drawingml/2006/main">
             <a:pPr algn="l">
-              <a:defRPr sz="1425" b="0">
-                <a:solidFill>
-                  <a:srgbClr val="17324D"/>
-                </a:solidFill>
-              </a:defRPr>
-            </a:pPr>
-            <a:r>
-              <a:rPr sz="1425" b="0">
-                <a:solidFill>
-                  <a:srgbClr val="17324D"/>
-                </a:solidFill>
-              </a:rPr>
-              <a:t>Nhập môn An toàn thông tin</a:t>
-            </a:r>
-          </a:p>
+              <a:defRPr sz="1800" b="0">
+                <a:solidFill>
+                  <a:srgbClr val="5F6B7A"/>
+                </a:solidFill>
+              </a:defRPr>
+            </a:pPr>
+            <a:r>
+              <a:rPr sz="1800" b="0">
+                <a:solidFill>
+                  <a:srgbClr val="5F6B7A"/>
+                </a:solidFill>
+              </a:rPr>
+              <a:t>Phân tích rủi ro, lỗ hổng và cơ chế bảo vệ dữ liệu trong môi trường cloud</a:t>
+            </a:r>
+          </a:p>
+        </p:txBody>
+      </p:sp>
+      <p:sp>
+        <p:nvSpPr>
+          <p:cNvPr id="6" name="">
+            <a:extLst xmlns:a="http://schemas.openxmlformats.org/drawingml/2006/main">
+              <a:ext uri="{FF2B5EF4-FFF2-40B4-BE49-F238E27FC236}">
+                <a16:creationId xmlns:a16="http://schemas.microsoft.com/office/drawing/2014/main" id="{F4319F54-0B57-4FED-9470-A2CFFD39FA3B}"/>
+              </a:ext>
+            </a:extLst>
+          </p:cNvPr>
+          <p:cNvSpPr>
+            <a:spLocks xmlns:a="http://schemas.openxmlformats.org/drawingml/2006/main" noGrp="1"/>
+          </p:cNvSpPr>
+          <p:nvPr/>
+        </p:nvSpPr>
+        <p:spPr>
+          <a:xfrm xmlns:a="http://schemas.openxmlformats.org/drawingml/2006/main">
+            <a:off x="704850" y="5286375"/>
+            <a:ext cx="7810500" cy="704850"/>
+          </a:xfrm>
+          <a:prstGeom xmlns:a="http://schemas.openxmlformats.org/drawingml/2006/main" prst="rect">
+            <a:avLst/>
+          </a:prstGeom>
+          <a:noFill xmlns:a="http://schemas.openxmlformats.org/drawingml/2006/main"/>
+          <a:ln xmlns:a="http://schemas.openxmlformats.org/drawingml/2006/main" w="0">
+            <a:noFill/>
+            <a:prstDash val="solid"/>
+          </a:ln>
+        </p:spPr>
+        <p:txBody>
+          <a:bodyPr xmlns:a="http://schemas.openxmlformats.org/drawingml/2006/main"/>
+          <a:lstStyle xmlns:a="http://schemas.openxmlformats.org/drawingml/2006/main"/>
           <a:p xmlns:a="http://schemas.openxmlformats.org/drawingml/2006/main">
             <a:pPr algn="l">
               <a:defRPr sz="1425" b="0">
@@ -2230,33 +2296,50 @@
                   <a:srgbClr val="17324D"/>
                 </a:solidFill>
               </a:rPr>
-              <a:t>Nhóm: Đào Trường Anh, Nguyễn Đồng Minh Anh, Đoàn Đình Bằng</a:t>
-            </a:r>
-          </a:p>
-        </p:txBody>
-      </p:sp>
-      <p:sp>
-        <p:nvSpPr>
-          <p:cNvPr id="5" name="">
-            <a:extLst xmlns:a="http://schemas.openxmlformats.org/drawingml/2006/main">
-              <a:ext uri="{FF2B5EF4-FFF2-40B4-BE49-F238E27FC236}">
-                <a16:creationId xmlns:a16="http://schemas.microsoft.com/office/drawing/2014/main" id="{31DAD054-DB0D-4EB1-A1C9-5C3873452026}"/>
-              </a:ext>
-            </a:extLst>
-          </p:cNvPr>
-          <p:cNvSpPr>
-            <a:spLocks xmlns:a="http://schemas.openxmlformats.org/drawingml/2006/main" noGrp="1"/>
-          </p:cNvSpPr>
-          <p:nvPr/>
-        </p:nvSpPr>
-        <p:spPr>
-          <a:xfrm xmlns:a="http://schemas.openxmlformats.org/drawingml/2006/main">
-            <a:off x="8382000" y="1619250"/>
-            <a:ext cx="2857500" cy="2476500"/>
+              <a:t>Môn học: Nhập môn An toàn thông tin</a:t>
+            </a:r>
+          </a:p>
+          <a:p xmlns:a="http://schemas.openxmlformats.org/drawingml/2006/main">
+            <a:pPr algn="l">
+              <a:defRPr sz="1425" b="0">
+                <a:solidFill>
+                  <a:srgbClr val="17324D"/>
+                </a:solidFill>
+              </a:defRPr>
+            </a:pPr>
+            <a:r>
+              <a:rPr sz="1425" b="0">
+                <a:solidFill>
+                  <a:srgbClr val="17324D"/>
+                </a:solidFill>
+              </a:rPr>
+              <a:t>Nhóm: Đào Trường Anh - Nguyễn Đồng Minh Anh - Đoàn Đình Bằng</a:t>
+            </a:r>
+          </a:p>
+        </p:txBody>
+      </p:sp>
+      <p:sp>
+        <p:nvSpPr>
+          <p:cNvPr id="7" name="">
+            <a:extLst xmlns:a="http://schemas.openxmlformats.org/drawingml/2006/main">
+              <a:ext uri="{FF2B5EF4-FFF2-40B4-BE49-F238E27FC236}">
+                <a16:creationId xmlns:a16="http://schemas.microsoft.com/office/drawing/2014/main" id="{63D22871-37A9-46C6-840B-788492D8D203}"/>
+              </a:ext>
+            </a:extLst>
+          </p:cNvPr>
+          <p:cNvSpPr>
+            <a:spLocks xmlns:a="http://schemas.openxmlformats.org/drawingml/2006/main" noGrp="1"/>
+          </p:cNvSpPr>
+          <p:nvPr/>
+        </p:nvSpPr>
+        <p:spPr>
+          <a:xfrm xmlns:a="http://schemas.openxmlformats.org/drawingml/2006/main">
+            <a:off x="8524875" y="1257300"/>
+            <a:ext cx="2762250" cy="2619375"/>
           </a:xfrm>
           <a:prstGeom xmlns:a="http://schemas.openxmlformats.org/drawingml/2006/main" prst="roundRect">
             <a:avLst>
-              <a:gd name="adj" fmla="val 3077"/>
+              <a:gd name="adj" fmla="val 2909"/>
             </a:avLst>
           </a:prstGeom>
           <a:solidFill xmlns:a="http://schemas.openxmlformats.org/drawingml/2006/main">
@@ -2274,36 +2357,131 @@
           <a:lstStyle xmlns:a="http://schemas.openxmlformats.org/drawingml/2006/main"/>
           <a:p xmlns:a="http://schemas.openxmlformats.org/drawingml/2006/main">
             <a:pPr algn="ctr">
-              <a:defRPr sz="1950" b="1">
+              <a:defRPr sz="1725" b="1">
                 <a:solidFill>
                   <a:srgbClr val="1F4E79"/>
                 </a:solidFill>
               </a:defRPr>
             </a:pPr>
             <a:r>
-              <a:rPr sz="1950" b="1">
+              <a:rPr sz="1725" b="1">
                 <a:solidFill>
                   <a:srgbClr val="1F4E79"/>
                 </a:solidFill>
               </a:rPr>
+              <a:t>Sản phẩm thực hiện</a:t>
+            </a:r>
+          </a:p>
+          <a:p xmlns:a="http://schemas.openxmlformats.org/drawingml/2006/main">
+            <a:r>
+              <a:t/>
+            </a:r>
+          </a:p>
+          <a:p xmlns:a="http://schemas.openxmlformats.org/drawingml/2006/main">
+            <a:pPr algn="ctr">
+              <a:defRPr sz="1725" b="1">
+                <a:solidFill>
+                  <a:srgbClr val="1F4E79"/>
+                </a:solidFill>
+              </a:defRPr>
+            </a:pPr>
+            <a:r>
+              <a:rPr sz="1725" b="1">
+                <a:solidFill>
+                  <a:srgbClr val="1F4E79"/>
+                </a:solidFill>
+              </a:rPr>
+              <a:t>Báo cáo LaTeX</a:t>
+            </a:r>
+          </a:p>
+          <a:p xmlns:a="http://schemas.openxmlformats.org/drawingml/2006/main">
+            <a:pPr algn="ctr">
+              <a:defRPr sz="1725" b="1">
+                <a:solidFill>
+                  <a:srgbClr val="1F4E79"/>
+                </a:solidFill>
+              </a:defRPr>
+            </a:pPr>
+            <a:r>
+              <a:rPr sz="1725" b="1">
+                <a:solidFill>
+                  <a:srgbClr val="1F4E79"/>
+                </a:solidFill>
+              </a:rPr>
+              <a:t>Slide thuyết trình</a:t>
+            </a:r>
+          </a:p>
+          <a:p xmlns:a="http://schemas.openxmlformats.org/drawingml/2006/main">
+            <a:pPr algn="ctr">
+              <a:defRPr sz="1725" b="1">
+                <a:solidFill>
+                  <a:srgbClr val="1F4E79"/>
+                </a:solidFill>
+              </a:defRPr>
+            </a:pPr>
+            <a:r>
+              <a:rPr sz="1725" b="1">
+                <a:solidFill>
+                  <a:srgbClr val="1F4E79"/>
+                </a:solidFill>
+              </a:rPr>
               <a:t>Cloud Security Demo</a:t>
             </a:r>
           </a:p>
+        </p:txBody>
+      </p:sp>
+      <p:sp>
+        <p:nvSpPr>
+          <p:cNvPr id="8" name="">
+            <a:extLst xmlns:a="http://schemas.openxmlformats.org/drawingml/2006/main">
+              <a:ext uri="{FF2B5EF4-FFF2-40B4-BE49-F238E27FC236}">
+                <a16:creationId xmlns:a16="http://schemas.microsoft.com/office/drawing/2014/main" id="{DD765ED5-4C63-40D7-9D98-DF5CEA433428}"/>
+              </a:ext>
+            </a:extLst>
+          </p:cNvPr>
+          <p:cNvSpPr>
+            <a:spLocks xmlns:a="http://schemas.openxmlformats.org/drawingml/2006/main" noGrp="1"/>
+          </p:cNvSpPr>
+          <p:nvPr/>
+        </p:nvSpPr>
+        <p:spPr>
+          <a:xfrm xmlns:a="http://schemas.openxmlformats.org/drawingml/2006/main">
+            <a:off x="8524875" y="4143375"/>
+            <a:ext cx="2762250" cy="876300"/>
+          </a:xfrm>
+          <a:prstGeom xmlns:a="http://schemas.openxmlformats.org/drawingml/2006/main" prst="roundRect">
+            <a:avLst>
+              <a:gd name="adj" fmla="val 8696"/>
+            </a:avLst>
+          </a:prstGeom>
+          <a:solidFill xmlns:a="http://schemas.openxmlformats.org/drawingml/2006/main">
+            <a:srgbClr val="FFFFFF"/>
+          </a:solidFill>
+          <a:ln xmlns:a="http://schemas.openxmlformats.org/drawingml/2006/main" w="9525">
+            <a:solidFill>
+              <a:srgbClr val="C8D3E0"/>
+            </a:solidFill>
+            <a:prstDash val="solid"/>
+          </a:ln>
+        </p:spPr>
+        <p:txBody>
+          <a:bodyPr xmlns:a="http://schemas.openxmlformats.org/drawingml/2006/main"/>
+          <a:lstStyle xmlns:a="http://schemas.openxmlformats.org/drawingml/2006/main"/>
           <a:p xmlns:a="http://schemas.openxmlformats.org/drawingml/2006/main">
             <a:pPr algn="ctr">
-              <a:defRPr sz="1950" b="1">
-                <a:solidFill>
-                  <a:srgbClr val="1F4E79"/>
-                </a:solidFill>
-              </a:defRPr>
-            </a:pPr>
-            <a:r>
-              <a:rPr sz="1950" b="1">
-                <a:solidFill>
-                  <a:srgbClr val="1F4E79"/>
-                </a:solidFill>
-              </a:rPr>
-              <a:t>Flask + PostgreSQL + MinIO</a:t>
+              <a:defRPr sz="1425" b="1">
+                <a:solidFill>
+                  <a:srgbClr val="17324D"/>
+                </a:solidFill>
+              </a:defRPr>
+            </a:pPr>
+            <a:r>
+              <a:rPr sz="1425" b="1">
+                <a:solidFill>
+                  <a:srgbClr val="17324D"/>
+                </a:solidFill>
+              </a:rPr>
+              <a:t>Tech stack: Flask + PostgreSQL + MinIO + Docker Compose</a:t>
             </a:r>
           </a:p>
         </p:txBody>
@@ -2311,7 +2489,7 @@
     </p:spTree>
     <p:extLst>
       <p:ext uri="{BB962C8B-B14F-4D97-AF65-F5344CB8AC3E}">
-        <p14:creationId xmlns:p14="http://schemas.microsoft.com/office/powerpoint/2010/main" val="859118449"/>
+        <p14:creationId xmlns:p14="http://schemas.microsoft.com/office/powerpoint/2010/main" val="270619768"/>
       </p:ext>
     </p:extLst>
   </p:cSld>
@@ -2342,7 +2520,7 @@
           <p:cNvPr id="1" name="">
             <a:extLst xmlns:a="http://schemas.openxmlformats.org/drawingml/2006/main">
               <a:ext uri="{FF2B5EF4-FFF2-40B4-BE49-F238E27FC236}">
-                <a16:creationId xmlns:a16="http://schemas.microsoft.com/office/drawing/2014/main" id="{66D7C2E2-18FC-41DB-87E8-613FB537A45B}"/>
+                <a16:creationId xmlns:a16="http://schemas.microsoft.com/office/drawing/2014/main" id="{54B15B85-7F74-4A9A-AC9F-B7D887E3FDB1}"/>
               </a:ext>
             </a:extLst>
           </p:cNvPr>
@@ -2375,7 +2553,7 @@
           <p:cNvPr id="2" name="">
             <a:extLst xmlns:a="http://schemas.openxmlformats.org/drawingml/2006/main">
               <a:ext uri="{FF2B5EF4-FFF2-40B4-BE49-F238E27FC236}">
-                <a16:creationId xmlns:a16="http://schemas.microsoft.com/office/drawing/2014/main" id="{8249E0B2-6F80-464A-8DC7-2A8AFBEEB5DE}"/>
+                <a16:creationId xmlns:a16="http://schemas.microsoft.com/office/drawing/2014/main" id="{7EE7BA14-E233-4066-85F5-DA2256EBDEFE}"/>
               </a:ext>
             </a:extLst>
           </p:cNvPr>
@@ -2425,7 +2603,7 @@
           <p:cNvPr id="3" name="">
             <a:extLst xmlns:a="http://schemas.openxmlformats.org/drawingml/2006/main">
               <a:ext uri="{FF2B5EF4-FFF2-40B4-BE49-F238E27FC236}">
-                <a16:creationId xmlns:a16="http://schemas.microsoft.com/office/drawing/2014/main" id="{8BE55BC0-997A-4DDF-A02C-984E3376EE3B}"/>
+                <a16:creationId xmlns:a16="http://schemas.microsoft.com/office/drawing/2014/main" id="{592E6C02-E2CC-4E5A-85D1-D7C94653BDF1}"/>
               </a:ext>
             </a:extLst>
           </p:cNvPr>
@@ -2479,7 +2657,7 @@
           <p:nvPr/>
         </p:nvPicPr>
         <p:blipFill>
-          <a:blip xmlns:r="http://schemas.openxmlformats.org/officeDocument/2006/relationships" xmlns:a="http://schemas.openxmlformats.org/drawingml/2006/main" r:embed="Rf2f31c139f534dde"/>
+          <a:blip xmlns:r="http://schemas.openxmlformats.org/officeDocument/2006/relationships" xmlns:a="http://schemas.openxmlformats.org/drawingml/2006/main" r:embed="Rade2056ced1a491a"/>
           <a:stretch xmlns:a="http://schemas.openxmlformats.org/drawingml/2006/main"/>
         </p:blipFill>
         <p:spPr>
@@ -2501,7 +2679,7 @@
           <p:nvPr/>
         </p:nvPicPr>
         <p:blipFill>
-          <a:blip xmlns:r="http://schemas.openxmlformats.org/officeDocument/2006/relationships" xmlns:a="http://schemas.openxmlformats.org/drawingml/2006/main" r:embed="R951a5c86ceb4469d"/>
+          <a:blip xmlns:r="http://schemas.openxmlformats.org/officeDocument/2006/relationships" xmlns:a="http://schemas.openxmlformats.org/drawingml/2006/main" r:embed="R998ee953f5214c64"/>
           <a:stretch xmlns:a="http://schemas.openxmlformats.org/drawingml/2006/main"/>
         </p:blipFill>
         <p:spPr>
@@ -2519,7 +2697,7 @@
           <p:cNvPr id="6" name="">
             <a:extLst xmlns:a="http://schemas.openxmlformats.org/drawingml/2006/main">
               <a:ext uri="{FF2B5EF4-FFF2-40B4-BE49-F238E27FC236}">
-                <a16:creationId xmlns:a16="http://schemas.microsoft.com/office/drawing/2014/main" id="{568FBF02-60F4-43E0-9877-B3DBD88D7F16}"/>
+                <a16:creationId xmlns:a16="http://schemas.microsoft.com/office/drawing/2014/main" id="{DF9173B8-BD1F-4A49-A5EA-152EECC62E81}"/>
               </a:ext>
             </a:extLst>
           </p:cNvPr>
@@ -2609,7 +2787,7 @@
           <p:cNvPr id="7" name="">
             <a:extLst xmlns:a="http://schemas.openxmlformats.org/drawingml/2006/main">
               <a:ext uri="{FF2B5EF4-FFF2-40B4-BE49-F238E27FC236}">
-                <a16:creationId xmlns:a16="http://schemas.microsoft.com/office/drawing/2014/main" id="{5ADB20EA-1C6E-4F71-A6BD-12BA55B5EACF}"/>
+                <a16:creationId xmlns:a16="http://schemas.microsoft.com/office/drawing/2014/main" id="{0275C12A-9E2D-407C-B127-855ADDD0C5EC}"/>
               </a:ext>
             </a:extLst>
           </p:cNvPr>
@@ -2697,7 +2875,7 @@
     </p:spTree>
     <p:extLst>
       <p:ext uri="{BB962C8B-B14F-4D97-AF65-F5344CB8AC3E}">
-        <p14:creationId xmlns:p14="http://schemas.microsoft.com/office/powerpoint/2010/main" val="1130092920"/>
+        <p14:creationId xmlns:p14="http://schemas.microsoft.com/office/powerpoint/2010/main" val="1276400313"/>
       </p:ext>
     </p:extLst>
   </p:cSld>
@@ -2728,7 +2906,7 @@
           <p:cNvPr id="1" name="">
             <a:extLst xmlns:a="http://schemas.openxmlformats.org/drawingml/2006/main">
               <a:ext uri="{FF2B5EF4-FFF2-40B4-BE49-F238E27FC236}">
-                <a16:creationId xmlns:a16="http://schemas.microsoft.com/office/drawing/2014/main" id="{742CF3A9-FAA1-4708-ABE7-588F6A5CEFDA}"/>
+                <a16:creationId xmlns:a16="http://schemas.microsoft.com/office/drawing/2014/main" id="{CAC9BA41-DF38-462A-B43F-02180A562CC3}"/>
               </a:ext>
             </a:extLst>
           </p:cNvPr>
@@ -2761,7 +2939,7 @@
           <p:cNvPr id="2" name="">
             <a:extLst xmlns:a="http://schemas.openxmlformats.org/drawingml/2006/main">
               <a:ext uri="{FF2B5EF4-FFF2-40B4-BE49-F238E27FC236}">
-                <a16:creationId xmlns:a16="http://schemas.microsoft.com/office/drawing/2014/main" id="{4F7127A9-5BF9-4D78-A8A3-75FF1D1C0AB3}"/>
+                <a16:creationId xmlns:a16="http://schemas.microsoft.com/office/drawing/2014/main" id="{1E061B4E-6101-4BC6-BAD9-97368024C2FF}"/>
               </a:ext>
             </a:extLst>
           </p:cNvPr>
@@ -2811,7 +2989,7 @@
           <p:cNvPr id="3" name="">
             <a:extLst xmlns:a="http://schemas.openxmlformats.org/drawingml/2006/main">
               <a:ext uri="{FF2B5EF4-FFF2-40B4-BE49-F238E27FC236}">
-                <a16:creationId xmlns:a16="http://schemas.microsoft.com/office/drawing/2014/main" id="{7BF7003C-EB38-4820-BC5F-D1D30900D49A}"/>
+                <a16:creationId xmlns:a16="http://schemas.microsoft.com/office/drawing/2014/main" id="{4915830D-DFEA-4EBB-AAA7-900CAA8E322E}"/>
               </a:ext>
             </a:extLst>
           </p:cNvPr>
@@ -2865,7 +3043,7 @@
           <p:nvPr/>
         </p:nvPicPr>
         <p:blipFill>
-          <a:blip xmlns:r="http://schemas.openxmlformats.org/officeDocument/2006/relationships" xmlns:a="http://schemas.openxmlformats.org/drawingml/2006/main" r:embed="Rbc232e621b51410c"/>
+          <a:blip xmlns:r="http://schemas.openxmlformats.org/officeDocument/2006/relationships" xmlns:a="http://schemas.openxmlformats.org/drawingml/2006/main" r:embed="R01b68f80172343c5"/>
           <a:stretch xmlns:a="http://schemas.openxmlformats.org/drawingml/2006/main"/>
         </p:blipFill>
         <p:spPr>
@@ -2887,7 +3065,7 @@
           <p:nvPr/>
         </p:nvPicPr>
         <p:blipFill>
-          <a:blip xmlns:r="http://schemas.openxmlformats.org/officeDocument/2006/relationships" xmlns:a="http://schemas.openxmlformats.org/drawingml/2006/main" r:embed="R44bcf28dfa0c48d6"/>
+          <a:blip xmlns:r="http://schemas.openxmlformats.org/officeDocument/2006/relationships" xmlns:a="http://schemas.openxmlformats.org/drawingml/2006/main" r:embed="R2d5440ea4a934441"/>
           <a:stretch xmlns:a="http://schemas.openxmlformats.org/drawingml/2006/main"/>
         </p:blipFill>
         <p:spPr>
@@ -2905,7 +3083,7 @@
           <p:cNvPr id="6" name="">
             <a:extLst xmlns:a="http://schemas.openxmlformats.org/drawingml/2006/main">
               <a:ext uri="{FF2B5EF4-FFF2-40B4-BE49-F238E27FC236}">
-                <a16:creationId xmlns:a16="http://schemas.microsoft.com/office/drawing/2014/main" id="{94E9BBA7-F9B7-4817-B04B-CE1DBFEC2C8A}"/>
+                <a16:creationId xmlns:a16="http://schemas.microsoft.com/office/drawing/2014/main" id="{9B29B90E-9655-4441-AB32-98BC91BDCCD2}"/>
               </a:ext>
             </a:extLst>
           </p:cNvPr>
@@ -2961,7 +3139,7 @@
           <p:cNvPr id="7" name="">
             <a:extLst xmlns:a="http://schemas.openxmlformats.org/drawingml/2006/main">
               <a:ext uri="{FF2B5EF4-FFF2-40B4-BE49-F238E27FC236}">
-                <a16:creationId xmlns:a16="http://schemas.microsoft.com/office/drawing/2014/main" id="{A309CB84-3CB0-47E5-9A6A-A27812E2561C}"/>
+                <a16:creationId xmlns:a16="http://schemas.microsoft.com/office/drawing/2014/main" id="{6EFC68E3-A9DB-43AD-AFD7-665E4ACE9AA6}"/>
               </a:ext>
             </a:extLst>
           </p:cNvPr>
@@ -3015,7 +3193,7 @@
     </p:spTree>
     <p:extLst>
       <p:ext uri="{BB962C8B-B14F-4D97-AF65-F5344CB8AC3E}">
-        <p14:creationId xmlns:p14="http://schemas.microsoft.com/office/powerpoint/2010/main" val="432132299"/>
+        <p14:creationId xmlns:p14="http://schemas.microsoft.com/office/powerpoint/2010/main" val="1733763815"/>
       </p:ext>
     </p:extLst>
   </p:cSld>
@@ -3046,7 +3224,7 @@
           <p:cNvPr id="1" name="">
             <a:extLst xmlns:a="http://schemas.openxmlformats.org/drawingml/2006/main">
               <a:ext uri="{FF2B5EF4-FFF2-40B4-BE49-F238E27FC236}">
-                <a16:creationId xmlns:a16="http://schemas.microsoft.com/office/drawing/2014/main" id="{55318779-EF65-408C-A1CF-79F011963424}"/>
+                <a16:creationId xmlns:a16="http://schemas.microsoft.com/office/drawing/2014/main" id="{506D84E1-CB5D-4DE7-88B5-4E7C19823D50}"/>
               </a:ext>
             </a:extLst>
           </p:cNvPr>
@@ -3079,7 +3257,7 @@
           <p:cNvPr id="2" name="">
             <a:extLst xmlns:a="http://schemas.openxmlformats.org/drawingml/2006/main">
               <a:ext uri="{FF2B5EF4-FFF2-40B4-BE49-F238E27FC236}">
-                <a16:creationId xmlns:a16="http://schemas.microsoft.com/office/drawing/2014/main" id="{AF3E0C22-AC5C-48DC-A50A-F7678679984A}"/>
+                <a16:creationId xmlns:a16="http://schemas.microsoft.com/office/drawing/2014/main" id="{DB96B38D-57F0-4083-A9E1-95B3FE49223E}"/>
               </a:ext>
             </a:extLst>
           </p:cNvPr>
@@ -3129,7 +3307,7 @@
           <p:cNvPr id="3" name="">
             <a:extLst xmlns:a="http://schemas.openxmlformats.org/drawingml/2006/main">
               <a:ext uri="{FF2B5EF4-FFF2-40B4-BE49-F238E27FC236}">
-                <a16:creationId xmlns:a16="http://schemas.microsoft.com/office/drawing/2014/main" id="{8E22EB6A-B25D-407A-AB54-1A53EA08B83C}"/>
+                <a16:creationId xmlns:a16="http://schemas.microsoft.com/office/drawing/2014/main" id="{C0DA027F-A1CD-440C-9FC1-B8D4805FAD4F}"/>
               </a:ext>
             </a:extLst>
           </p:cNvPr>
@@ -3183,7 +3361,7 @@
           <p:nvPr/>
         </p:nvPicPr>
         <p:blipFill>
-          <a:blip xmlns:r="http://schemas.openxmlformats.org/officeDocument/2006/relationships" xmlns:a="http://schemas.openxmlformats.org/drawingml/2006/main" r:embed="Rbeb47a48ee9b4889"/>
+          <a:blip xmlns:r="http://schemas.openxmlformats.org/officeDocument/2006/relationships" xmlns:a="http://schemas.openxmlformats.org/drawingml/2006/main" r:embed="Rfcc5c73875a54674"/>
           <a:stretch xmlns:a="http://schemas.openxmlformats.org/drawingml/2006/main"/>
         </p:blipFill>
         <p:spPr>
@@ -3201,7 +3379,7 @@
           <p:cNvPr id="5" name="">
             <a:extLst xmlns:a="http://schemas.openxmlformats.org/drawingml/2006/main">
               <a:ext uri="{FF2B5EF4-FFF2-40B4-BE49-F238E27FC236}">
-                <a16:creationId xmlns:a16="http://schemas.microsoft.com/office/drawing/2014/main" id="{1550F53C-A692-47E5-BA5F-E646B464F5E4}"/>
+                <a16:creationId xmlns:a16="http://schemas.microsoft.com/office/drawing/2014/main" id="{85449660-8C4E-45D9-9552-2B3D8AAF267F}"/>
               </a:ext>
             </a:extLst>
           </p:cNvPr>
@@ -3283,7 +3461,7 @@
     </p:spTree>
     <p:extLst>
       <p:ext uri="{BB962C8B-B14F-4D97-AF65-F5344CB8AC3E}">
-        <p14:creationId xmlns:p14="http://schemas.microsoft.com/office/powerpoint/2010/main" val="1698735486"/>
+        <p14:creationId xmlns:p14="http://schemas.microsoft.com/office/powerpoint/2010/main" val="277960311"/>
       </p:ext>
     </p:extLst>
   </p:cSld>
@@ -3314,7 +3492,7 @@
           <p:cNvPr id="1" name="">
             <a:extLst xmlns:a="http://schemas.openxmlformats.org/drawingml/2006/main">
               <a:ext uri="{FF2B5EF4-FFF2-40B4-BE49-F238E27FC236}">
-                <a16:creationId xmlns:a16="http://schemas.microsoft.com/office/drawing/2014/main" id="{F3D5EEA7-83FE-4A3D-B463-0629F5C0E73F}"/>
+                <a16:creationId xmlns:a16="http://schemas.microsoft.com/office/drawing/2014/main" id="{F521AB5A-1A99-4C79-B575-9728D78D8E1A}"/>
               </a:ext>
             </a:extLst>
           </p:cNvPr>
@@ -3347,7 +3525,7 @@
           <p:cNvPr id="2" name="">
             <a:extLst xmlns:a="http://schemas.openxmlformats.org/drawingml/2006/main">
               <a:ext uri="{FF2B5EF4-FFF2-40B4-BE49-F238E27FC236}">
-                <a16:creationId xmlns:a16="http://schemas.microsoft.com/office/drawing/2014/main" id="{E385370D-3FAD-4F67-A6E7-41C68F07049A}"/>
+                <a16:creationId xmlns:a16="http://schemas.microsoft.com/office/drawing/2014/main" id="{C412F3A2-E053-44B3-800E-6BB6AAA78814}"/>
               </a:ext>
             </a:extLst>
           </p:cNvPr>
@@ -3397,7 +3575,7 @@
           <p:cNvPr id="3" name="">
             <a:extLst xmlns:a="http://schemas.openxmlformats.org/drawingml/2006/main">
               <a:ext uri="{FF2B5EF4-FFF2-40B4-BE49-F238E27FC236}">
-                <a16:creationId xmlns:a16="http://schemas.microsoft.com/office/drawing/2014/main" id="{8D019093-E4CB-40A8-BDA4-11B4EC4FEF93}"/>
+                <a16:creationId xmlns:a16="http://schemas.microsoft.com/office/drawing/2014/main" id="{74EE20BB-6D04-4D79-95F0-2C4C36256A28}"/>
               </a:ext>
             </a:extLst>
           </p:cNvPr>
@@ -3447,7 +3625,7 @@
           <p:cNvPr id="4" name="">
             <a:extLst xmlns:a="http://schemas.openxmlformats.org/drawingml/2006/main">
               <a:ext uri="{FF2B5EF4-FFF2-40B4-BE49-F238E27FC236}">
-                <a16:creationId xmlns:a16="http://schemas.microsoft.com/office/drawing/2014/main" id="{65A7A7BB-5382-4A48-85C6-3E15E1626A98}"/>
+                <a16:creationId xmlns:a16="http://schemas.microsoft.com/office/drawing/2014/main" id="{54E6F4D8-72EF-494C-8FAF-89B045829E43}"/>
               </a:ext>
             </a:extLst>
           </p:cNvPr>
@@ -3503,7 +3681,7 @@
           <p:cNvPr id="5" name="">
             <a:extLst xmlns:a="http://schemas.openxmlformats.org/drawingml/2006/main">
               <a:ext uri="{FF2B5EF4-FFF2-40B4-BE49-F238E27FC236}">
-                <a16:creationId xmlns:a16="http://schemas.microsoft.com/office/drawing/2014/main" id="{13973299-D7E4-49D5-B317-C0D22D76DEA3}"/>
+                <a16:creationId xmlns:a16="http://schemas.microsoft.com/office/drawing/2014/main" id="{7DD7D5B2-AE4C-4695-9E33-21796282FC59}"/>
               </a:ext>
             </a:extLst>
           </p:cNvPr>
@@ -3559,7 +3737,7 @@
           <p:cNvPr id="6" name="">
             <a:extLst xmlns:a="http://schemas.openxmlformats.org/drawingml/2006/main">
               <a:ext uri="{FF2B5EF4-FFF2-40B4-BE49-F238E27FC236}">
-                <a16:creationId xmlns:a16="http://schemas.microsoft.com/office/drawing/2014/main" id="{9BE3AC77-029F-42FD-B69C-DBD0E4D09094}"/>
+                <a16:creationId xmlns:a16="http://schemas.microsoft.com/office/drawing/2014/main" id="{00E64658-828B-459F-B223-8591DB76D3A0}"/>
               </a:ext>
             </a:extLst>
           </p:cNvPr>
@@ -3615,7 +3793,7 @@
           <p:cNvPr id="7" name="">
             <a:extLst xmlns:a="http://schemas.openxmlformats.org/drawingml/2006/main">
               <a:ext uri="{FF2B5EF4-FFF2-40B4-BE49-F238E27FC236}">
-                <a16:creationId xmlns:a16="http://schemas.microsoft.com/office/drawing/2014/main" id="{964AB65B-B777-40C1-8B04-6CC58ED3D387}"/>
+                <a16:creationId xmlns:a16="http://schemas.microsoft.com/office/drawing/2014/main" id="{5C19A39E-4CA2-4486-B15B-3FEE1A7C5ACA}"/>
               </a:ext>
             </a:extLst>
           </p:cNvPr>
@@ -3671,7 +3849,7 @@
           <p:cNvPr id="8" name="">
             <a:extLst xmlns:a="http://schemas.openxmlformats.org/drawingml/2006/main">
               <a:ext uri="{FF2B5EF4-FFF2-40B4-BE49-F238E27FC236}">
-                <a16:creationId xmlns:a16="http://schemas.microsoft.com/office/drawing/2014/main" id="{39D8EE02-1C7B-4939-8D9D-049B2548DBA0}"/>
+                <a16:creationId xmlns:a16="http://schemas.microsoft.com/office/drawing/2014/main" id="{D27DFBF8-2764-4556-AF97-E06497D3CAC7}"/>
               </a:ext>
             </a:extLst>
           </p:cNvPr>
@@ -3727,7 +3905,7 @@
           <p:cNvPr id="9" name="">
             <a:extLst xmlns:a="http://schemas.openxmlformats.org/drawingml/2006/main">
               <a:ext uri="{FF2B5EF4-FFF2-40B4-BE49-F238E27FC236}">
-                <a16:creationId xmlns:a16="http://schemas.microsoft.com/office/drawing/2014/main" id="{6742543D-8D53-454B-A467-3685F057963D}"/>
+                <a16:creationId xmlns:a16="http://schemas.microsoft.com/office/drawing/2014/main" id="{0D353F52-8FBF-4596-87B5-FE2C56C0BAC7}"/>
               </a:ext>
             </a:extLst>
           </p:cNvPr>
@@ -3783,7 +3961,7 @@
           <p:cNvPr id="10" name="">
             <a:extLst xmlns:a="http://schemas.openxmlformats.org/drawingml/2006/main">
               <a:ext uri="{FF2B5EF4-FFF2-40B4-BE49-F238E27FC236}">
-                <a16:creationId xmlns:a16="http://schemas.microsoft.com/office/drawing/2014/main" id="{49AAA845-8C3E-45DD-8D18-499B43A85249}"/>
+                <a16:creationId xmlns:a16="http://schemas.microsoft.com/office/drawing/2014/main" id="{6FF7D678-5361-437E-B155-8CA0B9DD47E1}"/>
               </a:ext>
             </a:extLst>
           </p:cNvPr>
@@ -3839,7 +4017,7 @@
           <p:cNvPr id="11" name="">
             <a:extLst xmlns:a="http://schemas.openxmlformats.org/drawingml/2006/main">
               <a:ext uri="{FF2B5EF4-FFF2-40B4-BE49-F238E27FC236}">
-                <a16:creationId xmlns:a16="http://schemas.microsoft.com/office/drawing/2014/main" id="{D72D0E6F-1A27-497A-A17E-13FBB7C0DEBC}"/>
+                <a16:creationId xmlns:a16="http://schemas.microsoft.com/office/drawing/2014/main" id="{10C377A9-4222-45F2-9A8A-53079439FE39}"/>
               </a:ext>
             </a:extLst>
           </p:cNvPr>
@@ -3895,7 +4073,7 @@
           <p:cNvPr id="12" name="">
             <a:extLst xmlns:a="http://schemas.openxmlformats.org/drawingml/2006/main">
               <a:ext uri="{FF2B5EF4-FFF2-40B4-BE49-F238E27FC236}">
-                <a16:creationId xmlns:a16="http://schemas.microsoft.com/office/drawing/2014/main" id="{5F10A45D-0BDE-4B86-ACE4-DAEF9CAD1FFE}"/>
+                <a16:creationId xmlns:a16="http://schemas.microsoft.com/office/drawing/2014/main" id="{B4BEB8AE-B6E0-4C81-B5A4-FC99ABDD6666}"/>
               </a:ext>
             </a:extLst>
           </p:cNvPr>
@@ -3951,7 +4129,7 @@
           <p:cNvPr id="13" name="">
             <a:extLst xmlns:a="http://schemas.openxmlformats.org/drawingml/2006/main">
               <a:ext uri="{FF2B5EF4-FFF2-40B4-BE49-F238E27FC236}">
-                <a16:creationId xmlns:a16="http://schemas.microsoft.com/office/drawing/2014/main" id="{BF4D367C-DAD8-41CD-8B0F-69AD463D1F29}"/>
+                <a16:creationId xmlns:a16="http://schemas.microsoft.com/office/drawing/2014/main" id="{EEB8AE74-8CDE-451C-8986-45F309F89F6A}"/>
               </a:ext>
             </a:extLst>
           </p:cNvPr>
@@ -4007,7 +4185,7 @@
           <p:cNvPr id="14" name="">
             <a:extLst xmlns:a="http://schemas.openxmlformats.org/drawingml/2006/main">
               <a:ext uri="{FF2B5EF4-FFF2-40B4-BE49-F238E27FC236}">
-                <a16:creationId xmlns:a16="http://schemas.microsoft.com/office/drawing/2014/main" id="{ABFC9597-5A61-47EB-BA21-58792EE6450D}"/>
+                <a16:creationId xmlns:a16="http://schemas.microsoft.com/office/drawing/2014/main" id="{948297CC-0B36-4821-A8D7-1C04E72BAD6C}"/>
               </a:ext>
             </a:extLst>
           </p:cNvPr>
@@ -4063,7 +4241,7 @@
           <p:cNvPr id="15" name="">
             <a:extLst xmlns:a="http://schemas.openxmlformats.org/drawingml/2006/main">
               <a:ext uri="{FF2B5EF4-FFF2-40B4-BE49-F238E27FC236}">
-                <a16:creationId xmlns:a16="http://schemas.microsoft.com/office/drawing/2014/main" id="{DF45B637-9846-4122-B7DA-3CB4F043865A}"/>
+                <a16:creationId xmlns:a16="http://schemas.microsoft.com/office/drawing/2014/main" id="{BEB60329-C206-46C2-B106-C2275329F27F}"/>
               </a:ext>
             </a:extLst>
           </p:cNvPr>
@@ -4119,7 +4297,7 @@
           <p:cNvPr id="16" name="">
             <a:extLst xmlns:a="http://schemas.openxmlformats.org/drawingml/2006/main">
               <a:ext uri="{FF2B5EF4-FFF2-40B4-BE49-F238E27FC236}">
-                <a16:creationId xmlns:a16="http://schemas.microsoft.com/office/drawing/2014/main" id="{D3423359-02AF-4794-8386-C820A5DEFF59}"/>
+                <a16:creationId xmlns:a16="http://schemas.microsoft.com/office/drawing/2014/main" id="{AF0E914C-DD4A-4F3C-BAA1-1B1316898B7A}"/>
               </a:ext>
             </a:extLst>
           </p:cNvPr>
@@ -4175,7 +4353,7 @@
           <p:cNvPr id="17" name="">
             <a:extLst xmlns:a="http://schemas.openxmlformats.org/drawingml/2006/main">
               <a:ext uri="{FF2B5EF4-FFF2-40B4-BE49-F238E27FC236}">
-                <a16:creationId xmlns:a16="http://schemas.microsoft.com/office/drawing/2014/main" id="{2DC4847D-B1B4-4A00-B8DB-4D979B67EFCA}"/>
+                <a16:creationId xmlns:a16="http://schemas.microsoft.com/office/drawing/2014/main" id="{BE922049-9EA7-4FAF-A073-5CB3C940CF2B}"/>
               </a:ext>
             </a:extLst>
           </p:cNvPr>
@@ -4231,7 +4409,7 @@
           <p:cNvPr id="18" name="">
             <a:extLst xmlns:a="http://schemas.openxmlformats.org/drawingml/2006/main">
               <a:ext uri="{FF2B5EF4-FFF2-40B4-BE49-F238E27FC236}">
-                <a16:creationId xmlns:a16="http://schemas.microsoft.com/office/drawing/2014/main" id="{3BF9FFE3-D416-421C-86AC-B4414BE7D6C2}"/>
+                <a16:creationId xmlns:a16="http://schemas.microsoft.com/office/drawing/2014/main" id="{8BE8C141-5565-4743-9721-7605E82A3EAD}"/>
               </a:ext>
             </a:extLst>
           </p:cNvPr>
@@ -4285,7 +4463,7 @@
     </p:spTree>
     <p:extLst>
       <p:ext uri="{BB962C8B-B14F-4D97-AF65-F5344CB8AC3E}">
-        <p14:creationId xmlns:p14="http://schemas.microsoft.com/office/powerpoint/2010/main" val="2113783809"/>
+        <p14:creationId xmlns:p14="http://schemas.microsoft.com/office/powerpoint/2010/main" val="135056383"/>
       </p:ext>
     </p:extLst>
   </p:cSld>
@@ -4316,7 +4494,7 @@
           <p:cNvPr id="1" name="">
             <a:extLst xmlns:a="http://schemas.openxmlformats.org/drawingml/2006/main">
               <a:ext uri="{FF2B5EF4-FFF2-40B4-BE49-F238E27FC236}">
-                <a16:creationId xmlns:a16="http://schemas.microsoft.com/office/drawing/2014/main" id="{250BD90B-F9A2-4111-8943-BA24971EE965}"/>
+                <a16:creationId xmlns:a16="http://schemas.microsoft.com/office/drawing/2014/main" id="{9C50E365-2839-43DF-9869-6668FD2EA176}"/>
               </a:ext>
             </a:extLst>
           </p:cNvPr>
@@ -4349,7 +4527,7 @@
           <p:cNvPr id="2" name="">
             <a:extLst xmlns:a="http://schemas.openxmlformats.org/drawingml/2006/main">
               <a:ext uri="{FF2B5EF4-FFF2-40B4-BE49-F238E27FC236}">
-                <a16:creationId xmlns:a16="http://schemas.microsoft.com/office/drawing/2014/main" id="{0EA8529F-7193-4B68-B9B2-5050DE2ED7A7}"/>
+                <a16:creationId xmlns:a16="http://schemas.microsoft.com/office/drawing/2014/main" id="{A1242DDA-E33B-4492-9113-8BB0F99100CA}"/>
               </a:ext>
             </a:extLst>
           </p:cNvPr>
@@ -4399,7 +4577,7 @@
           <p:cNvPr id="3" name="">
             <a:extLst xmlns:a="http://schemas.openxmlformats.org/drawingml/2006/main">
               <a:ext uri="{FF2B5EF4-FFF2-40B4-BE49-F238E27FC236}">
-                <a16:creationId xmlns:a16="http://schemas.microsoft.com/office/drawing/2014/main" id="{E673D707-85EB-45B9-AB3B-16C8BB2EB309}"/>
+                <a16:creationId xmlns:a16="http://schemas.microsoft.com/office/drawing/2014/main" id="{567D1DFC-06CB-492F-83C3-747D91CC4968}"/>
               </a:ext>
             </a:extLst>
           </p:cNvPr>
@@ -4449,7 +4627,7 @@
           <p:cNvPr id="4" name="">
             <a:extLst xmlns:a="http://schemas.openxmlformats.org/drawingml/2006/main">
               <a:ext uri="{FF2B5EF4-FFF2-40B4-BE49-F238E27FC236}">
-                <a16:creationId xmlns:a16="http://schemas.microsoft.com/office/drawing/2014/main" id="{133B6071-1CFD-40C8-B972-8600600B7FCD}"/>
+                <a16:creationId xmlns:a16="http://schemas.microsoft.com/office/drawing/2014/main" id="{AE3921A0-FCE0-4248-88E7-5C02189BE4FC}"/>
               </a:ext>
             </a:extLst>
           </p:cNvPr>
@@ -4533,7 +4711,7 @@
           <p:cNvPr id="5" name="">
             <a:extLst xmlns:a="http://schemas.openxmlformats.org/drawingml/2006/main">
               <a:ext uri="{FF2B5EF4-FFF2-40B4-BE49-F238E27FC236}">
-                <a16:creationId xmlns:a16="http://schemas.microsoft.com/office/drawing/2014/main" id="{E9C5217C-7E91-469F-8BDE-6BCC58457701}"/>
+                <a16:creationId xmlns:a16="http://schemas.microsoft.com/office/drawing/2014/main" id="{EF69BF13-F5F4-4F31-B5F6-A6115BFCB5F3}"/>
               </a:ext>
             </a:extLst>
           </p:cNvPr>
@@ -4657,7 +4835,7 @@
           <p:cNvPr id="6" name="">
             <a:extLst xmlns:a="http://schemas.openxmlformats.org/drawingml/2006/main">
               <a:ext uri="{FF2B5EF4-FFF2-40B4-BE49-F238E27FC236}">
-                <a16:creationId xmlns:a16="http://schemas.microsoft.com/office/drawing/2014/main" id="{19064146-6404-47CA-83A5-3A53C1F12C36}"/>
+                <a16:creationId xmlns:a16="http://schemas.microsoft.com/office/drawing/2014/main" id="{7563C014-71CA-429A-B505-E0640B2489D2}"/>
               </a:ext>
             </a:extLst>
           </p:cNvPr>
@@ -4705,7 +4883,7 @@
     </p:spTree>
     <p:extLst>
       <p:ext uri="{BB962C8B-B14F-4D97-AF65-F5344CB8AC3E}">
-        <p14:creationId xmlns:p14="http://schemas.microsoft.com/office/powerpoint/2010/main" val="584521076"/>
+        <p14:creationId xmlns:p14="http://schemas.microsoft.com/office/powerpoint/2010/main" val="1461333662"/>
       </p:ext>
     </p:extLst>
   </p:cSld>
@@ -4736,7 +4914,7 @@
           <p:cNvPr id="1" name="">
             <a:extLst xmlns:a="http://schemas.openxmlformats.org/drawingml/2006/main">
               <a:ext uri="{FF2B5EF4-FFF2-40B4-BE49-F238E27FC236}">
-                <a16:creationId xmlns:a16="http://schemas.microsoft.com/office/drawing/2014/main" id="{9E7D7320-71E0-47E3-81AF-BE393B6D2148}"/>
+                <a16:creationId xmlns:a16="http://schemas.microsoft.com/office/drawing/2014/main" id="{D12391DE-82B1-4B8C-A9CA-D25C0F4B7A6A}"/>
               </a:ext>
             </a:extLst>
           </p:cNvPr>
@@ -4769,7 +4947,7 @@
           <p:cNvPr id="2" name="">
             <a:extLst xmlns:a="http://schemas.openxmlformats.org/drawingml/2006/main">
               <a:ext uri="{FF2B5EF4-FFF2-40B4-BE49-F238E27FC236}">
-                <a16:creationId xmlns:a16="http://schemas.microsoft.com/office/drawing/2014/main" id="{B150F032-A785-4B2C-A243-0414AA74D5A3}"/>
+                <a16:creationId xmlns:a16="http://schemas.microsoft.com/office/drawing/2014/main" id="{155CACBC-9372-411D-818D-EAD77E8FABE7}"/>
               </a:ext>
             </a:extLst>
           </p:cNvPr>
@@ -4809,7 +4987,7 @@
                   <a:srgbClr val="FFFFFF"/>
                 </a:solidFill>
               </a:rPr>
-              <a:t>Mục tiêu và bố cục</a:t>
+              <a:t>Mục tiêu, phạm vi và sản phẩm</a:t>
             </a:r>
           </a:p>
         </p:txBody>
@@ -4819,7 +4997,7 @@
           <p:cNvPr id="3" name="">
             <a:extLst xmlns:a="http://schemas.openxmlformats.org/drawingml/2006/main">
               <a:ext uri="{FF2B5EF4-FFF2-40B4-BE49-F238E27FC236}">
-                <a16:creationId xmlns:a16="http://schemas.microsoft.com/office/drawing/2014/main" id="{FBD5E62B-96FD-46A9-B8A9-0A47ED6EE4DE}"/>
+                <a16:creationId xmlns:a16="http://schemas.microsoft.com/office/drawing/2014/main" id="{7D87C80F-39F2-4BB7-BACA-3DD5DE51AA0B}"/>
               </a:ext>
             </a:extLst>
           </p:cNvPr>
@@ -4869,19 +5047,19 @@
           <p:cNvPr id="4" name="">
             <a:extLst xmlns:a="http://schemas.openxmlformats.org/drawingml/2006/main">
               <a:ext uri="{FF2B5EF4-FFF2-40B4-BE49-F238E27FC236}">
-                <a16:creationId xmlns:a16="http://schemas.microsoft.com/office/drawing/2014/main" id="{25F432F2-9332-416D-BF3D-9AA6C499538E}"/>
-              </a:ext>
-            </a:extLst>
-          </p:cNvPr>
-          <p:cNvSpPr>
-            <a:spLocks xmlns:a="http://schemas.openxmlformats.org/drawingml/2006/main" noGrp="1"/>
-          </p:cNvSpPr>
-          <p:nvPr/>
-        </p:nvSpPr>
-        <p:spPr>
-          <a:xfrm xmlns:a="http://schemas.openxmlformats.org/drawingml/2006/main">
-            <a:off x="762000" y="1285875"/>
-            <a:ext cx="7239000" cy="2476500"/>
+                <a16:creationId xmlns:a16="http://schemas.microsoft.com/office/drawing/2014/main" id="{CACA0CA6-90D1-4E93-A428-32048BAC830D}"/>
+              </a:ext>
+            </a:extLst>
+          </p:cNvPr>
+          <p:cNvSpPr>
+            <a:spLocks xmlns:a="http://schemas.openxmlformats.org/drawingml/2006/main" noGrp="1"/>
+          </p:cNvSpPr>
+          <p:nvPr/>
+        </p:nvSpPr>
+        <p:spPr>
+          <a:xfrm xmlns:a="http://schemas.openxmlformats.org/drawingml/2006/main">
+            <a:off x="685800" y="809625"/>
+            <a:ext cx="9715500" cy="400050"/>
           </a:xfrm>
           <a:prstGeom xmlns:a="http://schemas.openxmlformats.org/drawingml/2006/main" prst="rect">
             <a:avLst/>
@@ -4897,70 +5075,19 @@
           <a:lstStyle xmlns:a="http://schemas.openxmlformats.org/drawingml/2006/main"/>
           <a:p xmlns:a="http://schemas.openxmlformats.org/drawingml/2006/main">
             <a:pPr algn="l">
-              <a:defRPr sz="1950" b="0">
-                <a:solidFill>
-                  <a:srgbClr val="17324D"/>
-                </a:solidFill>
-              </a:defRPr>
-            </a:pPr>
-            <a:r>
-              <a:rPr sz="1950" b="0">
-                <a:solidFill>
-                  <a:srgbClr val="17324D"/>
-                </a:solidFill>
-              </a:rPr>
-              <a:t>• Tổng quan điện toán đám mây và mô hình chia sẻ trách nhiệm</a:t>
-            </a:r>
-          </a:p>
-          <a:p xmlns:a="http://schemas.openxmlformats.org/drawingml/2006/main">
-            <a:pPr algn="l">
-              <a:defRPr sz="1950" b="0">
-                <a:solidFill>
-                  <a:srgbClr val="17324D"/>
-                </a:solidFill>
-              </a:defRPr>
-            </a:pPr>
-            <a:r>
-              <a:rPr sz="1950" b="0">
-                <a:solidFill>
-                  <a:srgbClr val="17324D"/>
-                </a:solidFill>
-              </a:rPr>
-              <a:t>• Phân tích rủi ro: public bucket, IAM sai, credential leakage</a:t>
-            </a:r>
-          </a:p>
-          <a:p xmlns:a="http://schemas.openxmlformats.org/drawingml/2006/main">
-            <a:pPr algn="l">
-              <a:defRPr sz="1950" b="0">
-                <a:solidFill>
-                  <a:srgbClr val="17324D"/>
-                </a:solidFill>
-              </a:defRPr>
-            </a:pPr>
-            <a:r>
-              <a:rPr sz="1950" b="0">
-                <a:solidFill>
-                  <a:srgbClr val="17324D"/>
-                </a:solidFill>
-              </a:rPr>
-              <a:t>• Xây dựng lab demo bằng Docker Compose</a:t>
-            </a:r>
-          </a:p>
-          <a:p xmlns:a="http://schemas.openxmlformats.org/drawingml/2006/main">
-            <a:pPr algn="l">
-              <a:defRPr sz="1950" b="0">
-                <a:solidFill>
-                  <a:srgbClr val="17324D"/>
-                </a:solidFill>
-              </a:defRPr>
-            </a:pPr>
-            <a:r>
-              <a:rPr sz="1950" b="0">
-                <a:solidFill>
-                  <a:srgbClr val="17324D"/>
-                </a:solidFill>
-              </a:rPr>
-              <a:t>• So sánh trạng thái vulnerable và fixed</a:t>
+              <a:defRPr sz="1650" b="0">
+                <a:solidFill>
+                  <a:srgbClr val="5F6B7A"/>
+                </a:solidFill>
+              </a:defRPr>
+            </a:pPr>
+            <a:r>
+              <a:rPr sz="1650" b="0">
+                <a:solidFill>
+                  <a:srgbClr val="5F6B7A"/>
+                </a:solidFill>
+              </a:rPr>
+              <a:t>Đề tài không chỉ tổng hợp lý thuyết, mà có môi trường demo để quan sát lỗi cấu hình và cách khắc phục.</a:t>
             </a:r>
           </a:p>
         </p:txBody>
@@ -4970,27 +5097,27 @@
           <p:cNvPr id="5" name="">
             <a:extLst xmlns:a="http://schemas.openxmlformats.org/drawingml/2006/main">
               <a:ext uri="{FF2B5EF4-FFF2-40B4-BE49-F238E27FC236}">
-                <a16:creationId xmlns:a16="http://schemas.microsoft.com/office/drawing/2014/main" id="{3660EAE3-9C69-476D-9D0F-002B1251FD21}"/>
-              </a:ext>
-            </a:extLst>
-          </p:cNvPr>
-          <p:cNvSpPr>
-            <a:spLocks xmlns:a="http://schemas.openxmlformats.org/drawingml/2006/main" noGrp="1"/>
-          </p:cNvSpPr>
-          <p:nvPr/>
-        </p:nvSpPr>
-        <p:spPr>
-          <a:xfrm xmlns:a="http://schemas.openxmlformats.org/drawingml/2006/main">
-            <a:off x="8334375" y="1381125"/>
-            <a:ext cx="2667000" cy="2667000"/>
+                <a16:creationId xmlns:a16="http://schemas.microsoft.com/office/drawing/2014/main" id="{294517C2-5C62-4BC7-8CCD-99DDE3A8AE5A}"/>
+              </a:ext>
+            </a:extLst>
+          </p:cNvPr>
+          <p:cNvSpPr>
+            <a:spLocks xmlns:a="http://schemas.openxmlformats.org/drawingml/2006/main" noGrp="1"/>
+          </p:cNvSpPr>
+          <p:nvPr/>
+        </p:nvSpPr>
+        <p:spPr>
+          <a:xfrm xmlns:a="http://schemas.openxmlformats.org/drawingml/2006/main">
+            <a:off x="742950" y="1504950"/>
+            <a:ext cx="2857500" cy="876300"/>
           </a:xfrm>
           <a:prstGeom xmlns:a="http://schemas.openxmlformats.org/drawingml/2006/main" prst="roundRect">
             <a:avLst>
-              <a:gd name="adj" fmla="val 2857"/>
+              <a:gd name="adj" fmla="val 8696"/>
             </a:avLst>
           </a:prstGeom>
           <a:solidFill xmlns:a="http://schemas.openxmlformats.org/drawingml/2006/main">
-            <a:srgbClr val="F4F8FC"/>
+            <a:srgbClr val="EEF4FA"/>
           </a:solidFill>
           <a:ln xmlns:a="http://schemas.openxmlformats.org/drawingml/2006/main" w="9525">
             <a:solidFill>
@@ -5016,7 +5143,7 @@
                   <a:srgbClr val="1F4E79"/>
                 </a:solidFill>
               </a:rPr>
-              <a:t>Luồng trình bày</a:t>
+              <a:t>1</a:t>
             </a:r>
           </a:p>
           <a:p xmlns:a="http://schemas.openxmlformats.org/drawingml/2006/main">
@@ -5033,58 +5160,461 @@
                   <a:srgbClr val="1F4E79"/>
                 </a:solidFill>
               </a:rPr>
-              <a:t>1. Lý thuyết</a:t>
-            </a:r>
-          </a:p>
+              <a:t>Nền tảng cloud</a:t>
+            </a:r>
+          </a:p>
+        </p:txBody>
+      </p:sp>
+      <p:sp>
+        <p:nvSpPr>
+          <p:cNvPr id="6" name="">
+            <a:extLst xmlns:a="http://schemas.openxmlformats.org/drawingml/2006/main">
+              <a:ext uri="{FF2B5EF4-FFF2-40B4-BE49-F238E27FC236}">
+                <a16:creationId xmlns:a16="http://schemas.microsoft.com/office/drawing/2014/main" id="{99ECBA77-6CA1-4712-BBA1-7383DFB070E1}"/>
+              </a:ext>
+            </a:extLst>
+          </p:cNvPr>
+          <p:cNvSpPr>
+            <a:spLocks xmlns:a="http://schemas.openxmlformats.org/drawingml/2006/main" noGrp="1"/>
+          </p:cNvSpPr>
+          <p:nvPr/>
+        </p:nvSpPr>
+        <p:spPr>
+          <a:xfrm xmlns:a="http://schemas.openxmlformats.org/drawingml/2006/main">
+            <a:off x="876300" y="2619375"/>
+            <a:ext cx="2667000" cy="1143000"/>
+          </a:xfrm>
+          <a:prstGeom xmlns:a="http://schemas.openxmlformats.org/drawingml/2006/main" prst="rect">
+            <a:avLst/>
+          </a:prstGeom>
+          <a:noFill xmlns:a="http://schemas.openxmlformats.org/drawingml/2006/main"/>
+          <a:ln xmlns:a="http://schemas.openxmlformats.org/drawingml/2006/main" w="0">
+            <a:noFill/>
+            <a:prstDash val="solid"/>
+          </a:ln>
+        </p:spPr>
+        <p:txBody>
+          <a:bodyPr xmlns:a="http://schemas.openxmlformats.org/drawingml/2006/main"/>
+          <a:lstStyle xmlns:a="http://schemas.openxmlformats.org/drawingml/2006/main"/>
+          <a:p xmlns:a="http://schemas.openxmlformats.org/drawingml/2006/main">
+            <a:pPr algn="l">
+              <a:defRPr sz="1500" b="0">
+                <a:solidFill>
+                  <a:srgbClr val="17324D"/>
+                </a:solidFill>
+              </a:defRPr>
+            </a:pPr>
+            <a:r>
+              <a:rPr sz="1500" b="0">
+                <a:solidFill>
+                  <a:srgbClr val="17324D"/>
+                </a:solidFill>
+              </a:rPr>
+              <a:t>• IaaS, PaaS, SaaS</a:t>
+            </a:r>
+          </a:p>
+          <a:p xmlns:a="http://schemas.openxmlformats.org/drawingml/2006/main">
+            <a:pPr algn="l">
+              <a:defRPr sz="1500" b="0">
+                <a:solidFill>
+                  <a:srgbClr val="17324D"/>
+                </a:solidFill>
+              </a:defRPr>
+            </a:pPr>
+            <a:r>
+              <a:rPr sz="1500" b="0">
+                <a:solidFill>
+                  <a:srgbClr val="17324D"/>
+                </a:solidFill>
+              </a:rPr>
+              <a:t>• Public, Private, Hybrid</a:t>
+            </a:r>
+          </a:p>
+          <a:p xmlns:a="http://schemas.openxmlformats.org/drawingml/2006/main">
+            <a:pPr algn="l">
+              <a:defRPr sz="1500" b="0">
+                <a:solidFill>
+                  <a:srgbClr val="17324D"/>
+                </a:solidFill>
+              </a:defRPr>
+            </a:pPr>
+            <a:r>
+              <a:rPr sz="1500" b="0">
+                <a:solidFill>
+                  <a:srgbClr val="17324D"/>
+                </a:solidFill>
+              </a:rPr>
+              <a:t>• Shared Responsibility Model</a:t>
+            </a:r>
+          </a:p>
+        </p:txBody>
+      </p:sp>
+      <p:sp>
+        <p:nvSpPr>
+          <p:cNvPr id="7" name="">
+            <a:extLst xmlns:a="http://schemas.openxmlformats.org/drawingml/2006/main">
+              <a:ext uri="{FF2B5EF4-FFF2-40B4-BE49-F238E27FC236}">
+                <a16:creationId xmlns:a16="http://schemas.microsoft.com/office/drawing/2014/main" id="{25AC8F2D-6911-4580-ADB3-C32815646DF4}"/>
+              </a:ext>
+            </a:extLst>
+          </p:cNvPr>
+          <p:cNvSpPr>
+            <a:spLocks xmlns:a="http://schemas.openxmlformats.org/drawingml/2006/main" noGrp="1"/>
+          </p:cNvSpPr>
+          <p:nvPr/>
+        </p:nvSpPr>
+        <p:spPr>
+          <a:xfrm xmlns:a="http://schemas.openxmlformats.org/drawingml/2006/main">
+            <a:off x="4667250" y="1504950"/>
+            <a:ext cx="2857500" cy="876300"/>
+          </a:xfrm>
+          <a:prstGeom xmlns:a="http://schemas.openxmlformats.org/drawingml/2006/main" prst="roundRect">
+            <a:avLst>
+              <a:gd name="adj" fmla="val 8696"/>
+            </a:avLst>
+          </a:prstGeom>
+          <a:solidFill xmlns:a="http://schemas.openxmlformats.org/drawingml/2006/main">
+            <a:srgbClr val="FFF2F0"/>
+          </a:solidFill>
+          <a:ln xmlns:a="http://schemas.openxmlformats.org/drawingml/2006/main" w="9525">
+            <a:solidFill>
+              <a:srgbClr val="B3261E"/>
+            </a:solidFill>
+            <a:prstDash val="solid"/>
+          </a:ln>
+        </p:spPr>
+        <p:txBody>
+          <a:bodyPr xmlns:a="http://schemas.openxmlformats.org/drawingml/2006/main"/>
+          <a:lstStyle xmlns:a="http://schemas.openxmlformats.org/drawingml/2006/main"/>
           <a:p xmlns:a="http://schemas.openxmlformats.org/drawingml/2006/main">
             <a:pPr algn="ctr">
               <a:defRPr sz="1800" b="1">
                 <a:solidFill>
-                  <a:srgbClr val="1F4E79"/>
+                  <a:srgbClr val="B3261E"/>
                 </a:solidFill>
               </a:defRPr>
             </a:pPr>
             <a:r>
               <a:rPr sz="1800" b="1">
                 <a:solidFill>
-                  <a:srgbClr val="1F4E79"/>
-                </a:solidFill>
-              </a:rPr>
-              <a:t>2. Rủi ro</a:t>
+                  <a:srgbClr val="B3261E"/>
+                </a:solidFill>
+              </a:rPr>
+              <a:t>2</a:t>
             </a:r>
           </a:p>
           <a:p xmlns:a="http://schemas.openxmlformats.org/drawingml/2006/main">
             <a:pPr algn="ctr">
               <a:defRPr sz="1800" b="1">
                 <a:solidFill>
-                  <a:srgbClr val="1F4E79"/>
+                  <a:srgbClr val="B3261E"/>
                 </a:solidFill>
               </a:defRPr>
             </a:pPr>
             <a:r>
               <a:rPr sz="1800" b="1">
                 <a:solidFill>
-                  <a:srgbClr val="1F4E79"/>
-                </a:solidFill>
-              </a:rPr>
-              <a:t>3. Demo</a:t>
-            </a:r>
-          </a:p>
+                  <a:srgbClr val="B3261E"/>
+                </a:solidFill>
+              </a:rPr>
+              <a:t>Rủi ro bảo mật</a:t>
+            </a:r>
+          </a:p>
+        </p:txBody>
+      </p:sp>
+      <p:sp>
+        <p:nvSpPr>
+          <p:cNvPr id="8" name="">
+            <a:extLst xmlns:a="http://schemas.openxmlformats.org/drawingml/2006/main">
+              <a:ext uri="{FF2B5EF4-FFF2-40B4-BE49-F238E27FC236}">
+                <a16:creationId xmlns:a16="http://schemas.microsoft.com/office/drawing/2014/main" id="{5768B880-C72E-4B5D-ADB1-B904B109F3DD}"/>
+              </a:ext>
+            </a:extLst>
+          </p:cNvPr>
+          <p:cNvSpPr>
+            <a:spLocks xmlns:a="http://schemas.openxmlformats.org/drawingml/2006/main" noGrp="1"/>
+          </p:cNvSpPr>
+          <p:nvPr/>
+        </p:nvSpPr>
+        <p:spPr>
+          <a:xfrm xmlns:a="http://schemas.openxmlformats.org/drawingml/2006/main">
+            <a:off x="4810125" y="2619375"/>
+            <a:ext cx="2667000" cy="1143000"/>
+          </a:xfrm>
+          <a:prstGeom xmlns:a="http://schemas.openxmlformats.org/drawingml/2006/main" prst="rect">
+            <a:avLst/>
+          </a:prstGeom>
+          <a:noFill xmlns:a="http://schemas.openxmlformats.org/drawingml/2006/main"/>
+          <a:ln xmlns:a="http://schemas.openxmlformats.org/drawingml/2006/main" w="0">
+            <a:noFill/>
+            <a:prstDash val="solid"/>
+          </a:ln>
+        </p:spPr>
+        <p:txBody>
+          <a:bodyPr xmlns:a="http://schemas.openxmlformats.org/drawingml/2006/main"/>
+          <a:lstStyle xmlns:a="http://schemas.openxmlformats.org/drawingml/2006/main"/>
+          <a:p xmlns:a="http://schemas.openxmlformats.org/drawingml/2006/main">
+            <a:pPr algn="l">
+              <a:defRPr sz="1500" b="0">
+                <a:solidFill>
+                  <a:srgbClr val="17324D"/>
+                </a:solidFill>
+              </a:defRPr>
+            </a:pPr>
+            <a:r>
+              <a:rPr sz="1500" b="0">
+                <a:solidFill>
+                  <a:srgbClr val="17324D"/>
+                </a:solidFill>
+              </a:rPr>
+              <a:t>• Public Storage Bucket</a:t>
+            </a:r>
+          </a:p>
+          <a:p xmlns:a="http://schemas.openxmlformats.org/drawingml/2006/main">
+            <a:pPr algn="l">
+              <a:defRPr sz="1500" b="0">
+                <a:solidFill>
+                  <a:srgbClr val="17324D"/>
+                </a:solidFill>
+              </a:defRPr>
+            </a:pPr>
+            <a:r>
+              <a:rPr sz="1500" b="0">
+                <a:solidFill>
+                  <a:srgbClr val="17324D"/>
+                </a:solidFill>
+              </a:rPr>
+              <a:t>• IAM Misconfiguration</a:t>
+            </a:r>
+          </a:p>
+          <a:p xmlns:a="http://schemas.openxmlformats.org/drawingml/2006/main">
+            <a:pPr algn="l">
+              <a:defRPr sz="1500" b="0">
+                <a:solidFill>
+                  <a:srgbClr val="17324D"/>
+                </a:solidFill>
+              </a:defRPr>
+            </a:pPr>
+            <a:r>
+              <a:rPr sz="1500" b="0">
+                <a:solidFill>
+                  <a:srgbClr val="17324D"/>
+                </a:solidFill>
+              </a:rPr>
+              <a:t>• Credential Leakage</a:t>
+            </a:r>
+          </a:p>
+        </p:txBody>
+      </p:sp>
+      <p:sp>
+        <p:nvSpPr>
+          <p:cNvPr id="9" name="">
+            <a:extLst xmlns:a="http://schemas.openxmlformats.org/drawingml/2006/main">
+              <a:ext uri="{FF2B5EF4-FFF2-40B4-BE49-F238E27FC236}">
+                <a16:creationId xmlns:a16="http://schemas.microsoft.com/office/drawing/2014/main" id="{C2FD9C8D-CB5A-4708-A08D-179C439A522B}"/>
+              </a:ext>
+            </a:extLst>
+          </p:cNvPr>
+          <p:cNvSpPr>
+            <a:spLocks xmlns:a="http://schemas.openxmlformats.org/drawingml/2006/main" noGrp="1"/>
+          </p:cNvSpPr>
+          <p:nvPr/>
+        </p:nvSpPr>
+        <p:spPr>
+          <a:xfrm xmlns:a="http://schemas.openxmlformats.org/drawingml/2006/main">
+            <a:off x="8591550" y="1504950"/>
+            <a:ext cx="2857500" cy="876300"/>
+          </a:xfrm>
+          <a:prstGeom xmlns:a="http://schemas.openxmlformats.org/drawingml/2006/main" prst="roundRect">
+            <a:avLst>
+              <a:gd name="adj" fmla="val 8696"/>
+            </a:avLst>
+          </a:prstGeom>
+          <a:solidFill xmlns:a="http://schemas.openxmlformats.org/drawingml/2006/main">
+            <a:srgbClr val="F1FAF3"/>
+          </a:solidFill>
+          <a:ln xmlns:a="http://schemas.openxmlformats.org/drawingml/2006/main" w="9525">
+            <a:solidFill>
+              <a:srgbClr val="2E7D32"/>
+            </a:solidFill>
+            <a:prstDash val="solid"/>
+          </a:ln>
+        </p:spPr>
+        <p:txBody>
+          <a:bodyPr xmlns:a="http://schemas.openxmlformats.org/drawingml/2006/main"/>
+          <a:lstStyle xmlns:a="http://schemas.openxmlformats.org/drawingml/2006/main"/>
           <a:p xmlns:a="http://schemas.openxmlformats.org/drawingml/2006/main">
             <a:pPr algn="ctr">
               <a:defRPr sz="1800" b="1">
                 <a:solidFill>
-                  <a:srgbClr val="1F4E79"/>
+                  <a:srgbClr val="2E7D32"/>
                 </a:solidFill>
               </a:defRPr>
             </a:pPr>
             <a:r>
               <a:rPr sz="1800" b="1">
                 <a:solidFill>
-                  <a:srgbClr val="1F4E79"/>
-                </a:solidFill>
-              </a:rPr>
-              <a:t>4. Khắc phục</a:t>
+                  <a:srgbClr val="2E7D32"/>
+                </a:solidFill>
+              </a:rPr>
+              <a:t>3</a:t>
+            </a:r>
+          </a:p>
+          <a:p xmlns:a="http://schemas.openxmlformats.org/drawingml/2006/main">
+            <a:pPr algn="ctr">
+              <a:defRPr sz="1800" b="1">
+                <a:solidFill>
+                  <a:srgbClr val="2E7D32"/>
+                </a:solidFill>
+              </a:defRPr>
+            </a:pPr>
+            <a:r>
+              <a:rPr sz="1800" b="1">
+                <a:solidFill>
+                  <a:srgbClr val="2E7D32"/>
+                </a:solidFill>
+              </a:rPr>
+              <a:t>Demo &amp; đánh giá</a:t>
+            </a:r>
+          </a:p>
+        </p:txBody>
+      </p:sp>
+      <p:sp>
+        <p:nvSpPr>
+          <p:cNvPr id="10" name="">
+            <a:extLst xmlns:a="http://schemas.openxmlformats.org/drawingml/2006/main">
+              <a:ext uri="{FF2B5EF4-FFF2-40B4-BE49-F238E27FC236}">
+                <a16:creationId xmlns:a16="http://schemas.microsoft.com/office/drawing/2014/main" id="{0267F0BD-781F-40F2-B104-9AB10C8A8547}"/>
+              </a:ext>
+            </a:extLst>
+          </p:cNvPr>
+          <p:cNvSpPr>
+            <a:spLocks xmlns:a="http://schemas.openxmlformats.org/drawingml/2006/main" noGrp="1"/>
+          </p:cNvSpPr>
+          <p:nvPr/>
+        </p:nvSpPr>
+        <p:spPr>
+          <a:xfrm xmlns:a="http://schemas.openxmlformats.org/drawingml/2006/main">
+            <a:off x="8734425" y="2619375"/>
+            <a:ext cx="2667000" cy="1143000"/>
+          </a:xfrm>
+          <a:prstGeom xmlns:a="http://schemas.openxmlformats.org/drawingml/2006/main" prst="rect">
+            <a:avLst/>
+          </a:prstGeom>
+          <a:noFill xmlns:a="http://schemas.openxmlformats.org/drawingml/2006/main"/>
+          <a:ln xmlns:a="http://schemas.openxmlformats.org/drawingml/2006/main" w="0">
+            <a:noFill/>
+            <a:prstDash val="solid"/>
+          </a:ln>
+        </p:spPr>
+        <p:txBody>
+          <a:bodyPr xmlns:a="http://schemas.openxmlformats.org/drawingml/2006/main"/>
+          <a:lstStyle xmlns:a="http://schemas.openxmlformats.org/drawingml/2006/main"/>
+          <a:p xmlns:a="http://schemas.openxmlformats.org/drawingml/2006/main">
+            <a:pPr algn="l">
+              <a:defRPr sz="1500" b="0">
+                <a:solidFill>
+                  <a:srgbClr val="17324D"/>
+                </a:solidFill>
+              </a:defRPr>
+            </a:pPr>
+            <a:r>
+              <a:rPr sz="1500" b="0">
+                <a:solidFill>
+                  <a:srgbClr val="17324D"/>
+                </a:solidFill>
+              </a:rPr>
+              <a:t>• Docker Compose lab</a:t>
+            </a:r>
+          </a:p>
+          <a:p xmlns:a="http://schemas.openxmlformats.org/drawingml/2006/main">
+            <a:pPr algn="l">
+              <a:defRPr sz="1500" b="0">
+                <a:solidFill>
+                  <a:srgbClr val="17324D"/>
+                </a:solidFill>
+              </a:defRPr>
+            </a:pPr>
+            <a:r>
+              <a:rPr sz="1500" b="0">
+                <a:solidFill>
+                  <a:srgbClr val="17324D"/>
+                </a:solidFill>
+              </a:rPr>
+              <a:t>• Ảnh before/after</a:t>
+            </a:r>
+          </a:p>
+          <a:p xmlns:a="http://schemas.openxmlformats.org/drawingml/2006/main">
+            <a:pPr algn="l">
+              <a:defRPr sz="1500" b="0">
+                <a:solidFill>
+                  <a:srgbClr val="17324D"/>
+                </a:solidFill>
+              </a:defRPr>
+            </a:pPr>
+            <a:r>
+              <a:rPr sz="1500" b="0">
+                <a:solidFill>
+                  <a:srgbClr val="17324D"/>
+                </a:solidFill>
+              </a:rPr>
+              <a:t>• Bảng so sánh kết quả</a:t>
+            </a:r>
+          </a:p>
+        </p:txBody>
+      </p:sp>
+      <p:sp>
+        <p:nvSpPr>
+          <p:cNvPr id="11" name="">
+            <a:extLst xmlns:a="http://schemas.openxmlformats.org/drawingml/2006/main">
+              <a:ext uri="{FF2B5EF4-FFF2-40B4-BE49-F238E27FC236}">
+                <a16:creationId xmlns:a16="http://schemas.microsoft.com/office/drawing/2014/main" id="{67F8FEA2-9FD1-4981-9887-9F7A718FB081}"/>
+              </a:ext>
+            </a:extLst>
+          </p:cNvPr>
+          <p:cNvSpPr>
+            <a:spLocks xmlns:a="http://schemas.openxmlformats.org/drawingml/2006/main" noGrp="1"/>
+          </p:cNvSpPr>
+          <p:nvPr/>
+        </p:nvSpPr>
+        <p:spPr>
+          <a:xfrm xmlns:a="http://schemas.openxmlformats.org/drawingml/2006/main">
+            <a:off x="1562100" y="4810125"/>
+            <a:ext cx="9048750" cy="742950"/>
+          </a:xfrm>
+          <a:prstGeom xmlns:a="http://schemas.openxmlformats.org/drawingml/2006/main" prst="roundRect">
+            <a:avLst>
+              <a:gd name="adj" fmla="val 10256"/>
+            </a:avLst>
+          </a:prstGeom>
+          <a:solidFill xmlns:a="http://schemas.openxmlformats.org/drawingml/2006/main">
+            <a:srgbClr val="FFFFFF"/>
+          </a:solidFill>
+          <a:ln xmlns:a="http://schemas.openxmlformats.org/drawingml/2006/main" w="9525">
+            <a:solidFill>
+              <a:srgbClr val="C8D3E0"/>
+            </a:solidFill>
+            <a:prstDash val="solid"/>
+          </a:ln>
+        </p:spPr>
+        <p:txBody>
+          <a:bodyPr xmlns:a="http://schemas.openxmlformats.org/drawingml/2006/main"/>
+          <a:lstStyle xmlns:a="http://schemas.openxmlformats.org/drawingml/2006/main"/>
+          <a:p xmlns:a="http://schemas.openxmlformats.org/drawingml/2006/main">
+            <a:pPr algn="ctr">
+              <a:defRPr sz="1650" b="1">
+                <a:solidFill>
+                  <a:srgbClr val="17324D"/>
+                </a:solidFill>
+              </a:defRPr>
+            </a:pPr>
+            <a:r>
+              <a:rPr sz="1650" b="1">
+                <a:solidFill>
+                  <a:srgbClr val="17324D"/>
+                </a:solidFill>
+              </a:rPr>
+              <a:t>Output cuối cùng: báo cáo LaTeX, slide PowerPoint, ảnh minh chứng và flow live demo cho buổi thuyết trình.</a:t>
             </a:r>
           </a:p>
         </p:txBody>
@@ -5092,7 +5622,7 @@
     </p:spTree>
     <p:extLst>
       <p:ext uri="{BB962C8B-B14F-4D97-AF65-F5344CB8AC3E}">
-        <p14:creationId xmlns:p14="http://schemas.microsoft.com/office/powerpoint/2010/main" val="380460100"/>
+        <p14:creationId xmlns:p14="http://schemas.microsoft.com/office/powerpoint/2010/main" val="846336883"/>
       </p:ext>
     </p:extLst>
   </p:cSld>
@@ -5123,7 +5653,7 @@
           <p:cNvPr id="1" name="">
             <a:extLst xmlns:a="http://schemas.openxmlformats.org/drawingml/2006/main">
               <a:ext uri="{FF2B5EF4-FFF2-40B4-BE49-F238E27FC236}">
-                <a16:creationId xmlns:a16="http://schemas.microsoft.com/office/drawing/2014/main" id="{C4758A00-7ECB-470F-A3B9-D586E275C263}"/>
+                <a16:creationId xmlns:a16="http://schemas.microsoft.com/office/drawing/2014/main" id="{B0CDE730-A8CF-4111-BCD6-3039ECD1723D}"/>
               </a:ext>
             </a:extLst>
           </p:cNvPr>
@@ -5156,7 +5686,7 @@
           <p:cNvPr id="2" name="">
             <a:extLst xmlns:a="http://schemas.openxmlformats.org/drawingml/2006/main">
               <a:ext uri="{FF2B5EF4-FFF2-40B4-BE49-F238E27FC236}">
-                <a16:creationId xmlns:a16="http://schemas.microsoft.com/office/drawing/2014/main" id="{9A99B938-A99E-4A30-BA63-BBEB155981FB}"/>
+                <a16:creationId xmlns:a16="http://schemas.microsoft.com/office/drawing/2014/main" id="{ADE26F38-A985-413E-8AD6-ADD673BAE36E}"/>
               </a:ext>
             </a:extLst>
           </p:cNvPr>
@@ -5206,7 +5736,7 @@
           <p:cNvPr id="3" name="">
             <a:extLst xmlns:a="http://schemas.openxmlformats.org/drawingml/2006/main">
               <a:ext uri="{FF2B5EF4-FFF2-40B4-BE49-F238E27FC236}">
-                <a16:creationId xmlns:a16="http://schemas.microsoft.com/office/drawing/2014/main" id="{3ACD6230-0E2A-42CC-80C0-9826E2334561}"/>
+                <a16:creationId xmlns:a16="http://schemas.microsoft.com/office/drawing/2014/main" id="{D848CAFA-5926-4717-AD84-8EF3C44D6465}"/>
               </a:ext>
             </a:extLst>
           </p:cNvPr>
@@ -5256,23 +5786,1185 @@
           <p:cNvPr id="4" name="">
             <a:extLst xmlns:a="http://schemas.openxmlformats.org/drawingml/2006/main">
               <a:ext uri="{FF2B5EF4-FFF2-40B4-BE49-F238E27FC236}">
-                <a16:creationId xmlns:a16="http://schemas.microsoft.com/office/drawing/2014/main" id="{E219E3B2-4CD0-4143-BC4F-FEEE66A53539}"/>
-              </a:ext>
-            </a:extLst>
-          </p:cNvPr>
-          <p:cNvSpPr>
-            <a:spLocks xmlns:a="http://schemas.openxmlformats.org/drawingml/2006/main" noGrp="1"/>
-          </p:cNvSpPr>
-          <p:nvPr/>
-        </p:nvSpPr>
-        <p:spPr>
-          <a:xfrm xmlns:a="http://schemas.openxmlformats.org/drawingml/2006/main">
-            <a:off x="666750" y="2095500"/>
-            <a:ext cx="1714500" cy="876300"/>
+                <a16:creationId xmlns:a16="http://schemas.microsoft.com/office/drawing/2014/main" id="{681BB2F9-F82F-46F6-A130-639228CD32BA}"/>
+              </a:ext>
+            </a:extLst>
+          </p:cNvPr>
+          <p:cNvSpPr>
+            <a:spLocks xmlns:a="http://schemas.openxmlformats.org/drawingml/2006/main" noGrp="1"/>
+          </p:cNvSpPr>
+          <p:nvPr/>
+        </p:nvSpPr>
+        <p:spPr>
+          <a:xfrm xmlns:a="http://schemas.openxmlformats.org/drawingml/2006/main">
+            <a:off x="742950" y="742950"/>
+            <a:ext cx="9144000" cy="323850"/>
+          </a:xfrm>
+          <a:prstGeom xmlns:a="http://schemas.openxmlformats.org/drawingml/2006/main" prst="rect">
+            <a:avLst/>
+          </a:prstGeom>
+          <a:noFill xmlns:a="http://schemas.openxmlformats.org/drawingml/2006/main"/>
+          <a:ln xmlns:a="http://schemas.openxmlformats.org/drawingml/2006/main" w="0">
+            <a:noFill/>
+            <a:prstDash val="solid"/>
+          </a:ln>
+        </p:spPr>
+        <p:txBody>
+          <a:bodyPr xmlns:a="http://schemas.openxmlformats.org/drawingml/2006/main"/>
+          <a:lstStyle xmlns:a="http://schemas.openxmlformats.org/drawingml/2006/main"/>
+          <a:p xmlns:a="http://schemas.openxmlformats.org/drawingml/2006/main">
+            <a:pPr algn="l">
+              <a:defRPr sz="1500" b="0">
+                <a:solidFill>
+                  <a:srgbClr val="5F6B7A"/>
+                </a:solidFill>
+              </a:defRPr>
+            </a:pPr>
+            <a:r>
+              <a:rPr sz="1500" b="0">
+                <a:solidFill>
+                  <a:srgbClr val="5F6B7A"/>
+                </a:solidFill>
+              </a:rPr>
+              <a:t>Mô hình cây phân tách rõ lớp truy cập, lớp ứng dụng và lớp dữ liệu/secret.</a:t>
+            </a:r>
+          </a:p>
+        </p:txBody>
+      </p:sp>
+      <p:sp>
+        <p:nvSpPr>
+          <p:cNvPr id="5" name="">
+            <a:extLst xmlns:a="http://schemas.openxmlformats.org/drawingml/2006/main">
+              <a:ext uri="{FF2B5EF4-FFF2-40B4-BE49-F238E27FC236}">
+                <a16:creationId xmlns:a16="http://schemas.microsoft.com/office/drawing/2014/main" id="{DD4F81AB-26EB-4717-9036-1AFD108DA16C}"/>
+              </a:ext>
+            </a:extLst>
+          </p:cNvPr>
+          <p:cNvSpPr>
+            <a:spLocks xmlns:a="http://schemas.openxmlformats.org/drawingml/2006/main" noGrp="1"/>
+          </p:cNvSpPr>
+          <p:nvPr/>
+        </p:nvSpPr>
+        <p:spPr>
+          <a:xfrm xmlns:a="http://schemas.openxmlformats.org/drawingml/2006/main">
+            <a:off x="4286250" y="1047750"/>
+            <a:ext cx="3619500" cy="590550"/>
           </a:xfrm>
           <a:prstGeom xmlns:a="http://schemas.openxmlformats.org/drawingml/2006/main" prst="roundRect">
             <a:avLst>
-              <a:gd name="adj" fmla="val 8696"/>
+              <a:gd name="adj" fmla="val 12903"/>
+            </a:avLst>
+          </a:prstGeom>
+          <a:solidFill xmlns:a="http://schemas.openxmlformats.org/drawingml/2006/main">
+            <a:srgbClr val="1F4E79"/>
+          </a:solidFill>
+          <a:ln xmlns:a="http://schemas.openxmlformats.org/drawingml/2006/main" w="9525">
+            <a:solidFill>
+              <a:srgbClr val="1F4E79"/>
+            </a:solidFill>
+            <a:prstDash val="solid"/>
+          </a:ln>
+        </p:spPr>
+        <p:txBody>
+          <a:bodyPr xmlns:a="http://schemas.openxmlformats.org/drawingml/2006/main"/>
+          <a:lstStyle xmlns:a="http://schemas.openxmlformats.org/drawingml/2006/main"/>
+          <a:p xmlns:a="http://schemas.openxmlformats.org/drawingml/2006/main">
+            <a:pPr algn="ctr">
+              <a:defRPr sz="1800" b="1">
+                <a:solidFill>
+                  <a:srgbClr val="FFFFFF"/>
+                </a:solidFill>
+              </a:defRPr>
+            </a:pPr>
+            <a:r>
+              <a:rPr sz="1800" b="1">
+                <a:solidFill>
+                  <a:srgbClr val="FFFFFF"/>
+                </a:solidFill>
+              </a:rPr>
+              <a:t>Cloud Security Demo Lab</a:t>
+            </a:r>
+          </a:p>
+        </p:txBody>
+      </p:sp>
+      <p:sp>
+        <p:nvSpPr>
+          <p:cNvPr id="6" name="">
+            <a:extLst xmlns:a="http://schemas.openxmlformats.org/drawingml/2006/main">
+              <a:ext uri="{FF2B5EF4-FFF2-40B4-BE49-F238E27FC236}">
+                <a16:creationId xmlns:a16="http://schemas.microsoft.com/office/drawing/2014/main" id="{DE378FD5-C783-4AE6-A5A6-D02ABDE6A431}"/>
+              </a:ext>
+            </a:extLst>
+          </p:cNvPr>
+          <p:cNvSpPr>
+            <a:spLocks xmlns:a="http://schemas.openxmlformats.org/drawingml/2006/main" noGrp="1"/>
+          </p:cNvSpPr>
+          <p:nvPr/>
+        </p:nvSpPr>
+        <p:spPr>
+          <a:xfrm xmlns:a="http://schemas.openxmlformats.org/drawingml/2006/main">
+            <a:off x="6096000" y="1638300"/>
+            <a:ext cx="-4000500" cy="552450"/>
+          </a:xfrm>
+          <a:prstGeom xmlns:a="http://schemas.openxmlformats.org/drawingml/2006/main" prst="line">
+            <a:avLst/>
+          </a:prstGeom>
+          <a:ln xmlns:a="http://schemas.openxmlformats.org/drawingml/2006/main" w="23813">
+            <a:solidFill>
+              <a:srgbClr val="2F3A4A"/>
+            </a:solidFill>
+            <a:prstDash val="solid"/>
+          </a:ln>
+        </p:spPr>
+      </p:sp>
+      <p:sp>
+        <p:nvSpPr>
+          <p:cNvPr id="7" name="">
+            <a:extLst xmlns:a="http://schemas.openxmlformats.org/drawingml/2006/main">
+              <a:ext uri="{FF2B5EF4-FFF2-40B4-BE49-F238E27FC236}">
+                <a16:creationId xmlns:a16="http://schemas.microsoft.com/office/drawing/2014/main" id="{7346A249-675D-4E01-8430-E87A892DFBC1}"/>
+              </a:ext>
+            </a:extLst>
+          </p:cNvPr>
+          <p:cNvSpPr>
+            <a:spLocks xmlns:a="http://schemas.openxmlformats.org/drawingml/2006/main" noGrp="1"/>
+          </p:cNvSpPr>
+          <p:nvPr/>
+        </p:nvSpPr>
+        <p:spPr>
+          <a:xfrm xmlns:a="http://schemas.openxmlformats.org/drawingml/2006/main">
+            <a:off x="6096000" y="1638300"/>
+            <a:ext cx="0" cy="552450"/>
+          </a:xfrm>
+          <a:prstGeom xmlns:a="http://schemas.openxmlformats.org/drawingml/2006/main" prst="line">
+            <a:avLst/>
+          </a:prstGeom>
+          <a:ln xmlns:a="http://schemas.openxmlformats.org/drawingml/2006/main" w="23813">
+            <a:solidFill>
+              <a:srgbClr val="2F3A4A"/>
+            </a:solidFill>
+            <a:prstDash val="solid"/>
+          </a:ln>
+        </p:spPr>
+      </p:sp>
+      <p:sp>
+        <p:nvSpPr>
+          <p:cNvPr id="8" name="">
+            <a:extLst xmlns:a="http://schemas.openxmlformats.org/drawingml/2006/main">
+              <a:ext uri="{FF2B5EF4-FFF2-40B4-BE49-F238E27FC236}">
+                <a16:creationId xmlns:a16="http://schemas.microsoft.com/office/drawing/2014/main" id="{7F246995-88A6-4059-BC10-DB30B62191B9}"/>
+              </a:ext>
+            </a:extLst>
+          </p:cNvPr>
+          <p:cNvSpPr>
+            <a:spLocks xmlns:a="http://schemas.openxmlformats.org/drawingml/2006/main" noGrp="1"/>
+          </p:cNvSpPr>
+          <p:nvPr/>
+        </p:nvSpPr>
+        <p:spPr>
+          <a:xfrm xmlns:a="http://schemas.openxmlformats.org/drawingml/2006/main">
+            <a:off x="6096000" y="1638300"/>
+            <a:ext cx="4000500" cy="552450"/>
+          </a:xfrm>
+          <a:prstGeom xmlns:a="http://schemas.openxmlformats.org/drawingml/2006/main" prst="line">
+            <a:avLst/>
+          </a:prstGeom>
+          <a:ln xmlns:a="http://schemas.openxmlformats.org/drawingml/2006/main" w="23813">
+            <a:solidFill>
+              <a:srgbClr val="2F3A4A"/>
+            </a:solidFill>
+            <a:prstDash val="solid"/>
+          </a:ln>
+        </p:spPr>
+      </p:sp>
+      <p:sp>
+        <p:nvSpPr>
+          <p:cNvPr id="9" name="">
+            <a:extLst xmlns:a="http://schemas.openxmlformats.org/drawingml/2006/main">
+              <a:ext uri="{FF2B5EF4-FFF2-40B4-BE49-F238E27FC236}">
+                <a16:creationId xmlns:a16="http://schemas.microsoft.com/office/drawing/2014/main" id="{C1D8FCB5-4661-444B-9474-623F88B0AF6D}"/>
+              </a:ext>
+            </a:extLst>
+          </p:cNvPr>
+          <p:cNvSpPr>
+            <a:spLocks xmlns:a="http://schemas.openxmlformats.org/drawingml/2006/main" noGrp="1"/>
+          </p:cNvSpPr>
+          <p:nvPr/>
+        </p:nvSpPr>
+        <p:spPr>
+          <a:xfrm xmlns:a="http://schemas.openxmlformats.org/drawingml/2006/main">
+            <a:off x="762000" y="2190750"/>
+            <a:ext cx="2667000" cy="514350"/>
+          </a:xfrm>
+          <a:prstGeom xmlns:a="http://schemas.openxmlformats.org/drawingml/2006/main" prst="roundRect">
+            <a:avLst>
+              <a:gd name="adj" fmla="val 14815"/>
+            </a:avLst>
+          </a:prstGeom>
+          <a:solidFill xmlns:a="http://schemas.openxmlformats.org/drawingml/2006/main">
+            <a:srgbClr val="EEF4FA"/>
+          </a:solidFill>
+          <a:ln xmlns:a="http://schemas.openxmlformats.org/drawingml/2006/main" w="9525">
+            <a:solidFill>
+              <a:srgbClr val="1F4E79"/>
+            </a:solidFill>
+            <a:prstDash val="solid"/>
+          </a:ln>
+        </p:spPr>
+        <p:txBody>
+          <a:bodyPr xmlns:a="http://schemas.openxmlformats.org/drawingml/2006/main"/>
+          <a:lstStyle xmlns:a="http://schemas.openxmlformats.org/drawingml/2006/main"/>
+          <a:p xmlns:a="http://schemas.openxmlformats.org/drawingml/2006/main">
+            <a:pPr algn="ctr">
+              <a:defRPr sz="1575" b="1">
+                <a:solidFill>
+                  <a:srgbClr val="1F4E79"/>
+                </a:solidFill>
+              </a:defRPr>
+            </a:pPr>
+            <a:r>
+              <a:rPr sz="1575" b="1">
+                <a:solidFill>
+                  <a:srgbClr val="1F4E79"/>
+                </a:solidFill>
+              </a:rPr>
+              <a:t>Access Layer</a:t>
+            </a:r>
+          </a:p>
+        </p:txBody>
+      </p:sp>
+      <p:sp>
+        <p:nvSpPr>
+          <p:cNvPr id="10" name="">
+            <a:extLst xmlns:a="http://schemas.openxmlformats.org/drawingml/2006/main">
+              <a:ext uri="{FF2B5EF4-FFF2-40B4-BE49-F238E27FC236}">
+                <a16:creationId xmlns:a16="http://schemas.microsoft.com/office/drawing/2014/main" id="{98CAB9BE-4FA0-4EF4-A998-940ADC25B03D}"/>
+              </a:ext>
+            </a:extLst>
+          </p:cNvPr>
+          <p:cNvSpPr>
+            <a:spLocks xmlns:a="http://schemas.openxmlformats.org/drawingml/2006/main" noGrp="1"/>
+          </p:cNvSpPr>
+          <p:nvPr/>
+        </p:nvSpPr>
+        <p:spPr>
+          <a:xfrm xmlns:a="http://schemas.openxmlformats.org/drawingml/2006/main">
+            <a:off x="4762500" y="2190750"/>
+            <a:ext cx="2667000" cy="514350"/>
+          </a:xfrm>
+          <a:prstGeom xmlns:a="http://schemas.openxmlformats.org/drawingml/2006/main" prst="roundRect">
+            <a:avLst>
+              <a:gd name="adj" fmla="val 14815"/>
+            </a:avLst>
+          </a:prstGeom>
+          <a:solidFill xmlns:a="http://schemas.openxmlformats.org/drawingml/2006/main">
+            <a:srgbClr val="EEF4FA"/>
+          </a:solidFill>
+          <a:ln xmlns:a="http://schemas.openxmlformats.org/drawingml/2006/main" w="9525">
+            <a:solidFill>
+              <a:srgbClr val="1F4E79"/>
+            </a:solidFill>
+            <a:prstDash val="solid"/>
+          </a:ln>
+        </p:spPr>
+        <p:txBody>
+          <a:bodyPr xmlns:a="http://schemas.openxmlformats.org/drawingml/2006/main"/>
+          <a:lstStyle xmlns:a="http://schemas.openxmlformats.org/drawingml/2006/main"/>
+          <a:p xmlns:a="http://schemas.openxmlformats.org/drawingml/2006/main">
+            <a:pPr algn="ctr">
+              <a:defRPr sz="1575" b="1">
+                <a:solidFill>
+                  <a:srgbClr val="1F4E79"/>
+                </a:solidFill>
+              </a:defRPr>
+            </a:pPr>
+            <a:r>
+              <a:rPr sz="1575" b="1">
+                <a:solidFill>
+                  <a:srgbClr val="1F4E79"/>
+                </a:solidFill>
+              </a:rPr>
+              <a:t>Application Layer</a:t>
+            </a:r>
+          </a:p>
+        </p:txBody>
+      </p:sp>
+      <p:sp>
+        <p:nvSpPr>
+          <p:cNvPr id="11" name="">
+            <a:extLst xmlns:a="http://schemas.openxmlformats.org/drawingml/2006/main">
+              <a:ext uri="{FF2B5EF4-FFF2-40B4-BE49-F238E27FC236}">
+                <a16:creationId xmlns:a16="http://schemas.microsoft.com/office/drawing/2014/main" id="{C57D014A-1FEC-4C7D-ABA8-5587C4A2013A}"/>
+              </a:ext>
+            </a:extLst>
+          </p:cNvPr>
+          <p:cNvSpPr>
+            <a:spLocks xmlns:a="http://schemas.openxmlformats.org/drawingml/2006/main" noGrp="1"/>
+          </p:cNvSpPr>
+          <p:nvPr/>
+        </p:nvSpPr>
+        <p:spPr>
+          <a:xfrm xmlns:a="http://schemas.openxmlformats.org/drawingml/2006/main">
+            <a:off x="8763000" y="2190750"/>
+            <a:ext cx="2667000" cy="514350"/>
+          </a:xfrm>
+          <a:prstGeom xmlns:a="http://schemas.openxmlformats.org/drawingml/2006/main" prst="roundRect">
+            <a:avLst>
+              <a:gd name="adj" fmla="val 14815"/>
+            </a:avLst>
+          </a:prstGeom>
+          <a:solidFill xmlns:a="http://schemas.openxmlformats.org/drawingml/2006/main">
+            <a:srgbClr val="EEF4FA"/>
+          </a:solidFill>
+          <a:ln xmlns:a="http://schemas.openxmlformats.org/drawingml/2006/main" w="9525">
+            <a:solidFill>
+              <a:srgbClr val="1F4E79"/>
+            </a:solidFill>
+            <a:prstDash val="solid"/>
+          </a:ln>
+        </p:spPr>
+        <p:txBody>
+          <a:bodyPr xmlns:a="http://schemas.openxmlformats.org/drawingml/2006/main"/>
+          <a:lstStyle xmlns:a="http://schemas.openxmlformats.org/drawingml/2006/main"/>
+          <a:p xmlns:a="http://schemas.openxmlformats.org/drawingml/2006/main">
+            <a:pPr algn="ctr">
+              <a:defRPr sz="1575" b="1">
+                <a:solidFill>
+                  <a:srgbClr val="1F4E79"/>
+                </a:solidFill>
+              </a:defRPr>
+            </a:pPr>
+            <a:r>
+              <a:rPr sz="1575" b="1">
+                <a:solidFill>
+                  <a:srgbClr val="1F4E79"/>
+                </a:solidFill>
+              </a:rPr>
+              <a:t>Data &amp; Secret Layer</a:t>
+            </a:r>
+          </a:p>
+        </p:txBody>
+      </p:sp>
+      <p:sp>
+        <p:nvSpPr>
+          <p:cNvPr id="12" name="">
+            <a:extLst xmlns:a="http://schemas.openxmlformats.org/drawingml/2006/main">
+              <a:ext uri="{FF2B5EF4-FFF2-40B4-BE49-F238E27FC236}">
+                <a16:creationId xmlns:a16="http://schemas.microsoft.com/office/drawing/2014/main" id="{CCF42CF6-5DDC-4122-AA83-BF401A3AAA5F}"/>
+              </a:ext>
+            </a:extLst>
+          </p:cNvPr>
+          <p:cNvSpPr>
+            <a:spLocks xmlns:a="http://schemas.openxmlformats.org/drawingml/2006/main" noGrp="1"/>
+          </p:cNvSpPr>
+          <p:nvPr/>
+        </p:nvSpPr>
+        <p:spPr>
+          <a:xfrm xmlns:a="http://schemas.openxmlformats.org/drawingml/2006/main">
+            <a:off x="2095500" y="2705100"/>
+            <a:ext cx="-666750" cy="581025"/>
+          </a:xfrm>
+          <a:prstGeom xmlns:a="http://schemas.openxmlformats.org/drawingml/2006/main" prst="line">
+            <a:avLst/>
+          </a:prstGeom>
+          <a:ln xmlns:a="http://schemas.openxmlformats.org/drawingml/2006/main" w="23813">
+            <a:solidFill>
+              <a:srgbClr val="2F3A4A"/>
+            </a:solidFill>
+            <a:prstDash val="solid"/>
+          </a:ln>
+        </p:spPr>
+      </p:sp>
+      <p:sp>
+        <p:nvSpPr>
+          <p:cNvPr id="13" name="">
+            <a:extLst xmlns:a="http://schemas.openxmlformats.org/drawingml/2006/main">
+              <a:ext uri="{FF2B5EF4-FFF2-40B4-BE49-F238E27FC236}">
+                <a16:creationId xmlns:a16="http://schemas.microsoft.com/office/drawing/2014/main" id="{8BC7013B-C171-40A6-A1BB-D1C48EE3CB41}"/>
+              </a:ext>
+            </a:extLst>
+          </p:cNvPr>
+          <p:cNvSpPr>
+            <a:spLocks xmlns:a="http://schemas.openxmlformats.org/drawingml/2006/main" noGrp="1"/>
+          </p:cNvSpPr>
+          <p:nvPr/>
+        </p:nvSpPr>
+        <p:spPr>
+          <a:xfrm xmlns:a="http://schemas.openxmlformats.org/drawingml/2006/main">
+            <a:off x="2095500" y="2705100"/>
+            <a:ext cx="666750" cy="581025"/>
+          </a:xfrm>
+          <a:prstGeom xmlns:a="http://schemas.openxmlformats.org/drawingml/2006/main" prst="line">
+            <a:avLst/>
+          </a:prstGeom>
+          <a:ln xmlns:a="http://schemas.openxmlformats.org/drawingml/2006/main" w="23813">
+            <a:solidFill>
+              <a:srgbClr val="2F3A4A"/>
+            </a:solidFill>
+            <a:prstDash val="solid"/>
+          </a:ln>
+        </p:spPr>
+      </p:sp>
+      <p:sp>
+        <p:nvSpPr>
+          <p:cNvPr id="14" name="">
+            <a:extLst xmlns:a="http://schemas.openxmlformats.org/drawingml/2006/main">
+              <a:ext uri="{FF2B5EF4-FFF2-40B4-BE49-F238E27FC236}">
+                <a16:creationId xmlns:a16="http://schemas.microsoft.com/office/drawing/2014/main" id="{EC86F439-2BBA-4CF2-81E3-72CE47DCFA34}"/>
+              </a:ext>
+            </a:extLst>
+          </p:cNvPr>
+          <p:cNvSpPr>
+            <a:spLocks xmlns:a="http://schemas.openxmlformats.org/drawingml/2006/main" noGrp="1"/>
+          </p:cNvSpPr>
+          <p:nvPr/>
+        </p:nvSpPr>
+        <p:spPr>
+          <a:xfrm xmlns:a="http://schemas.openxmlformats.org/drawingml/2006/main">
+            <a:off x="6096000" y="2705100"/>
+            <a:ext cx="0" cy="581025"/>
+          </a:xfrm>
+          <a:prstGeom xmlns:a="http://schemas.openxmlformats.org/drawingml/2006/main" prst="line">
+            <a:avLst/>
+          </a:prstGeom>
+          <a:ln xmlns:a="http://schemas.openxmlformats.org/drawingml/2006/main" w="23813">
+            <a:solidFill>
+              <a:srgbClr val="2F3A4A"/>
+            </a:solidFill>
+            <a:prstDash val="solid"/>
+          </a:ln>
+        </p:spPr>
+      </p:sp>
+      <p:sp>
+        <p:nvSpPr>
+          <p:cNvPr id="15" name="">
+            <a:extLst xmlns:a="http://schemas.openxmlformats.org/drawingml/2006/main">
+              <a:ext uri="{FF2B5EF4-FFF2-40B4-BE49-F238E27FC236}">
+                <a16:creationId xmlns:a16="http://schemas.microsoft.com/office/drawing/2014/main" id="{026A2C16-F7FF-4CB0-A593-DFD5999FFBC7}"/>
+              </a:ext>
+            </a:extLst>
+          </p:cNvPr>
+          <p:cNvSpPr>
+            <a:spLocks xmlns:a="http://schemas.openxmlformats.org/drawingml/2006/main" noGrp="1"/>
+          </p:cNvSpPr>
+          <p:nvPr/>
+        </p:nvSpPr>
+        <p:spPr>
+          <a:xfrm xmlns:a="http://schemas.openxmlformats.org/drawingml/2006/main">
+            <a:off x="10096500" y="2705100"/>
+            <a:ext cx="-1047750" cy="581025"/>
+          </a:xfrm>
+          <a:prstGeom xmlns:a="http://schemas.openxmlformats.org/drawingml/2006/main" prst="line">
+            <a:avLst/>
+          </a:prstGeom>
+          <a:ln xmlns:a="http://schemas.openxmlformats.org/drawingml/2006/main" w="23813">
+            <a:solidFill>
+              <a:srgbClr val="2F3A4A"/>
+            </a:solidFill>
+            <a:prstDash val="solid"/>
+          </a:ln>
+        </p:spPr>
+      </p:sp>
+      <p:sp>
+        <p:nvSpPr>
+          <p:cNvPr id="16" name="">
+            <a:extLst xmlns:a="http://schemas.openxmlformats.org/drawingml/2006/main">
+              <a:ext uri="{FF2B5EF4-FFF2-40B4-BE49-F238E27FC236}">
+                <a16:creationId xmlns:a16="http://schemas.microsoft.com/office/drawing/2014/main" id="{2D185885-E396-46DD-9CDC-8809B7A11371}"/>
+              </a:ext>
+            </a:extLst>
+          </p:cNvPr>
+          <p:cNvSpPr>
+            <a:spLocks xmlns:a="http://schemas.openxmlformats.org/drawingml/2006/main" noGrp="1"/>
+          </p:cNvSpPr>
+          <p:nvPr/>
+        </p:nvSpPr>
+        <p:spPr>
+          <a:xfrm xmlns:a="http://schemas.openxmlformats.org/drawingml/2006/main">
+            <a:off x="10096500" y="2705100"/>
+            <a:ext cx="0" cy="581025"/>
+          </a:xfrm>
+          <a:prstGeom xmlns:a="http://schemas.openxmlformats.org/drawingml/2006/main" prst="line">
+            <a:avLst/>
+          </a:prstGeom>
+          <a:ln xmlns:a="http://schemas.openxmlformats.org/drawingml/2006/main" w="23813">
+            <a:solidFill>
+              <a:srgbClr val="2F3A4A"/>
+            </a:solidFill>
+            <a:prstDash val="solid"/>
+          </a:ln>
+        </p:spPr>
+      </p:sp>
+      <p:sp>
+        <p:nvSpPr>
+          <p:cNvPr id="17" name="">
+            <a:extLst xmlns:a="http://schemas.openxmlformats.org/drawingml/2006/main">
+              <a:ext uri="{FF2B5EF4-FFF2-40B4-BE49-F238E27FC236}">
+                <a16:creationId xmlns:a16="http://schemas.microsoft.com/office/drawing/2014/main" id="{98FBBFA9-9807-4467-9704-14601814A457}"/>
+              </a:ext>
+            </a:extLst>
+          </p:cNvPr>
+          <p:cNvSpPr>
+            <a:spLocks xmlns:a="http://schemas.openxmlformats.org/drawingml/2006/main" noGrp="1"/>
+          </p:cNvSpPr>
+          <p:nvPr/>
+        </p:nvSpPr>
+        <p:spPr>
+          <a:xfrm xmlns:a="http://schemas.openxmlformats.org/drawingml/2006/main">
+            <a:off x="10096500" y="2705100"/>
+            <a:ext cx="1047750" cy="581025"/>
+          </a:xfrm>
+          <a:prstGeom xmlns:a="http://schemas.openxmlformats.org/drawingml/2006/main" prst="line">
+            <a:avLst/>
+          </a:prstGeom>
+          <a:ln xmlns:a="http://schemas.openxmlformats.org/drawingml/2006/main" w="23813">
+            <a:solidFill>
+              <a:srgbClr val="2F3A4A"/>
+            </a:solidFill>
+            <a:prstDash val="solid"/>
+          </a:ln>
+        </p:spPr>
+      </p:sp>
+      <p:sp>
+        <p:nvSpPr>
+          <p:cNvPr id="18" name="">
+            <a:extLst xmlns:a="http://schemas.openxmlformats.org/drawingml/2006/main">
+              <a:ext uri="{FF2B5EF4-FFF2-40B4-BE49-F238E27FC236}">
+                <a16:creationId xmlns:a16="http://schemas.microsoft.com/office/drawing/2014/main" id="{39A79CED-EE42-4D0B-9444-E5573B7EDE8B}"/>
+              </a:ext>
+            </a:extLst>
+          </p:cNvPr>
+          <p:cNvSpPr>
+            <a:spLocks xmlns:a="http://schemas.openxmlformats.org/drawingml/2006/main" noGrp="1"/>
+          </p:cNvSpPr>
+          <p:nvPr/>
+        </p:nvSpPr>
+        <p:spPr>
+          <a:xfrm xmlns:a="http://schemas.openxmlformats.org/drawingml/2006/main">
+            <a:off x="685800" y="3286125"/>
+            <a:ext cx="1476375" cy="628650"/>
+          </a:xfrm>
+          <a:prstGeom xmlns:a="http://schemas.openxmlformats.org/drawingml/2006/main" prst="roundRect">
+            <a:avLst>
+              <a:gd name="adj" fmla="val 12121"/>
+            </a:avLst>
+          </a:prstGeom>
+          <a:solidFill xmlns:a="http://schemas.openxmlformats.org/drawingml/2006/main">
+            <a:srgbClr val="FFFFFF"/>
+          </a:solidFill>
+          <a:ln xmlns:a="http://schemas.openxmlformats.org/drawingml/2006/main" w="9525">
+            <a:solidFill>
+              <a:srgbClr val="B7C5D4"/>
+            </a:solidFill>
+            <a:prstDash val="solid"/>
+          </a:ln>
+        </p:spPr>
+        <p:txBody>
+          <a:bodyPr xmlns:a="http://schemas.openxmlformats.org/drawingml/2006/main"/>
+          <a:lstStyle xmlns:a="http://schemas.openxmlformats.org/drawingml/2006/main"/>
+          <a:p xmlns:a="http://schemas.openxmlformats.org/drawingml/2006/main">
+            <a:pPr algn="ctr">
+              <a:defRPr sz="1275" b="1">
+                <a:solidFill>
+                  <a:srgbClr val="17324D"/>
+                </a:solidFill>
+              </a:defRPr>
+            </a:pPr>
+            <a:r>
+              <a:rPr sz="1275" b="1">
+                <a:solidFill>
+                  <a:srgbClr val="17324D"/>
+                </a:solidFill>
+              </a:rPr>
+              <a:t>User</a:t>
+            </a:r>
+          </a:p>
+          <a:p xmlns:a="http://schemas.openxmlformats.org/drawingml/2006/main">
+            <a:pPr algn="ctr">
+              <a:defRPr sz="1275" b="1">
+                <a:solidFill>
+                  <a:srgbClr val="17324D"/>
+                </a:solidFill>
+              </a:defRPr>
+            </a:pPr>
+            <a:r>
+              <a:rPr sz="1275" b="1">
+                <a:solidFill>
+                  <a:srgbClr val="17324D"/>
+                </a:solidFill>
+              </a:rPr>
+              <a:t>Browser</a:t>
+            </a:r>
+          </a:p>
+        </p:txBody>
+      </p:sp>
+      <p:sp>
+        <p:nvSpPr>
+          <p:cNvPr id="19" name="">
+            <a:extLst xmlns:a="http://schemas.openxmlformats.org/drawingml/2006/main">
+              <a:ext uri="{FF2B5EF4-FFF2-40B4-BE49-F238E27FC236}">
+                <a16:creationId xmlns:a16="http://schemas.microsoft.com/office/drawing/2014/main" id="{80EC2722-3E43-4D6B-B83B-AF10BA357BC8}"/>
+              </a:ext>
+            </a:extLst>
+          </p:cNvPr>
+          <p:cNvSpPr>
+            <a:spLocks xmlns:a="http://schemas.openxmlformats.org/drawingml/2006/main" noGrp="1"/>
+          </p:cNvSpPr>
+          <p:nvPr/>
+        </p:nvSpPr>
+        <p:spPr>
+          <a:xfrm xmlns:a="http://schemas.openxmlformats.org/drawingml/2006/main">
+            <a:off x="2333625" y="3286125"/>
+            <a:ext cx="1476375" cy="628650"/>
+          </a:xfrm>
+          <a:prstGeom xmlns:a="http://schemas.openxmlformats.org/drawingml/2006/main" prst="roundRect">
+            <a:avLst>
+              <a:gd name="adj" fmla="val 12121"/>
+            </a:avLst>
+          </a:prstGeom>
+          <a:solidFill xmlns:a="http://schemas.openxmlformats.org/drawingml/2006/main">
+            <a:srgbClr val="FFF2F0"/>
+          </a:solidFill>
+          <a:ln xmlns:a="http://schemas.openxmlformats.org/drawingml/2006/main" w="9525">
+            <a:solidFill>
+              <a:srgbClr val="B3261E"/>
+            </a:solidFill>
+            <a:prstDash val="solid"/>
+          </a:ln>
+        </p:spPr>
+        <p:txBody>
+          <a:bodyPr xmlns:a="http://schemas.openxmlformats.org/drawingml/2006/main"/>
+          <a:lstStyle xmlns:a="http://schemas.openxmlformats.org/drawingml/2006/main"/>
+          <a:p xmlns:a="http://schemas.openxmlformats.org/drawingml/2006/main">
+            <a:pPr algn="ctr">
+              <a:defRPr sz="1275" b="1">
+                <a:solidFill>
+                  <a:srgbClr val="B3261E"/>
+                </a:solidFill>
+              </a:defRPr>
+            </a:pPr>
+            <a:r>
+              <a:rPr sz="1275" b="1">
+                <a:solidFill>
+                  <a:srgbClr val="B3261E"/>
+                </a:solidFill>
+              </a:rPr>
+              <a:t>Attacker</a:t>
+            </a:r>
+          </a:p>
+          <a:p xmlns:a="http://schemas.openxmlformats.org/drawingml/2006/main">
+            <a:pPr algn="ctr">
+              <a:defRPr sz="1275" b="1">
+                <a:solidFill>
+                  <a:srgbClr val="B3261E"/>
+                </a:solidFill>
+              </a:defRPr>
+            </a:pPr>
+            <a:r>
+              <a:rPr sz="1275" b="1">
+                <a:solidFill>
+                  <a:srgbClr val="B3261E"/>
+                </a:solidFill>
+              </a:rPr>
+              <a:t>Public URL</a:t>
+            </a:r>
+          </a:p>
+        </p:txBody>
+      </p:sp>
+      <p:sp>
+        <p:nvSpPr>
+          <p:cNvPr id="20" name="">
+            <a:extLst xmlns:a="http://schemas.openxmlformats.org/drawingml/2006/main">
+              <a:ext uri="{FF2B5EF4-FFF2-40B4-BE49-F238E27FC236}">
+                <a16:creationId xmlns:a16="http://schemas.microsoft.com/office/drawing/2014/main" id="{11FD2769-A1AA-49A8-AA60-BBE0AD1D09F2}"/>
+              </a:ext>
+            </a:extLst>
+          </p:cNvPr>
+          <p:cNvSpPr>
+            <a:spLocks xmlns:a="http://schemas.openxmlformats.org/drawingml/2006/main" noGrp="1"/>
+          </p:cNvSpPr>
+          <p:nvPr/>
+        </p:nvSpPr>
+        <p:spPr>
+          <a:xfrm xmlns:a="http://schemas.openxmlformats.org/drawingml/2006/main">
+            <a:off x="4857750" y="3286125"/>
+            <a:ext cx="2476500" cy="628650"/>
+          </a:xfrm>
+          <a:prstGeom xmlns:a="http://schemas.openxmlformats.org/drawingml/2006/main" prst="roundRect">
+            <a:avLst>
+              <a:gd name="adj" fmla="val 12121"/>
+            </a:avLst>
+          </a:prstGeom>
+          <a:solidFill xmlns:a="http://schemas.openxmlformats.org/drawingml/2006/main">
+            <a:srgbClr val="FFFFFF"/>
+          </a:solidFill>
+          <a:ln xmlns:a="http://schemas.openxmlformats.org/drawingml/2006/main" w="9525">
+            <a:solidFill>
+              <a:srgbClr val="B7C5D4"/>
+            </a:solidFill>
+            <a:prstDash val="solid"/>
+          </a:ln>
+        </p:spPr>
+        <p:txBody>
+          <a:bodyPr xmlns:a="http://schemas.openxmlformats.org/drawingml/2006/main"/>
+          <a:lstStyle xmlns:a="http://schemas.openxmlformats.org/drawingml/2006/main"/>
+          <a:p xmlns:a="http://schemas.openxmlformats.org/drawingml/2006/main">
+            <a:pPr algn="ctr">
+              <a:defRPr sz="1275" b="1">
+                <a:solidFill>
+                  <a:srgbClr val="17324D"/>
+                </a:solidFill>
+              </a:defRPr>
+            </a:pPr>
+            <a:r>
+              <a:rPr sz="1275" b="1">
+                <a:solidFill>
+                  <a:srgbClr val="17324D"/>
+                </a:solidFill>
+              </a:rPr>
+              <a:t>Flask Web App</a:t>
+            </a:r>
+          </a:p>
+          <a:p xmlns:a="http://schemas.openxmlformats.org/drawingml/2006/main">
+            <a:pPr algn="ctr">
+              <a:defRPr sz="1275" b="1">
+                <a:solidFill>
+                  <a:srgbClr val="17324D"/>
+                </a:solidFill>
+              </a:defRPr>
+            </a:pPr>
+            <a:r>
+              <a:rPr sz="1275" b="1">
+                <a:solidFill>
+                  <a:srgbClr val="17324D"/>
+                </a:solidFill>
+              </a:rPr>
+              <a:t>localhost:5000</a:t>
+            </a:r>
+          </a:p>
+        </p:txBody>
+      </p:sp>
+      <p:sp>
+        <p:nvSpPr>
+          <p:cNvPr id="21" name="">
+            <a:extLst xmlns:a="http://schemas.openxmlformats.org/drawingml/2006/main">
+              <a:ext uri="{FF2B5EF4-FFF2-40B4-BE49-F238E27FC236}">
+                <a16:creationId xmlns:a16="http://schemas.microsoft.com/office/drawing/2014/main" id="{61F70DA3-8E77-4A59-822C-618342E193C8}"/>
+              </a:ext>
+            </a:extLst>
+          </p:cNvPr>
+          <p:cNvSpPr>
+            <a:spLocks xmlns:a="http://schemas.openxmlformats.org/drawingml/2006/main" noGrp="1"/>
+          </p:cNvSpPr>
+          <p:nvPr/>
+        </p:nvSpPr>
+        <p:spPr>
+          <a:xfrm xmlns:a="http://schemas.openxmlformats.org/drawingml/2006/main">
+            <a:off x="8096250" y="3286125"/>
+            <a:ext cx="1428750" cy="628650"/>
+          </a:xfrm>
+          <a:prstGeom xmlns:a="http://schemas.openxmlformats.org/drawingml/2006/main" prst="roundRect">
+            <a:avLst>
+              <a:gd name="adj" fmla="val 12121"/>
+            </a:avLst>
+          </a:prstGeom>
+          <a:solidFill xmlns:a="http://schemas.openxmlformats.org/drawingml/2006/main">
+            <a:srgbClr val="FFFFFF"/>
+          </a:solidFill>
+          <a:ln xmlns:a="http://schemas.openxmlformats.org/drawingml/2006/main" w="9525">
+            <a:solidFill>
+              <a:srgbClr val="B7C5D4"/>
+            </a:solidFill>
+            <a:prstDash val="solid"/>
+          </a:ln>
+        </p:spPr>
+        <p:txBody>
+          <a:bodyPr xmlns:a="http://schemas.openxmlformats.org/drawingml/2006/main"/>
+          <a:lstStyle xmlns:a="http://schemas.openxmlformats.org/drawingml/2006/main"/>
+          <a:p xmlns:a="http://schemas.openxmlformats.org/drawingml/2006/main">
+            <a:pPr algn="ctr">
+              <a:defRPr sz="1200" b="1">
+                <a:solidFill>
+                  <a:srgbClr val="17324D"/>
+                </a:solidFill>
+              </a:defRPr>
+            </a:pPr>
+            <a:r>
+              <a:rPr sz="1200" b="1">
+                <a:solidFill>
+                  <a:srgbClr val="17324D"/>
+                </a:solidFill>
+              </a:rPr>
+              <a:t>PostgreSQL</a:t>
+            </a:r>
+          </a:p>
+          <a:p xmlns:a="http://schemas.openxmlformats.org/drawingml/2006/main">
+            <a:pPr algn="ctr">
+              <a:defRPr sz="1200" b="1">
+                <a:solidFill>
+                  <a:srgbClr val="17324D"/>
+                </a:solidFill>
+              </a:defRPr>
+            </a:pPr>
+            <a:r>
+              <a:rPr sz="1200" b="1">
+                <a:solidFill>
+                  <a:srgbClr val="17324D"/>
+                </a:solidFill>
+              </a:rPr>
+              <a:t>Customer data</a:t>
+            </a:r>
+          </a:p>
+        </p:txBody>
+      </p:sp>
+      <p:sp>
+        <p:nvSpPr>
+          <p:cNvPr id="22" name="">
+            <a:extLst xmlns:a="http://schemas.openxmlformats.org/drawingml/2006/main">
+              <a:ext uri="{FF2B5EF4-FFF2-40B4-BE49-F238E27FC236}">
+                <a16:creationId xmlns:a16="http://schemas.microsoft.com/office/drawing/2014/main" id="{FF579D5A-71F8-486A-A603-0C8A87F6E077}"/>
+              </a:ext>
+            </a:extLst>
+          </p:cNvPr>
+          <p:cNvSpPr>
+            <a:spLocks xmlns:a="http://schemas.openxmlformats.org/drawingml/2006/main" noGrp="1"/>
+          </p:cNvSpPr>
+          <p:nvPr/>
+        </p:nvSpPr>
+        <p:spPr>
+          <a:xfrm xmlns:a="http://schemas.openxmlformats.org/drawingml/2006/main">
+            <a:off x="9620250" y="3286125"/>
+            <a:ext cx="1428750" cy="628650"/>
+          </a:xfrm>
+          <a:prstGeom xmlns:a="http://schemas.openxmlformats.org/drawingml/2006/main" prst="roundRect">
+            <a:avLst>
+              <a:gd name="adj" fmla="val 12121"/>
+            </a:avLst>
+          </a:prstGeom>
+          <a:solidFill xmlns:a="http://schemas.openxmlformats.org/drawingml/2006/main">
+            <a:srgbClr val="FFF2F0"/>
+          </a:solidFill>
+          <a:ln xmlns:a="http://schemas.openxmlformats.org/drawingml/2006/main" w="9525">
+            <a:solidFill>
+              <a:srgbClr val="B3261E"/>
+            </a:solidFill>
+            <a:prstDash val="solid"/>
+          </a:ln>
+        </p:spPr>
+        <p:txBody>
+          <a:bodyPr xmlns:a="http://schemas.openxmlformats.org/drawingml/2006/main"/>
+          <a:lstStyle xmlns:a="http://schemas.openxmlformats.org/drawingml/2006/main"/>
+          <a:p xmlns:a="http://schemas.openxmlformats.org/drawingml/2006/main">
+            <a:pPr algn="ctr">
+              <a:defRPr sz="1200" b="1">
+                <a:solidFill>
+                  <a:srgbClr val="B3261E"/>
+                </a:solidFill>
+              </a:defRPr>
+            </a:pPr>
+            <a:r>
+              <a:rPr sz="1200" b="1">
+                <a:solidFill>
+                  <a:srgbClr val="B3261E"/>
+                </a:solidFill>
+              </a:rPr>
+              <a:t>MinIO</a:t>
+            </a:r>
+          </a:p>
+          <a:p xmlns:a="http://schemas.openxmlformats.org/drawingml/2006/main">
+            <a:pPr algn="ctr">
+              <a:defRPr sz="1200" b="1">
+                <a:solidFill>
+                  <a:srgbClr val="B3261E"/>
+                </a:solidFill>
+              </a:defRPr>
+            </a:pPr>
+            <a:r>
+              <a:rPr sz="1200" b="1">
+                <a:solidFill>
+                  <a:srgbClr val="B3261E"/>
+                </a:solidFill>
+              </a:rPr>
+              <a:t>Object storage</a:t>
+            </a:r>
+          </a:p>
+        </p:txBody>
+      </p:sp>
+      <p:sp>
+        <p:nvSpPr>
+          <p:cNvPr id="23" name="">
+            <a:extLst xmlns:a="http://schemas.openxmlformats.org/drawingml/2006/main">
+              <a:ext uri="{FF2B5EF4-FFF2-40B4-BE49-F238E27FC236}">
+                <a16:creationId xmlns:a16="http://schemas.microsoft.com/office/drawing/2014/main" id="{FED6FF42-951E-4507-B034-2C9C82BFB40E}"/>
+              </a:ext>
+            </a:extLst>
+          </p:cNvPr>
+          <p:cNvSpPr>
+            <a:spLocks xmlns:a="http://schemas.openxmlformats.org/drawingml/2006/main" noGrp="1"/>
+          </p:cNvSpPr>
+          <p:nvPr/>
+        </p:nvSpPr>
+        <p:spPr>
+          <a:xfrm xmlns:a="http://schemas.openxmlformats.org/drawingml/2006/main">
+            <a:off x="11144250" y="3286125"/>
+            <a:ext cx="857250" cy="628650"/>
+          </a:xfrm>
+          <a:prstGeom xmlns:a="http://schemas.openxmlformats.org/drawingml/2006/main" prst="roundRect">
+            <a:avLst>
+              <a:gd name="adj" fmla="val 12121"/>
+            </a:avLst>
+          </a:prstGeom>
+          <a:solidFill xmlns:a="http://schemas.openxmlformats.org/drawingml/2006/main">
+            <a:srgbClr val="F1FAF3"/>
+          </a:solidFill>
+          <a:ln xmlns:a="http://schemas.openxmlformats.org/drawingml/2006/main" w="9525">
+            <a:solidFill>
+              <a:srgbClr val="2E7D32"/>
+            </a:solidFill>
+            <a:prstDash val="solid"/>
+          </a:ln>
+        </p:spPr>
+        <p:txBody>
+          <a:bodyPr xmlns:a="http://schemas.openxmlformats.org/drawingml/2006/main"/>
+          <a:lstStyle xmlns:a="http://schemas.openxmlformats.org/drawingml/2006/main"/>
+          <a:p xmlns:a="http://schemas.openxmlformats.org/drawingml/2006/main">
+            <a:pPr algn="ctr">
+              <a:defRPr sz="1125" b="1">
+                <a:solidFill>
+                  <a:srgbClr val="2E7D32"/>
+                </a:solidFill>
+              </a:defRPr>
+            </a:pPr>
+            <a:r>
+              <a:rPr sz="1125" b="1">
+                <a:solidFill>
+                  <a:srgbClr val="2E7D32"/>
+                </a:solidFill>
+              </a:rPr>
+              <a:t>Secrets</a:t>
+            </a:r>
+          </a:p>
+          <a:p xmlns:a="http://schemas.openxmlformats.org/drawingml/2006/main">
+            <a:pPr algn="ctr">
+              <a:defRPr sz="1125" b="1">
+                <a:solidFill>
+                  <a:srgbClr val="2E7D32"/>
+                </a:solidFill>
+              </a:defRPr>
+            </a:pPr>
+            <a:r>
+              <a:rPr sz="1125" b="1">
+                <a:solidFill>
+                  <a:srgbClr val="2E7D32"/>
+                </a:solidFill>
+              </a:rPr>
+              <a:t>Fernet</a:t>
+            </a:r>
+          </a:p>
+        </p:txBody>
+      </p:sp>
+      <p:sp>
+        <p:nvSpPr>
+          <p:cNvPr id="24" name="">
+            <a:extLst xmlns:a="http://schemas.openxmlformats.org/drawingml/2006/main">
+              <a:ext uri="{FF2B5EF4-FFF2-40B4-BE49-F238E27FC236}">
+                <a16:creationId xmlns:a16="http://schemas.microsoft.com/office/drawing/2014/main" id="{E89AB859-EE35-422E-8B4F-A9EA06ADEB1D}"/>
+              </a:ext>
+            </a:extLst>
+          </p:cNvPr>
+          <p:cNvSpPr>
+            <a:spLocks xmlns:a="http://schemas.openxmlformats.org/drawingml/2006/main" noGrp="1"/>
+          </p:cNvSpPr>
+          <p:nvPr/>
+        </p:nvSpPr>
+        <p:spPr>
+          <a:xfrm xmlns:a="http://schemas.openxmlformats.org/drawingml/2006/main">
+            <a:off x="1428750" y="3914775"/>
+            <a:ext cx="0" cy="638175"/>
+          </a:xfrm>
+          <a:prstGeom xmlns:a="http://schemas.openxmlformats.org/drawingml/2006/main" prst="line">
+            <a:avLst/>
+          </a:prstGeom>
+          <a:ln xmlns:a="http://schemas.openxmlformats.org/drawingml/2006/main" w="23813">
+            <a:solidFill>
+              <a:srgbClr val="2F3A4A"/>
+            </a:solidFill>
+            <a:prstDash val="solid"/>
+          </a:ln>
+        </p:spPr>
+      </p:sp>
+      <p:sp>
+        <p:nvSpPr>
+          <p:cNvPr id="25" name="">
+            <a:extLst xmlns:a="http://schemas.openxmlformats.org/drawingml/2006/main">
+              <a:ext uri="{FF2B5EF4-FFF2-40B4-BE49-F238E27FC236}">
+                <a16:creationId xmlns:a16="http://schemas.microsoft.com/office/drawing/2014/main" id="{163A925C-7CB2-4EA7-8E83-A0C233CD00CB}"/>
+              </a:ext>
+            </a:extLst>
+          </p:cNvPr>
+          <p:cNvSpPr>
+            <a:spLocks xmlns:a="http://schemas.openxmlformats.org/drawingml/2006/main" noGrp="1"/>
+          </p:cNvSpPr>
+          <p:nvPr/>
+        </p:nvSpPr>
+        <p:spPr>
+          <a:xfrm xmlns:a="http://schemas.openxmlformats.org/drawingml/2006/main">
+            <a:off x="2762250" y="3914775"/>
+            <a:ext cx="0" cy="638175"/>
+          </a:xfrm>
+          <a:prstGeom xmlns:a="http://schemas.openxmlformats.org/drawingml/2006/main" prst="line">
+            <a:avLst/>
+          </a:prstGeom>
+          <a:ln xmlns:a="http://schemas.openxmlformats.org/drawingml/2006/main" w="23813">
+            <a:solidFill>
+              <a:srgbClr val="2F3A4A"/>
+            </a:solidFill>
+            <a:prstDash val="solid"/>
+          </a:ln>
+        </p:spPr>
+      </p:sp>
+      <p:sp>
+        <p:nvSpPr>
+          <p:cNvPr id="26" name="">
+            <a:extLst xmlns:a="http://schemas.openxmlformats.org/drawingml/2006/main">
+              <a:ext uri="{FF2B5EF4-FFF2-40B4-BE49-F238E27FC236}">
+                <a16:creationId xmlns:a16="http://schemas.microsoft.com/office/drawing/2014/main" id="{EEE67141-CA4F-4E41-80F1-682FF1B92942}"/>
+              </a:ext>
+            </a:extLst>
+          </p:cNvPr>
+          <p:cNvSpPr>
+            <a:spLocks xmlns:a="http://schemas.openxmlformats.org/drawingml/2006/main" noGrp="1"/>
+          </p:cNvSpPr>
+          <p:nvPr/>
+        </p:nvSpPr>
+        <p:spPr>
+          <a:xfrm xmlns:a="http://schemas.openxmlformats.org/drawingml/2006/main">
+            <a:off x="6096000" y="3914775"/>
+            <a:ext cx="0" cy="638175"/>
+          </a:xfrm>
+          <a:prstGeom xmlns:a="http://schemas.openxmlformats.org/drawingml/2006/main" prst="line">
+            <a:avLst/>
+          </a:prstGeom>
+          <a:ln xmlns:a="http://schemas.openxmlformats.org/drawingml/2006/main" w="23813">
+            <a:solidFill>
+              <a:srgbClr val="2F3A4A"/>
+            </a:solidFill>
+            <a:prstDash val="solid"/>
+          </a:ln>
+        </p:spPr>
+      </p:sp>
+      <p:sp>
+        <p:nvSpPr>
+          <p:cNvPr id="27" name="">
+            <a:extLst xmlns:a="http://schemas.openxmlformats.org/drawingml/2006/main">
+              <a:ext uri="{FF2B5EF4-FFF2-40B4-BE49-F238E27FC236}">
+                <a16:creationId xmlns:a16="http://schemas.microsoft.com/office/drawing/2014/main" id="{594E33A4-533C-4BD5-9A90-90AF040338FE}"/>
+              </a:ext>
+            </a:extLst>
+          </p:cNvPr>
+          <p:cNvSpPr>
+            <a:spLocks xmlns:a="http://schemas.openxmlformats.org/drawingml/2006/main" noGrp="1"/>
+          </p:cNvSpPr>
+          <p:nvPr/>
+        </p:nvSpPr>
+        <p:spPr>
+          <a:xfrm xmlns:a="http://schemas.openxmlformats.org/drawingml/2006/main">
+            <a:off x="9048750" y="3914775"/>
+            <a:ext cx="0" cy="638175"/>
+          </a:xfrm>
+          <a:prstGeom xmlns:a="http://schemas.openxmlformats.org/drawingml/2006/main" prst="line">
+            <a:avLst/>
+          </a:prstGeom>
+          <a:ln xmlns:a="http://schemas.openxmlformats.org/drawingml/2006/main" w="23813">
+            <a:solidFill>
+              <a:srgbClr val="2F3A4A"/>
+            </a:solidFill>
+            <a:prstDash val="solid"/>
+          </a:ln>
+        </p:spPr>
+      </p:sp>
+      <p:sp>
+        <p:nvSpPr>
+          <p:cNvPr id="28" name="">
+            <a:extLst xmlns:a="http://schemas.openxmlformats.org/drawingml/2006/main">
+              <a:ext uri="{FF2B5EF4-FFF2-40B4-BE49-F238E27FC236}">
+                <a16:creationId xmlns:a16="http://schemas.microsoft.com/office/drawing/2014/main" id="{47849BD0-BB50-497B-819F-7F8A646E97DE}"/>
+              </a:ext>
+            </a:extLst>
+          </p:cNvPr>
+          <p:cNvSpPr>
+            <a:spLocks xmlns:a="http://schemas.openxmlformats.org/drawingml/2006/main" noGrp="1"/>
+          </p:cNvSpPr>
+          <p:nvPr/>
+        </p:nvSpPr>
+        <p:spPr>
+          <a:xfrm xmlns:a="http://schemas.openxmlformats.org/drawingml/2006/main">
+            <a:off x="10334625" y="3914775"/>
+            <a:ext cx="0" cy="638175"/>
+          </a:xfrm>
+          <a:prstGeom xmlns:a="http://schemas.openxmlformats.org/drawingml/2006/main" prst="line">
+            <a:avLst/>
+          </a:prstGeom>
+          <a:ln xmlns:a="http://schemas.openxmlformats.org/drawingml/2006/main" w="23813">
+            <a:solidFill>
+              <a:srgbClr val="2F3A4A"/>
+            </a:solidFill>
+            <a:prstDash val="solid"/>
+          </a:ln>
+        </p:spPr>
+      </p:sp>
+      <p:sp>
+        <p:nvSpPr>
+          <p:cNvPr id="29" name="">
+            <a:extLst xmlns:a="http://schemas.openxmlformats.org/drawingml/2006/main">
+              <a:ext uri="{FF2B5EF4-FFF2-40B4-BE49-F238E27FC236}">
+                <a16:creationId xmlns:a16="http://schemas.microsoft.com/office/drawing/2014/main" id="{2B767D1E-9BB7-4A45-88AF-ACE0EE492FFE}"/>
+              </a:ext>
+            </a:extLst>
+          </p:cNvPr>
+          <p:cNvSpPr>
+            <a:spLocks xmlns:a="http://schemas.openxmlformats.org/drawingml/2006/main" noGrp="1"/>
+          </p:cNvSpPr>
+          <p:nvPr/>
+        </p:nvSpPr>
+        <p:spPr>
+          <a:xfrm xmlns:a="http://schemas.openxmlformats.org/drawingml/2006/main">
+            <a:off x="11572875" y="3914775"/>
+            <a:ext cx="0" cy="638175"/>
+          </a:xfrm>
+          <a:prstGeom xmlns:a="http://schemas.openxmlformats.org/drawingml/2006/main" prst="line">
+            <a:avLst/>
+          </a:prstGeom>
+          <a:ln xmlns:a="http://schemas.openxmlformats.org/drawingml/2006/main" w="23813">
+            <a:solidFill>
+              <a:srgbClr val="2F3A4A"/>
+            </a:solidFill>
+            <a:prstDash val="solid"/>
+          </a:ln>
+        </p:spPr>
+      </p:sp>
+      <p:sp>
+        <p:nvSpPr>
+          <p:cNvPr id="30" name="">
+            <a:extLst xmlns:a="http://schemas.openxmlformats.org/drawingml/2006/main">
+              <a:ext uri="{FF2B5EF4-FFF2-40B4-BE49-F238E27FC236}">
+                <a16:creationId xmlns:a16="http://schemas.microsoft.com/office/drawing/2014/main" id="{FE2262CC-38DA-4549-BAD9-E9300741241F}"/>
+              </a:ext>
+            </a:extLst>
+          </p:cNvPr>
+          <p:cNvSpPr>
+            <a:spLocks xmlns:a="http://schemas.openxmlformats.org/drawingml/2006/main" noGrp="1"/>
+          </p:cNvSpPr>
+          <p:nvPr/>
+        </p:nvSpPr>
+        <p:spPr>
+          <a:xfrm xmlns:a="http://schemas.openxmlformats.org/drawingml/2006/main">
+            <a:off x="685800" y="4552950"/>
+            <a:ext cx="1476375" cy="552450"/>
+          </a:xfrm>
+          <a:prstGeom xmlns:a="http://schemas.openxmlformats.org/drawingml/2006/main" prst="roundRect">
+            <a:avLst>
+              <a:gd name="adj" fmla="val 13793"/>
             </a:avLst>
           </a:prstGeom>
           <a:solidFill xmlns:a="http://schemas.openxmlformats.org/drawingml/2006/main">
@@ -5290,62 +6982,62 @@
           <a:lstStyle xmlns:a="http://schemas.openxmlformats.org/drawingml/2006/main"/>
           <a:p xmlns:a="http://schemas.openxmlformats.org/drawingml/2006/main">
             <a:pPr algn="ctr">
-              <a:defRPr sz="1500" b="1">
-                <a:solidFill>
-                  <a:srgbClr val="17324D"/>
-                </a:solidFill>
-              </a:defRPr>
-            </a:pPr>
-            <a:r>
-              <a:rPr sz="1500" b="1">
-                <a:solidFill>
-                  <a:srgbClr val="17324D"/>
-                </a:solidFill>
-              </a:rPr>
-              <a:t>User</a:t>
+              <a:defRPr sz="1200" b="0">
+                <a:solidFill>
+                  <a:srgbClr val="17324D"/>
+                </a:solidFill>
+              </a:defRPr>
+            </a:pPr>
+            <a:r>
+              <a:rPr sz="1200" b="0">
+                <a:solidFill>
+                  <a:srgbClr val="17324D"/>
+                </a:solidFill>
+              </a:rPr>
+              <a:t>Normal</a:t>
             </a:r>
           </a:p>
           <a:p xmlns:a="http://schemas.openxmlformats.org/drawingml/2006/main">
             <a:pPr algn="ctr">
-              <a:defRPr sz="1500" b="1">
-                <a:solidFill>
-                  <a:srgbClr val="17324D"/>
-                </a:solidFill>
-              </a:defRPr>
-            </a:pPr>
-            <a:r>
-              <a:rPr sz="1500" b="1">
-                <a:solidFill>
-                  <a:srgbClr val="17324D"/>
-                </a:solidFill>
-              </a:rPr>
-              <a:t>Browser</a:t>
-            </a:r>
-          </a:p>
-        </p:txBody>
-      </p:sp>
-      <p:sp>
-        <p:nvSpPr>
-          <p:cNvPr id="5" name="">
-            <a:extLst xmlns:a="http://schemas.openxmlformats.org/drawingml/2006/main">
-              <a:ext uri="{FF2B5EF4-FFF2-40B4-BE49-F238E27FC236}">
-                <a16:creationId xmlns:a16="http://schemas.microsoft.com/office/drawing/2014/main" id="{6E6E25A5-C74C-4C75-B438-C6549F8C959D}"/>
-              </a:ext>
-            </a:extLst>
-          </p:cNvPr>
-          <p:cNvSpPr>
-            <a:spLocks xmlns:a="http://schemas.openxmlformats.org/drawingml/2006/main" noGrp="1"/>
-          </p:cNvSpPr>
-          <p:nvPr/>
-        </p:nvSpPr>
-        <p:spPr>
-          <a:xfrm xmlns:a="http://schemas.openxmlformats.org/drawingml/2006/main">
-            <a:off x="666750" y="3905250"/>
-            <a:ext cx="1714500" cy="876300"/>
+              <a:defRPr sz="1200" b="0">
+                <a:solidFill>
+                  <a:srgbClr val="17324D"/>
+                </a:solidFill>
+              </a:defRPr>
+            </a:pPr>
+            <a:r>
+              <a:rPr sz="1200" b="0">
+                <a:solidFill>
+                  <a:srgbClr val="17324D"/>
+                </a:solidFill>
+              </a:rPr>
+              <a:t>request</a:t>
+            </a:r>
+          </a:p>
+        </p:txBody>
+      </p:sp>
+      <p:sp>
+        <p:nvSpPr>
+          <p:cNvPr id="31" name="">
+            <a:extLst xmlns:a="http://schemas.openxmlformats.org/drawingml/2006/main">
+              <a:ext uri="{FF2B5EF4-FFF2-40B4-BE49-F238E27FC236}">
+                <a16:creationId xmlns:a16="http://schemas.microsoft.com/office/drawing/2014/main" id="{DB987739-1A6B-4E88-AA4B-B3A7AC4F6E2C}"/>
+              </a:ext>
+            </a:extLst>
+          </p:cNvPr>
+          <p:cNvSpPr>
+            <a:spLocks xmlns:a="http://schemas.openxmlformats.org/drawingml/2006/main" noGrp="1"/>
+          </p:cNvSpPr>
+          <p:nvPr/>
+        </p:nvSpPr>
+        <p:spPr>
+          <a:xfrm xmlns:a="http://schemas.openxmlformats.org/drawingml/2006/main">
+            <a:off x="2333625" y="4552950"/>
+            <a:ext cx="1476375" cy="552450"/>
           </a:xfrm>
           <a:prstGeom xmlns:a="http://schemas.openxmlformats.org/drawingml/2006/main" prst="roundRect">
             <a:avLst>
-              <a:gd name="adj" fmla="val 8696"/>
+              <a:gd name="adj" fmla="val 13793"/>
             </a:avLst>
           </a:prstGeom>
           <a:solidFill xmlns:a="http://schemas.openxmlformats.org/drawingml/2006/main">
@@ -5363,62 +7055,354 @@
           <a:lstStyle xmlns:a="http://schemas.openxmlformats.org/drawingml/2006/main"/>
           <a:p xmlns:a="http://schemas.openxmlformats.org/drawingml/2006/main">
             <a:pPr algn="ctr">
-              <a:defRPr sz="1500" b="1">
-                <a:solidFill>
-                  <a:srgbClr val="17324D"/>
-                </a:solidFill>
-              </a:defRPr>
-            </a:pPr>
-            <a:r>
-              <a:rPr sz="1500" b="1">
-                <a:solidFill>
-                  <a:srgbClr val="17324D"/>
-                </a:solidFill>
-              </a:rPr>
-              <a:t>Attacker</a:t>
+              <a:defRPr sz="1200" b="1">
+                <a:solidFill>
+                  <a:srgbClr val="B3261E"/>
+                </a:solidFill>
+              </a:defRPr>
+            </a:pPr>
+            <a:r>
+              <a:rPr sz="1200" b="1">
+                <a:solidFill>
+                  <a:srgbClr val="B3261E"/>
+                </a:solidFill>
+              </a:rPr>
+              <a:t>Risk</a:t>
             </a:r>
           </a:p>
           <a:p xmlns:a="http://schemas.openxmlformats.org/drawingml/2006/main">
             <a:pPr algn="ctr">
-              <a:defRPr sz="1500" b="1">
-                <a:solidFill>
-                  <a:srgbClr val="17324D"/>
-                </a:solidFill>
-              </a:defRPr>
-            </a:pPr>
-            <a:r>
-              <a:rPr sz="1500" b="1">
-                <a:solidFill>
-                  <a:srgbClr val="17324D"/>
-                </a:solidFill>
-              </a:rPr>
-              <a:t>Public URL</a:t>
-            </a:r>
-          </a:p>
-        </p:txBody>
-      </p:sp>
-      <p:sp>
-        <p:nvSpPr>
-          <p:cNvPr id="6" name="">
-            <a:extLst xmlns:a="http://schemas.openxmlformats.org/drawingml/2006/main">
-              <a:ext uri="{FF2B5EF4-FFF2-40B4-BE49-F238E27FC236}">
-                <a16:creationId xmlns:a16="http://schemas.microsoft.com/office/drawing/2014/main" id="{4894236A-0E78-4665-80FE-027F497AEFEE}"/>
-              </a:ext>
-            </a:extLst>
-          </p:cNvPr>
-          <p:cNvSpPr>
-            <a:spLocks xmlns:a="http://schemas.openxmlformats.org/drawingml/2006/main" noGrp="1"/>
-          </p:cNvSpPr>
-          <p:nvPr/>
-        </p:nvSpPr>
-        <p:spPr>
-          <a:xfrm xmlns:a="http://schemas.openxmlformats.org/drawingml/2006/main">
-            <a:off x="4095750" y="2381250"/>
-            <a:ext cx="2190750" cy="1066800"/>
+              <a:defRPr sz="1200" b="1">
+                <a:solidFill>
+                  <a:srgbClr val="B3261E"/>
+                </a:solidFill>
+              </a:defRPr>
+            </a:pPr>
+            <a:r>
+              <a:rPr sz="1200" b="1">
+                <a:solidFill>
+                  <a:srgbClr val="B3261E"/>
+                </a:solidFill>
+              </a:rPr>
+              <a:t>public object</a:t>
+            </a:r>
+          </a:p>
+        </p:txBody>
+      </p:sp>
+      <p:sp>
+        <p:nvSpPr>
+          <p:cNvPr id="32" name="">
+            <a:extLst xmlns:a="http://schemas.openxmlformats.org/drawingml/2006/main">
+              <a:ext uri="{FF2B5EF4-FFF2-40B4-BE49-F238E27FC236}">
+                <a16:creationId xmlns:a16="http://schemas.microsoft.com/office/drawing/2014/main" id="{B2EF2F5F-F170-438E-9CE8-1DB2F6921022}"/>
+              </a:ext>
+            </a:extLst>
+          </p:cNvPr>
+          <p:cNvSpPr>
+            <a:spLocks xmlns:a="http://schemas.openxmlformats.org/drawingml/2006/main" noGrp="1"/>
+          </p:cNvSpPr>
+          <p:nvPr/>
+        </p:nvSpPr>
+        <p:spPr>
+          <a:xfrm xmlns:a="http://schemas.openxmlformats.org/drawingml/2006/main">
+            <a:off x="4857750" y="4552950"/>
+            <a:ext cx="2476500" cy="552450"/>
           </a:xfrm>
           <a:prstGeom xmlns:a="http://schemas.openxmlformats.org/drawingml/2006/main" prst="roundRect">
             <a:avLst>
-              <a:gd name="adj" fmla="val 7143"/>
+              <a:gd name="adj" fmla="val 13793"/>
+            </a:avLst>
+          </a:prstGeom>
+          <a:solidFill xmlns:a="http://schemas.openxmlformats.org/drawingml/2006/main">
+            <a:srgbClr val="F4F8FC"/>
+          </a:solidFill>
+          <a:ln xmlns:a="http://schemas.openxmlformats.org/drawingml/2006/main" w="9525">
+            <a:solidFill>
+              <a:srgbClr val="C8D3E0"/>
+            </a:solidFill>
+            <a:prstDash val="solid"/>
+          </a:ln>
+        </p:spPr>
+        <p:txBody>
+          <a:bodyPr xmlns:a="http://schemas.openxmlformats.org/drawingml/2006/main"/>
+          <a:lstStyle xmlns:a="http://schemas.openxmlformats.org/drawingml/2006/main"/>
+          <a:p xmlns:a="http://schemas.openxmlformats.org/drawingml/2006/main">
+            <a:pPr algn="ctr">
+              <a:defRPr sz="1200" b="1">
+                <a:solidFill>
+                  <a:srgbClr val="17324D"/>
+                </a:solidFill>
+              </a:defRPr>
+            </a:pPr>
+            <a:r>
+              <a:rPr sz="1200" b="1">
+                <a:solidFill>
+                  <a:srgbClr val="17324D"/>
+                </a:solidFill>
+              </a:rPr>
+              <a:t>Mode</a:t>
+            </a:r>
+          </a:p>
+          <a:p xmlns:a="http://schemas.openxmlformats.org/drawingml/2006/main">
+            <a:pPr algn="ctr">
+              <a:defRPr sz="1200" b="1">
+                <a:solidFill>
+                  <a:srgbClr val="17324D"/>
+                </a:solidFill>
+              </a:defRPr>
+            </a:pPr>
+            <a:r>
+              <a:rPr sz="1200" b="1">
+                <a:solidFill>
+                  <a:srgbClr val="17324D"/>
+                </a:solidFill>
+              </a:rPr>
+              <a:t>vulnerable / fixed</a:t>
+            </a:r>
+          </a:p>
+        </p:txBody>
+      </p:sp>
+      <p:sp>
+        <p:nvSpPr>
+          <p:cNvPr id="33" name="">
+            <a:extLst xmlns:a="http://schemas.openxmlformats.org/drawingml/2006/main">
+              <a:ext uri="{FF2B5EF4-FFF2-40B4-BE49-F238E27FC236}">
+                <a16:creationId xmlns:a16="http://schemas.microsoft.com/office/drawing/2014/main" id="{671DD770-9834-427B-805C-D465C1E094A3}"/>
+              </a:ext>
+            </a:extLst>
+          </p:cNvPr>
+          <p:cNvSpPr>
+            <a:spLocks xmlns:a="http://schemas.openxmlformats.org/drawingml/2006/main" noGrp="1"/>
+          </p:cNvSpPr>
+          <p:nvPr/>
+        </p:nvSpPr>
+        <p:spPr>
+          <a:xfrm xmlns:a="http://schemas.openxmlformats.org/drawingml/2006/main">
+            <a:off x="8096250" y="4552950"/>
+            <a:ext cx="1428750" cy="552450"/>
+          </a:xfrm>
+          <a:prstGeom xmlns:a="http://schemas.openxmlformats.org/drawingml/2006/main" prst="roundRect">
+            <a:avLst>
+              <a:gd name="adj" fmla="val 13793"/>
+            </a:avLst>
+          </a:prstGeom>
+          <a:solidFill xmlns:a="http://schemas.openxmlformats.org/drawingml/2006/main">
+            <a:srgbClr val="F4F8FC"/>
+          </a:solidFill>
+          <a:ln xmlns:a="http://schemas.openxmlformats.org/drawingml/2006/main" w="9525">
+            <a:solidFill>
+              <a:srgbClr val="C8D3E0"/>
+            </a:solidFill>
+            <a:prstDash val="solid"/>
+          </a:ln>
+        </p:spPr>
+        <p:txBody>
+          <a:bodyPr xmlns:a="http://schemas.openxmlformats.org/drawingml/2006/main"/>
+          <a:lstStyle xmlns:a="http://schemas.openxmlformats.org/drawingml/2006/main"/>
+          <a:p xmlns:a="http://schemas.openxmlformats.org/drawingml/2006/main">
+            <a:pPr algn="ctr">
+              <a:defRPr sz="1125" b="0">
+                <a:solidFill>
+                  <a:srgbClr val="17324D"/>
+                </a:solidFill>
+              </a:defRPr>
+            </a:pPr>
+            <a:r>
+              <a:rPr sz="1125" b="0">
+                <a:solidFill>
+                  <a:srgbClr val="17324D"/>
+                </a:solidFill>
+              </a:rPr>
+              <a:t>Asset</a:t>
+            </a:r>
+          </a:p>
+          <a:p xmlns:a="http://schemas.openxmlformats.org/drawingml/2006/main">
+            <a:pPr algn="ctr">
+              <a:defRPr sz="1125" b="0">
+                <a:solidFill>
+                  <a:srgbClr val="17324D"/>
+                </a:solidFill>
+              </a:defRPr>
+            </a:pPr>
+            <a:r>
+              <a:rPr sz="1125" b="0">
+                <a:solidFill>
+                  <a:srgbClr val="17324D"/>
+                </a:solidFill>
+              </a:rPr>
+              <a:t>PII sample</a:t>
+            </a:r>
+          </a:p>
+        </p:txBody>
+      </p:sp>
+      <p:sp>
+        <p:nvSpPr>
+          <p:cNvPr id="34" name="">
+            <a:extLst xmlns:a="http://schemas.openxmlformats.org/drawingml/2006/main">
+              <a:ext uri="{FF2B5EF4-FFF2-40B4-BE49-F238E27FC236}">
+                <a16:creationId xmlns:a16="http://schemas.microsoft.com/office/drawing/2014/main" id="{3F2FD7C7-96F5-4A29-B9A8-3DD75A377757}"/>
+              </a:ext>
+            </a:extLst>
+          </p:cNvPr>
+          <p:cNvSpPr>
+            <a:spLocks xmlns:a="http://schemas.openxmlformats.org/drawingml/2006/main" noGrp="1"/>
+          </p:cNvSpPr>
+          <p:nvPr/>
+        </p:nvSpPr>
+        <p:spPr>
+          <a:xfrm xmlns:a="http://schemas.openxmlformats.org/drawingml/2006/main">
+            <a:off x="9620250" y="4552950"/>
+            <a:ext cx="1428750" cy="552450"/>
+          </a:xfrm>
+          <a:prstGeom xmlns:a="http://schemas.openxmlformats.org/drawingml/2006/main" prst="roundRect">
+            <a:avLst>
+              <a:gd name="adj" fmla="val 13793"/>
+            </a:avLst>
+          </a:prstGeom>
+          <a:solidFill xmlns:a="http://schemas.openxmlformats.org/drawingml/2006/main">
+            <a:srgbClr val="FFF2F0"/>
+          </a:solidFill>
+          <a:ln xmlns:a="http://schemas.openxmlformats.org/drawingml/2006/main" w="9525">
+            <a:solidFill>
+              <a:srgbClr val="B3261E"/>
+            </a:solidFill>
+            <a:prstDash val="solid"/>
+          </a:ln>
+        </p:spPr>
+        <p:txBody>
+          <a:bodyPr xmlns:a="http://schemas.openxmlformats.org/drawingml/2006/main"/>
+          <a:lstStyle xmlns:a="http://schemas.openxmlformats.org/drawingml/2006/main"/>
+          <a:p xmlns:a="http://schemas.openxmlformats.org/drawingml/2006/main">
+            <a:pPr algn="ctr">
+              <a:defRPr sz="1125" b="1">
+                <a:solidFill>
+                  <a:srgbClr val="B3261E"/>
+                </a:solidFill>
+              </a:defRPr>
+            </a:pPr>
+            <a:r>
+              <a:rPr sz="1125" b="1">
+                <a:solidFill>
+                  <a:srgbClr val="B3261E"/>
+                </a:solidFill>
+              </a:rPr>
+              <a:t>Risk</a:t>
+            </a:r>
+          </a:p>
+          <a:p xmlns:a="http://schemas.openxmlformats.org/drawingml/2006/main">
+            <a:pPr algn="ctr">
+              <a:defRPr sz="1125" b="1">
+                <a:solidFill>
+                  <a:srgbClr val="B3261E"/>
+                </a:solidFill>
+              </a:defRPr>
+            </a:pPr>
+            <a:r>
+              <a:rPr sz="1125" b="1">
+                <a:solidFill>
+                  <a:srgbClr val="B3261E"/>
+                </a:solidFill>
+              </a:rPr>
+              <a:t>bucket policy</a:t>
+            </a:r>
+          </a:p>
+        </p:txBody>
+      </p:sp>
+      <p:sp>
+        <p:nvSpPr>
+          <p:cNvPr id="35" name="">
+            <a:extLst xmlns:a="http://schemas.openxmlformats.org/drawingml/2006/main">
+              <a:ext uri="{FF2B5EF4-FFF2-40B4-BE49-F238E27FC236}">
+                <a16:creationId xmlns:a16="http://schemas.microsoft.com/office/drawing/2014/main" id="{BE1C4411-392C-45DA-856D-8A5FCE019C35}"/>
+              </a:ext>
+            </a:extLst>
+          </p:cNvPr>
+          <p:cNvSpPr>
+            <a:spLocks xmlns:a="http://schemas.openxmlformats.org/drawingml/2006/main" noGrp="1"/>
+          </p:cNvSpPr>
+          <p:nvPr/>
+        </p:nvSpPr>
+        <p:spPr>
+          <a:xfrm xmlns:a="http://schemas.openxmlformats.org/drawingml/2006/main">
+            <a:off x="11144250" y="4552950"/>
+            <a:ext cx="857250" cy="552450"/>
+          </a:xfrm>
+          <a:prstGeom xmlns:a="http://schemas.openxmlformats.org/drawingml/2006/main" prst="roundRect">
+            <a:avLst>
+              <a:gd name="adj" fmla="val 13793"/>
+            </a:avLst>
+          </a:prstGeom>
+          <a:solidFill xmlns:a="http://schemas.openxmlformats.org/drawingml/2006/main">
+            <a:srgbClr val="F1FAF3"/>
+          </a:solidFill>
+          <a:ln xmlns:a="http://schemas.openxmlformats.org/drawingml/2006/main" w="9525">
+            <a:solidFill>
+              <a:srgbClr val="2E7D32"/>
+            </a:solidFill>
+            <a:prstDash val="solid"/>
+          </a:ln>
+        </p:spPr>
+        <p:txBody>
+          <a:bodyPr xmlns:a="http://schemas.openxmlformats.org/drawingml/2006/main"/>
+          <a:lstStyle xmlns:a="http://schemas.openxmlformats.org/drawingml/2006/main"/>
+          <a:p xmlns:a="http://schemas.openxmlformats.org/drawingml/2006/main">
+            <a:pPr algn="ctr">
+              <a:defRPr sz="1050" b="1">
+                <a:solidFill>
+                  <a:srgbClr val="2E7D32"/>
+                </a:solidFill>
+              </a:defRPr>
+            </a:pPr>
+            <a:r>
+              <a:rPr sz="1050" b="1">
+                <a:solidFill>
+                  <a:srgbClr val="2E7D32"/>
+                </a:solidFill>
+              </a:rPr>
+              <a:t>Control</a:t>
+            </a:r>
+          </a:p>
+          <a:p xmlns:a="http://schemas.openxmlformats.org/drawingml/2006/main">
+            <a:pPr algn="ctr">
+              <a:defRPr sz="1050" b="1">
+                <a:solidFill>
+                  <a:srgbClr val="2E7D32"/>
+                </a:solidFill>
+              </a:defRPr>
+            </a:pPr>
+            <a:r>
+              <a:rPr sz="1050" b="1">
+                <a:solidFill>
+                  <a:srgbClr val="2E7D32"/>
+                </a:solidFill>
+              </a:rPr>
+              <a:t>encrypted</a:t>
+            </a:r>
+          </a:p>
+        </p:txBody>
+      </p:sp>
+      <p:sp>
+        <p:nvSpPr>
+          <p:cNvPr id="36" name="">
+            <a:extLst xmlns:a="http://schemas.openxmlformats.org/drawingml/2006/main">
+              <a:ext uri="{FF2B5EF4-FFF2-40B4-BE49-F238E27FC236}">
+                <a16:creationId xmlns:a16="http://schemas.microsoft.com/office/drawing/2014/main" id="{2406308F-002D-4797-95E7-B7CE78414130}"/>
+              </a:ext>
+            </a:extLst>
+          </p:cNvPr>
+          <p:cNvSpPr>
+            <a:spLocks xmlns:a="http://schemas.openxmlformats.org/drawingml/2006/main" noGrp="1"/>
+          </p:cNvSpPr>
+          <p:nvPr/>
+        </p:nvSpPr>
+        <p:spPr>
+          <a:xfrm xmlns:a="http://schemas.openxmlformats.org/drawingml/2006/main">
+            <a:off x="1619250" y="5829300"/>
+            <a:ext cx="8953500" cy="514350"/>
+          </a:xfrm>
+          <a:prstGeom xmlns:a="http://schemas.openxmlformats.org/drawingml/2006/main" prst="roundRect">
+            <a:avLst>
+              <a:gd name="adj" fmla="val 14815"/>
             </a:avLst>
           </a:prstGeom>
           <a:solidFill xmlns:a="http://schemas.openxmlformats.org/drawingml/2006/main">
@@ -5448,426 +7432,7 @@
                   <a:srgbClr val="17324D"/>
                 </a:solidFill>
               </a:rPr>
-              <a:t>Flask Web App</a:t>
-            </a:r>
-          </a:p>
-          <a:p xmlns:a="http://schemas.openxmlformats.org/drawingml/2006/main">
-            <a:pPr algn="ctr">
-              <a:defRPr sz="1500" b="1">
-                <a:solidFill>
-                  <a:srgbClr val="17324D"/>
-                </a:solidFill>
-              </a:defRPr>
-            </a:pPr>
-            <a:r>
-              <a:rPr sz="1500" b="1">
-                <a:solidFill>
-                  <a:srgbClr val="17324D"/>
-                </a:solidFill>
-              </a:rPr>
-              <a:t>:5000</a:t>
-            </a:r>
-          </a:p>
-        </p:txBody>
-      </p:sp>
-      <p:sp>
-        <p:nvSpPr>
-          <p:cNvPr id="7" name="">
-            <a:extLst xmlns:a="http://schemas.openxmlformats.org/drawingml/2006/main">
-              <a:ext uri="{FF2B5EF4-FFF2-40B4-BE49-F238E27FC236}">
-                <a16:creationId xmlns:a16="http://schemas.microsoft.com/office/drawing/2014/main" id="{8345A9AB-99CF-4A1C-9A34-E745B60CC09E}"/>
-              </a:ext>
-            </a:extLst>
-          </p:cNvPr>
-          <p:cNvSpPr>
-            <a:spLocks xmlns:a="http://schemas.openxmlformats.org/drawingml/2006/main" noGrp="1"/>
-          </p:cNvSpPr>
-          <p:nvPr/>
-        </p:nvSpPr>
-        <p:spPr>
-          <a:xfrm xmlns:a="http://schemas.openxmlformats.org/drawingml/2006/main">
-            <a:off x="8572500" y="1762125"/>
-            <a:ext cx="2286000" cy="952500"/>
-          </a:xfrm>
-          <a:prstGeom xmlns:a="http://schemas.openxmlformats.org/drawingml/2006/main" prst="roundRect">
-            <a:avLst>
-              <a:gd name="adj" fmla="val 8000"/>
-            </a:avLst>
-          </a:prstGeom>
-          <a:solidFill xmlns:a="http://schemas.openxmlformats.org/drawingml/2006/main">
-            <a:srgbClr val="FFFFFF"/>
-          </a:solidFill>
-          <a:ln xmlns:a="http://schemas.openxmlformats.org/drawingml/2006/main" w="9525">
-            <a:solidFill>
-              <a:srgbClr val="C8D3E0"/>
-            </a:solidFill>
-            <a:prstDash val="solid"/>
-          </a:ln>
-        </p:spPr>
-        <p:txBody>
-          <a:bodyPr xmlns:a="http://schemas.openxmlformats.org/drawingml/2006/main"/>
-          <a:lstStyle xmlns:a="http://schemas.openxmlformats.org/drawingml/2006/main"/>
-          <a:p xmlns:a="http://schemas.openxmlformats.org/drawingml/2006/main">
-            <a:pPr algn="ctr">
-              <a:defRPr sz="1500" b="1">
-                <a:solidFill>
-                  <a:srgbClr val="17324D"/>
-                </a:solidFill>
-              </a:defRPr>
-            </a:pPr>
-            <a:r>
-              <a:rPr sz="1500" b="1">
-                <a:solidFill>
-                  <a:srgbClr val="17324D"/>
-                </a:solidFill>
-              </a:rPr>
-              <a:t>PostgreSQL</a:t>
-            </a:r>
-          </a:p>
-          <a:p xmlns:a="http://schemas.openxmlformats.org/drawingml/2006/main">
-            <a:pPr algn="ctr">
-              <a:defRPr sz="1500" b="1">
-                <a:solidFill>
-                  <a:srgbClr val="17324D"/>
-                </a:solidFill>
-              </a:defRPr>
-            </a:pPr>
-            <a:r>
-              <a:rPr sz="1500" b="1">
-                <a:solidFill>
-                  <a:srgbClr val="17324D"/>
-                </a:solidFill>
-              </a:rPr>
-              <a:t>Customer data</a:t>
-            </a:r>
-          </a:p>
-        </p:txBody>
-      </p:sp>
-      <p:sp>
-        <p:nvSpPr>
-          <p:cNvPr id="8" name="">
-            <a:extLst xmlns:a="http://schemas.openxmlformats.org/drawingml/2006/main">
-              <a:ext uri="{FF2B5EF4-FFF2-40B4-BE49-F238E27FC236}">
-                <a16:creationId xmlns:a16="http://schemas.microsoft.com/office/drawing/2014/main" id="{D46CA14F-5441-4F1A-8A6A-AEB9C030C459}"/>
-              </a:ext>
-            </a:extLst>
-          </p:cNvPr>
-          <p:cNvSpPr>
-            <a:spLocks xmlns:a="http://schemas.openxmlformats.org/drawingml/2006/main" noGrp="1"/>
-          </p:cNvSpPr>
-          <p:nvPr/>
-        </p:nvSpPr>
-        <p:spPr>
-          <a:xfrm xmlns:a="http://schemas.openxmlformats.org/drawingml/2006/main">
-            <a:off x="8572500" y="4000500"/>
-            <a:ext cx="2286000" cy="1047750"/>
-          </a:xfrm>
-          <a:prstGeom xmlns:a="http://schemas.openxmlformats.org/drawingml/2006/main" prst="roundRect">
-            <a:avLst>
-              <a:gd name="adj" fmla="val 7273"/>
-            </a:avLst>
-          </a:prstGeom>
-          <a:solidFill xmlns:a="http://schemas.openxmlformats.org/drawingml/2006/main">
-            <a:srgbClr val="FFF2F0"/>
-          </a:solidFill>
-          <a:ln xmlns:a="http://schemas.openxmlformats.org/drawingml/2006/main" w="9525">
-            <a:solidFill>
-              <a:srgbClr val="B3261E"/>
-            </a:solidFill>
-            <a:prstDash val="solid"/>
-          </a:ln>
-        </p:spPr>
-        <p:txBody>
-          <a:bodyPr xmlns:a="http://schemas.openxmlformats.org/drawingml/2006/main"/>
-          <a:lstStyle xmlns:a="http://schemas.openxmlformats.org/drawingml/2006/main"/>
-          <a:p xmlns:a="http://schemas.openxmlformats.org/drawingml/2006/main">
-            <a:pPr algn="ctr">
-              <a:defRPr sz="1500" b="1">
-                <a:solidFill>
-                  <a:srgbClr val="17324D"/>
-                </a:solidFill>
-              </a:defRPr>
-            </a:pPr>
-            <a:r>
-              <a:rPr sz="1500" b="1">
-                <a:solidFill>
-                  <a:srgbClr val="17324D"/>
-                </a:solidFill>
-              </a:rPr>
-              <a:t>MinIO Storage</a:t>
-            </a:r>
-          </a:p>
-          <a:p xmlns:a="http://schemas.openxmlformats.org/drawingml/2006/main">
-            <a:pPr algn="ctr">
-              <a:defRPr sz="1500" b="1">
-                <a:solidFill>
-                  <a:srgbClr val="17324D"/>
-                </a:solidFill>
-              </a:defRPr>
-            </a:pPr>
-            <a:r>
-              <a:rPr sz="1500" b="1">
-                <a:solidFill>
-                  <a:srgbClr val="17324D"/>
-                </a:solidFill>
-              </a:rPr>
-              <a:t>:9000 / :9001</a:t>
-            </a:r>
-          </a:p>
-        </p:txBody>
-      </p:sp>
-      <p:sp>
-        <p:nvSpPr>
-          <p:cNvPr id="9" name="">
-            <a:extLst xmlns:a="http://schemas.openxmlformats.org/drawingml/2006/main">
-              <a:ext uri="{FF2B5EF4-FFF2-40B4-BE49-F238E27FC236}">
-                <a16:creationId xmlns:a16="http://schemas.microsoft.com/office/drawing/2014/main" id="{1CB2BE6D-0FC2-480B-855E-22F4B1DFBFCC}"/>
-              </a:ext>
-            </a:extLst>
-          </p:cNvPr>
-          <p:cNvSpPr>
-            <a:spLocks xmlns:a="http://schemas.openxmlformats.org/drawingml/2006/main" noGrp="1"/>
-          </p:cNvSpPr>
-          <p:nvPr/>
-        </p:nvSpPr>
-        <p:spPr>
-          <a:xfrm xmlns:a="http://schemas.openxmlformats.org/drawingml/2006/main">
-            <a:off x="4095750" y="4476750"/>
-            <a:ext cx="2190750" cy="762000"/>
-          </a:xfrm>
-          <a:prstGeom xmlns:a="http://schemas.openxmlformats.org/drawingml/2006/main" prst="roundRect">
-            <a:avLst>
-              <a:gd name="adj" fmla="val 10000"/>
-            </a:avLst>
-          </a:prstGeom>
-          <a:solidFill xmlns:a="http://schemas.openxmlformats.org/drawingml/2006/main">
-            <a:srgbClr val="F1FAF3"/>
-          </a:solidFill>
-          <a:ln xmlns:a="http://schemas.openxmlformats.org/drawingml/2006/main" w="9525">
-            <a:solidFill>
-              <a:srgbClr val="2E7D32"/>
-            </a:solidFill>
-            <a:prstDash val="solid"/>
-          </a:ln>
-        </p:spPr>
-        <p:txBody>
-          <a:bodyPr xmlns:a="http://schemas.openxmlformats.org/drawingml/2006/main"/>
-          <a:lstStyle xmlns:a="http://schemas.openxmlformats.org/drawingml/2006/main"/>
-          <a:p xmlns:a="http://schemas.openxmlformats.org/drawingml/2006/main">
-            <a:pPr algn="ctr">
-              <a:defRPr sz="1500" b="1">
-                <a:solidFill>
-                  <a:srgbClr val="17324D"/>
-                </a:solidFill>
-              </a:defRPr>
-            </a:pPr>
-            <a:r>
-              <a:rPr sz="1500" b="1">
-                <a:solidFill>
-                  <a:srgbClr val="17324D"/>
-                </a:solidFill>
-              </a:rPr>
-              <a:t>Encrypted Secret</a:t>
-            </a:r>
-          </a:p>
-        </p:txBody>
-      </p:sp>
-      <p:sp>
-        <p:nvSpPr>
-          <p:cNvPr id="10" name="">
-            <a:extLst xmlns:a="http://schemas.openxmlformats.org/drawingml/2006/main">
-              <a:ext uri="{FF2B5EF4-FFF2-40B4-BE49-F238E27FC236}">
-                <a16:creationId xmlns:a16="http://schemas.microsoft.com/office/drawing/2014/main" id="{8D718156-265B-4C02-9203-1B16F96948B4}"/>
-              </a:ext>
-            </a:extLst>
-          </p:cNvPr>
-          <p:cNvSpPr>
-            <a:spLocks xmlns:a="http://schemas.openxmlformats.org/drawingml/2006/main" noGrp="1"/>
-          </p:cNvSpPr>
-          <p:nvPr/>
-        </p:nvSpPr>
-        <p:spPr>
-          <a:xfrm xmlns:a="http://schemas.openxmlformats.org/drawingml/2006/main">
-            <a:off x="2381250" y="2533650"/>
-            <a:ext cx="1714500" cy="323850"/>
-          </a:xfrm>
-          <a:prstGeom xmlns:a="http://schemas.openxmlformats.org/drawingml/2006/main" prst="line">
-            <a:avLst/>
-          </a:prstGeom>
-          <a:ln xmlns:a="http://schemas.openxmlformats.org/drawingml/2006/main" w="23813">
-            <a:solidFill>
-              <a:srgbClr val="2F3A4A"/>
-            </a:solidFill>
-            <a:prstDash val="solid"/>
-          </a:ln>
-        </p:spPr>
-      </p:sp>
-      <p:sp>
-        <p:nvSpPr>
-          <p:cNvPr id="11" name="">
-            <a:extLst xmlns:a="http://schemas.openxmlformats.org/drawingml/2006/main">
-              <a:ext uri="{FF2B5EF4-FFF2-40B4-BE49-F238E27FC236}">
-                <a16:creationId xmlns:a16="http://schemas.microsoft.com/office/drawing/2014/main" id="{54296977-9A0D-446F-B821-44FDAFE617C8}"/>
-              </a:ext>
-            </a:extLst>
-          </p:cNvPr>
-          <p:cNvSpPr>
-            <a:spLocks xmlns:a="http://schemas.openxmlformats.org/drawingml/2006/main" noGrp="1"/>
-          </p:cNvSpPr>
-          <p:nvPr/>
-        </p:nvSpPr>
-        <p:spPr>
-          <a:xfrm xmlns:a="http://schemas.openxmlformats.org/drawingml/2006/main">
-            <a:off x="6286500" y="2724150"/>
-            <a:ext cx="2286000" cy="-485775"/>
-          </a:xfrm>
-          <a:prstGeom xmlns:a="http://schemas.openxmlformats.org/drawingml/2006/main" prst="line">
-            <a:avLst/>
-          </a:prstGeom>
-          <a:ln xmlns:a="http://schemas.openxmlformats.org/drawingml/2006/main" w="23813">
-            <a:solidFill>
-              <a:srgbClr val="2F3A4A"/>
-            </a:solidFill>
-            <a:prstDash val="solid"/>
-          </a:ln>
-        </p:spPr>
-      </p:sp>
-      <p:sp>
-        <p:nvSpPr>
-          <p:cNvPr id="12" name="">
-            <a:extLst xmlns:a="http://schemas.openxmlformats.org/drawingml/2006/main">
-              <a:ext uri="{FF2B5EF4-FFF2-40B4-BE49-F238E27FC236}">
-                <a16:creationId xmlns:a16="http://schemas.microsoft.com/office/drawing/2014/main" id="{C5273B51-8871-46E4-9E92-A331B03C24B3}"/>
-              </a:ext>
-            </a:extLst>
-          </p:cNvPr>
-          <p:cNvSpPr>
-            <a:spLocks xmlns:a="http://schemas.openxmlformats.org/drawingml/2006/main" noGrp="1"/>
-          </p:cNvSpPr>
-          <p:nvPr/>
-        </p:nvSpPr>
-        <p:spPr>
-          <a:xfrm xmlns:a="http://schemas.openxmlformats.org/drawingml/2006/main">
-            <a:off x="6286500" y="3200400"/>
-            <a:ext cx="2286000" cy="1276350"/>
-          </a:xfrm>
-          <a:prstGeom xmlns:a="http://schemas.openxmlformats.org/drawingml/2006/main" prst="line">
-            <a:avLst/>
-          </a:prstGeom>
-          <a:ln xmlns:a="http://schemas.openxmlformats.org/drawingml/2006/main" w="23813">
-            <a:solidFill>
-              <a:srgbClr val="2F3A4A"/>
-            </a:solidFill>
-            <a:prstDash val="solid"/>
-          </a:ln>
-        </p:spPr>
-      </p:sp>
-      <p:sp>
-        <p:nvSpPr>
-          <p:cNvPr id="13" name="">
-            <a:extLst xmlns:a="http://schemas.openxmlformats.org/drawingml/2006/main">
-              <a:ext uri="{FF2B5EF4-FFF2-40B4-BE49-F238E27FC236}">
-                <a16:creationId xmlns:a16="http://schemas.microsoft.com/office/drawing/2014/main" id="{7C7783AE-DB0E-4808-AFC5-EFBE07778F0E}"/>
-              </a:ext>
-            </a:extLst>
-          </p:cNvPr>
-          <p:cNvSpPr>
-            <a:spLocks xmlns:a="http://schemas.openxmlformats.org/drawingml/2006/main" noGrp="1"/>
-          </p:cNvSpPr>
-          <p:nvPr/>
-        </p:nvSpPr>
-        <p:spPr>
-          <a:xfrm xmlns:a="http://schemas.openxmlformats.org/drawingml/2006/main">
-            <a:off x="2381250" y="4343400"/>
-            <a:ext cx="6191250" cy="180975"/>
-          </a:xfrm>
-          <a:prstGeom xmlns:a="http://schemas.openxmlformats.org/drawingml/2006/main" prst="line">
-            <a:avLst/>
-          </a:prstGeom>
-          <a:ln xmlns:a="http://schemas.openxmlformats.org/drawingml/2006/main" w="23813">
-            <a:solidFill>
-              <a:srgbClr val="2F3A4A"/>
-            </a:solidFill>
-            <a:prstDash val="solid"/>
-          </a:ln>
-        </p:spPr>
-      </p:sp>
-      <p:sp>
-        <p:nvSpPr>
-          <p:cNvPr id="14" name="">
-            <a:extLst xmlns:a="http://schemas.openxmlformats.org/drawingml/2006/main">
-              <a:ext uri="{FF2B5EF4-FFF2-40B4-BE49-F238E27FC236}">
-                <a16:creationId xmlns:a16="http://schemas.microsoft.com/office/drawing/2014/main" id="{6CA70F13-E950-4542-A88B-1319EB814B26}"/>
-              </a:ext>
-            </a:extLst>
-          </p:cNvPr>
-          <p:cNvSpPr>
-            <a:spLocks xmlns:a="http://schemas.openxmlformats.org/drawingml/2006/main" noGrp="1"/>
-          </p:cNvSpPr>
-          <p:nvPr/>
-        </p:nvSpPr>
-        <p:spPr>
-          <a:xfrm xmlns:a="http://schemas.openxmlformats.org/drawingml/2006/main">
-            <a:off x="5191125" y="4476750"/>
-            <a:ext cx="0" cy="-1028700"/>
-          </a:xfrm>
-          <a:prstGeom xmlns:a="http://schemas.openxmlformats.org/drawingml/2006/main" prst="line">
-            <a:avLst/>
-          </a:prstGeom>
-          <a:ln xmlns:a="http://schemas.openxmlformats.org/drawingml/2006/main" w="23813">
-            <a:solidFill>
-              <a:srgbClr val="2F3A4A"/>
-            </a:solidFill>
-            <a:prstDash val="solid"/>
-          </a:ln>
-        </p:spPr>
-      </p:sp>
-      <p:sp>
-        <p:nvSpPr>
-          <p:cNvPr id="15" name="">
-            <a:extLst xmlns:a="http://schemas.openxmlformats.org/drawingml/2006/main">
-              <a:ext uri="{FF2B5EF4-FFF2-40B4-BE49-F238E27FC236}">
-                <a16:creationId xmlns:a16="http://schemas.microsoft.com/office/drawing/2014/main" id="{18C6CA73-2105-404F-93C1-75EAE3BE9BC0}"/>
-              </a:ext>
-            </a:extLst>
-          </p:cNvPr>
-          <p:cNvSpPr>
-            <a:spLocks xmlns:a="http://schemas.openxmlformats.org/drawingml/2006/main" noGrp="1"/>
-          </p:cNvSpPr>
-          <p:nvPr/>
-        </p:nvSpPr>
-        <p:spPr>
-          <a:xfrm xmlns:a="http://schemas.openxmlformats.org/drawingml/2006/main">
-            <a:off x="4095750" y="1524000"/>
-            <a:ext cx="3238500" cy="342900"/>
-          </a:xfrm>
-          <a:prstGeom xmlns:a="http://schemas.openxmlformats.org/drawingml/2006/main" prst="rect">
-            <a:avLst/>
-          </a:prstGeom>
-          <a:noFill xmlns:a="http://schemas.openxmlformats.org/drawingml/2006/main"/>
-          <a:ln xmlns:a="http://schemas.openxmlformats.org/drawingml/2006/main" w="0">
-            <a:noFill/>
-            <a:prstDash val="solid"/>
-          </a:ln>
-        </p:spPr>
-        <p:txBody>
-          <a:bodyPr xmlns:a="http://schemas.openxmlformats.org/drawingml/2006/main"/>
-          <a:lstStyle xmlns:a="http://schemas.openxmlformats.org/drawingml/2006/main"/>
-          <a:p xmlns:a="http://schemas.openxmlformats.org/drawingml/2006/main">
-            <a:pPr algn="l">
-              <a:defRPr sz="1650" b="1">
-                <a:solidFill>
-                  <a:srgbClr val="5F6B7A"/>
-                </a:solidFill>
-              </a:defRPr>
-            </a:pPr>
-            <a:r>
-              <a:rPr sz="1650" b="1">
-                <a:solidFill>
-                  <a:srgbClr val="5F6B7A"/>
-                </a:solidFill>
-              </a:rPr>
-              <a:t>Docker network: cloud-lab</a:t>
+              <a:t>Ba điểm demo chính: Public Bucket | IAM Misconfiguration | Credential Leakage</a:t>
             </a:r>
           </a:p>
         </p:txBody>
@@ -5875,7 +7440,7 @@
     </p:spTree>
     <p:extLst>
       <p:ext uri="{BB962C8B-B14F-4D97-AF65-F5344CB8AC3E}">
-        <p14:creationId xmlns:p14="http://schemas.microsoft.com/office/powerpoint/2010/main" val="500376176"/>
+        <p14:creationId xmlns:p14="http://schemas.microsoft.com/office/powerpoint/2010/main" val="1189385672"/>
       </p:ext>
     </p:extLst>
   </p:cSld>
@@ -5906,7 +7471,7 @@
           <p:cNvPr id="1" name="">
             <a:extLst xmlns:a="http://schemas.openxmlformats.org/drawingml/2006/main">
               <a:ext uri="{FF2B5EF4-FFF2-40B4-BE49-F238E27FC236}">
-                <a16:creationId xmlns:a16="http://schemas.microsoft.com/office/drawing/2014/main" id="{8C625682-63F2-4E52-B3B6-BAD06CE835AC}"/>
+                <a16:creationId xmlns:a16="http://schemas.microsoft.com/office/drawing/2014/main" id="{B414160B-4F11-4940-A3AF-EBD95CD45427}"/>
               </a:ext>
             </a:extLst>
           </p:cNvPr>
@@ -5939,7 +7504,7 @@
           <p:cNvPr id="2" name="">
             <a:extLst xmlns:a="http://schemas.openxmlformats.org/drawingml/2006/main">
               <a:ext uri="{FF2B5EF4-FFF2-40B4-BE49-F238E27FC236}">
-                <a16:creationId xmlns:a16="http://schemas.microsoft.com/office/drawing/2014/main" id="{112E39B2-2F1B-4BF3-BF14-904CE8C6C48D}"/>
+                <a16:creationId xmlns:a16="http://schemas.microsoft.com/office/drawing/2014/main" id="{621332DD-85A2-44A9-A2D2-C66066A3E265}"/>
               </a:ext>
             </a:extLst>
           </p:cNvPr>
@@ -5989,7 +7554,7 @@
           <p:cNvPr id="3" name="">
             <a:extLst xmlns:a="http://schemas.openxmlformats.org/drawingml/2006/main">
               <a:ext uri="{FF2B5EF4-FFF2-40B4-BE49-F238E27FC236}">
-                <a16:creationId xmlns:a16="http://schemas.microsoft.com/office/drawing/2014/main" id="{C6C9C8FD-B53F-4A5C-981B-709443919A74}"/>
+                <a16:creationId xmlns:a16="http://schemas.microsoft.com/office/drawing/2014/main" id="{9001F6F0-9E93-4917-9A86-86E2A17DD5CE}"/>
               </a:ext>
             </a:extLst>
           </p:cNvPr>
@@ -6039,7 +7604,7 @@
           <p:cNvPr id="4" name="">
             <a:extLst xmlns:a="http://schemas.openxmlformats.org/drawingml/2006/main">
               <a:ext uri="{FF2B5EF4-FFF2-40B4-BE49-F238E27FC236}">
-                <a16:creationId xmlns:a16="http://schemas.microsoft.com/office/drawing/2014/main" id="{DDE1906E-1A2E-4565-B499-E751E4526075}"/>
+                <a16:creationId xmlns:a16="http://schemas.microsoft.com/office/drawing/2014/main" id="{7F424D85-345F-4E97-9AAD-E5A1476FC984}"/>
               </a:ext>
             </a:extLst>
           </p:cNvPr>
@@ -6093,7 +7658,7 @@
           <p:nvPr/>
         </p:nvPicPr>
         <p:blipFill>
-          <a:blip xmlns:r="http://schemas.openxmlformats.org/officeDocument/2006/relationships" xmlns:a="http://schemas.openxmlformats.org/drawingml/2006/main" r:embed="R01671a87f4704a0c"/>
+          <a:blip xmlns:r="http://schemas.openxmlformats.org/officeDocument/2006/relationships" xmlns:a="http://schemas.openxmlformats.org/drawingml/2006/main" r:embed="Re0508a928b334f5e"/>
           <a:stretch xmlns:a="http://schemas.openxmlformats.org/drawingml/2006/main"/>
         </p:blipFill>
         <p:spPr>
@@ -6111,7 +7676,7 @@
           <p:cNvPr id="6" name="">
             <a:extLst xmlns:a="http://schemas.openxmlformats.org/drawingml/2006/main">
               <a:ext uri="{FF2B5EF4-FFF2-40B4-BE49-F238E27FC236}">
-                <a16:creationId xmlns:a16="http://schemas.microsoft.com/office/drawing/2014/main" id="{3D377CA2-A08A-4A44-A5F4-23E771C7DEBE}"/>
+                <a16:creationId xmlns:a16="http://schemas.microsoft.com/office/drawing/2014/main" id="{7D968561-03BF-4CF8-B3BD-2AF1A31EFC05}"/>
               </a:ext>
             </a:extLst>
           </p:cNvPr>
@@ -6182,7 +7747,7 @@
     </p:spTree>
     <p:extLst>
       <p:ext uri="{BB962C8B-B14F-4D97-AF65-F5344CB8AC3E}">
-        <p14:creationId xmlns:p14="http://schemas.microsoft.com/office/powerpoint/2010/main" val="1468892345"/>
+        <p14:creationId xmlns:p14="http://schemas.microsoft.com/office/powerpoint/2010/main" val="2035361050"/>
       </p:ext>
     </p:extLst>
   </p:cSld>
@@ -6213,7 +7778,7 @@
           <p:cNvPr id="1" name="">
             <a:extLst xmlns:a="http://schemas.openxmlformats.org/drawingml/2006/main">
               <a:ext uri="{FF2B5EF4-FFF2-40B4-BE49-F238E27FC236}">
-                <a16:creationId xmlns:a16="http://schemas.microsoft.com/office/drawing/2014/main" id="{94EA628F-E7DB-4334-8198-9E82F7D1A57F}"/>
+                <a16:creationId xmlns:a16="http://schemas.microsoft.com/office/drawing/2014/main" id="{DB0C3871-57A0-4FFB-BA47-6C5BAE5A0C21}"/>
               </a:ext>
             </a:extLst>
           </p:cNvPr>
@@ -6246,7 +7811,7 @@
           <p:cNvPr id="2" name="">
             <a:extLst xmlns:a="http://schemas.openxmlformats.org/drawingml/2006/main">
               <a:ext uri="{FF2B5EF4-FFF2-40B4-BE49-F238E27FC236}">
-                <a16:creationId xmlns:a16="http://schemas.microsoft.com/office/drawing/2014/main" id="{9C0D4B20-9B6C-4E65-97F5-B84C13CB7BCB}"/>
+                <a16:creationId xmlns:a16="http://schemas.microsoft.com/office/drawing/2014/main" id="{35B5E0E8-DC3F-42A5-95E5-65B7FE872E91}"/>
               </a:ext>
             </a:extLst>
           </p:cNvPr>
@@ -6296,7 +7861,7 @@
           <p:cNvPr id="3" name="">
             <a:extLst xmlns:a="http://schemas.openxmlformats.org/drawingml/2006/main">
               <a:ext uri="{FF2B5EF4-FFF2-40B4-BE49-F238E27FC236}">
-                <a16:creationId xmlns:a16="http://schemas.microsoft.com/office/drawing/2014/main" id="{D8B7E473-60B8-47A5-8F32-47B3E31FCD73}"/>
+                <a16:creationId xmlns:a16="http://schemas.microsoft.com/office/drawing/2014/main" id="{1F5E256E-2FD1-4252-805F-8A649F9616CC}"/>
               </a:ext>
             </a:extLst>
           </p:cNvPr>
@@ -6350,7 +7915,7 @@
           <p:nvPr/>
         </p:nvPicPr>
         <p:blipFill>
-          <a:blip xmlns:r="http://schemas.openxmlformats.org/officeDocument/2006/relationships" xmlns:a="http://schemas.openxmlformats.org/drawingml/2006/main" r:embed="R23ae64945a6344e1"/>
+          <a:blip xmlns:r="http://schemas.openxmlformats.org/officeDocument/2006/relationships" xmlns:a="http://schemas.openxmlformats.org/drawingml/2006/main" r:embed="R7597daa553c84899"/>
           <a:stretch xmlns:a="http://schemas.openxmlformats.org/drawingml/2006/main"/>
         </p:blipFill>
         <p:spPr>
@@ -6372,7 +7937,7 @@
           <p:nvPr/>
         </p:nvPicPr>
         <p:blipFill>
-          <a:blip xmlns:r="http://schemas.openxmlformats.org/officeDocument/2006/relationships" xmlns:a="http://schemas.openxmlformats.org/drawingml/2006/main" r:embed="R0d31d684b4bb44a9"/>
+          <a:blip xmlns:r="http://schemas.openxmlformats.org/officeDocument/2006/relationships" xmlns:a="http://schemas.openxmlformats.org/drawingml/2006/main" r:embed="R1b99ec653eb64940"/>
           <a:stretch xmlns:a="http://schemas.openxmlformats.org/drawingml/2006/main"/>
         </p:blipFill>
         <p:spPr>
@@ -6390,7 +7955,7 @@
           <p:cNvPr id="6" name="">
             <a:extLst xmlns:a="http://schemas.openxmlformats.org/drawingml/2006/main">
               <a:ext uri="{FF2B5EF4-FFF2-40B4-BE49-F238E27FC236}">
-                <a16:creationId xmlns:a16="http://schemas.microsoft.com/office/drawing/2014/main" id="{32CA4053-E551-4E24-8EF5-8F02EEB5E887}"/>
+                <a16:creationId xmlns:a16="http://schemas.microsoft.com/office/drawing/2014/main" id="{40503D79-B119-4A49-93F5-5F32D74D979B}"/>
               </a:ext>
             </a:extLst>
           </p:cNvPr>
@@ -6463,7 +8028,7 @@
           <p:cNvPr id="7" name="">
             <a:extLst xmlns:a="http://schemas.openxmlformats.org/drawingml/2006/main">
               <a:ext uri="{FF2B5EF4-FFF2-40B4-BE49-F238E27FC236}">
-                <a16:creationId xmlns:a16="http://schemas.microsoft.com/office/drawing/2014/main" id="{20B6B92B-5FEC-4607-8874-0198E7F3A95F}"/>
+                <a16:creationId xmlns:a16="http://schemas.microsoft.com/office/drawing/2014/main" id="{BC624616-B82F-4DCB-8CB1-4986790AEC17}"/>
               </a:ext>
             </a:extLst>
           </p:cNvPr>
@@ -6534,7 +8099,7 @@
     </p:spTree>
     <p:extLst>
       <p:ext uri="{BB962C8B-B14F-4D97-AF65-F5344CB8AC3E}">
-        <p14:creationId xmlns:p14="http://schemas.microsoft.com/office/powerpoint/2010/main" val="1600120617"/>
+        <p14:creationId xmlns:p14="http://schemas.microsoft.com/office/powerpoint/2010/main" val="661255217"/>
       </p:ext>
     </p:extLst>
   </p:cSld>
@@ -6565,7 +8130,7 @@
           <p:cNvPr id="1" name="">
             <a:extLst xmlns:a="http://schemas.openxmlformats.org/drawingml/2006/main">
               <a:ext uri="{FF2B5EF4-FFF2-40B4-BE49-F238E27FC236}">
-                <a16:creationId xmlns:a16="http://schemas.microsoft.com/office/drawing/2014/main" id="{3F6EBD3B-F9C0-4128-83A3-483A4D871497}"/>
+                <a16:creationId xmlns:a16="http://schemas.microsoft.com/office/drawing/2014/main" id="{C9DC9DA5-0A1D-4B97-871D-F3824B8EAAE0}"/>
               </a:ext>
             </a:extLst>
           </p:cNvPr>
@@ -6598,7 +8163,7 @@
           <p:cNvPr id="2" name="">
             <a:extLst xmlns:a="http://schemas.openxmlformats.org/drawingml/2006/main">
               <a:ext uri="{FF2B5EF4-FFF2-40B4-BE49-F238E27FC236}">
-                <a16:creationId xmlns:a16="http://schemas.microsoft.com/office/drawing/2014/main" id="{61EF1092-A30F-4292-87E4-489AF1053F20}"/>
+                <a16:creationId xmlns:a16="http://schemas.microsoft.com/office/drawing/2014/main" id="{3A6F19D5-E7D5-4F06-BC6C-2C773EF7C264}"/>
               </a:ext>
             </a:extLst>
           </p:cNvPr>
@@ -6648,7 +8213,7 @@
           <p:cNvPr id="3" name="">
             <a:extLst xmlns:a="http://schemas.openxmlformats.org/drawingml/2006/main">
               <a:ext uri="{FF2B5EF4-FFF2-40B4-BE49-F238E27FC236}">
-                <a16:creationId xmlns:a16="http://schemas.microsoft.com/office/drawing/2014/main" id="{82F366B8-AE43-44CA-8FDB-AE75A373AE22}"/>
+                <a16:creationId xmlns:a16="http://schemas.microsoft.com/office/drawing/2014/main" id="{FA1A6439-1357-48EE-A14F-6BDAB822B318}"/>
               </a:ext>
             </a:extLst>
           </p:cNvPr>
@@ -6698,7 +8263,7 @@
           <p:cNvPr id="4" name="">
             <a:extLst xmlns:a="http://schemas.openxmlformats.org/drawingml/2006/main">
               <a:ext uri="{FF2B5EF4-FFF2-40B4-BE49-F238E27FC236}">
-                <a16:creationId xmlns:a16="http://schemas.microsoft.com/office/drawing/2014/main" id="{370A1320-CE40-4C30-9759-4B9C071EA43E}"/>
+                <a16:creationId xmlns:a16="http://schemas.microsoft.com/office/drawing/2014/main" id="{C7B6DF7C-A9F7-470B-AB31-6CF3847E61B2}"/>
               </a:ext>
             </a:extLst>
           </p:cNvPr>
@@ -6754,7 +8319,7 @@
           <p:cNvPr id="5" name="">
             <a:extLst xmlns:a="http://schemas.openxmlformats.org/drawingml/2006/main">
               <a:ext uri="{FF2B5EF4-FFF2-40B4-BE49-F238E27FC236}">
-                <a16:creationId xmlns:a16="http://schemas.microsoft.com/office/drawing/2014/main" id="{185555A2-9963-4659-9534-825B374CA3E7}"/>
+                <a16:creationId xmlns:a16="http://schemas.microsoft.com/office/drawing/2014/main" id="{78FEF2E9-5A3C-4098-AF90-68FA3F901580}"/>
               </a:ext>
             </a:extLst>
           </p:cNvPr>
@@ -6804,7 +8369,7 @@
           <p:cNvPr id="6" name="">
             <a:extLst xmlns:a="http://schemas.openxmlformats.org/drawingml/2006/main">
               <a:ext uri="{FF2B5EF4-FFF2-40B4-BE49-F238E27FC236}">
-                <a16:creationId xmlns:a16="http://schemas.microsoft.com/office/drawing/2014/main" id="{C52C878E-9286-4ABB-96B0-6189888CF2B4}"/>
+                <a16:creationId xmlns:a16="http://schemas.microsoft.com/office/drawing/2014/main" id="{EBF4F54C-C7C4-4E6E-B356-C018C477D952}"/>
               </a:ext>
             </a:extLst>
           </p:cNvPr>
@@ -6854,7 +8419,7 @@
           <p:cNvPr id="7" name="">
             <a:extLst xmlns:a="http://schemas.openxmlformats.org/drawingml/2006/main">
               <a:ext uri="{FF2B5EF4-FFF2-40B4-BE49-F238E27FC236}">
-                <a16:creationId xmlns:a16="http://schemas.microsoft.com/office/drawing/2014/main" id="{6A931CBC-F98E-4C01-9202-5F06CEB1C5AA}"/>
+                <a16:creationId xmlns:a16="http://schemas.microsoft.com/office/drawing/2014/main" id="{FBFE87B5-769D-425A-8A22-F9D3188F9421}"/>
               </a:ext>
             </a:extLst>
           </p:cNvPr>
@@ -6910,7 +8475,7 @@
           <p:cNvPr id="8" name="">
             <a:extLst xmlns:a="http://schemas.openxmlformats.org/drawingml/2006/main">
               <a:ext uri="{FF2B5EF4-FFF2-40B4-BE49-F238E27FC236}">
-                <a16:creationId xmlns:a16="http://schemas.microsoft.com/office/drawing/2014/main" id="{4650BD17-0998-42EE-A85A-EFFF16948B18}"/>
+                <a16:creationId xmlns:a16="http://schemas.microsoft.com/office/drawing/2014/main" id="{DEDDF09C-33A2-464F-BC50-3D2B4BC20D57}"/>
               </a:ext>
             </a:extLst>
           </p:cNvPr>
@@ -6960,7 +8525,7 @@
           <p:cNvPr id="9" name="">
             <a:extLst xmlns:a="http://schemas.openxmlformats.org/drawingml/2006/main">
               <a:ext uri="{FF2B5EF4-FFF2-40B4-BE49-F238E27FC236}">
-                <a16:creationId xmlns:a16="http://schemas.microsoft.com/office/drawing/2014/main" id="{C1FB3F32-DD77-4EC1-BE2B-A40BAC739F38}"/>
+                <a16:creationId xmlns:a16="http://schemas.microsoft.com/office/drawing/2014/main" id="{32E2F2DE-3BC4-4F06-8248-5A97880703A5}"/>
               </a:ext>
             </a:extLst>
           </p:cNvPr>
@@ -7010,7 +8575,7 @@
           <p:cNvPr id="10" name="">
             <a:extLst xmlns:a="http://schemas.openxmlformats.org/drawingml/2006/main">
               <a:ext uri="{FF2B5EF4-FFF2-40B4-BE49-F238E27FC236}">
-                <a16:creationId xmlns:a16="http://schemas.microsoft.com/office/drawing/2014/main" id="{5290C9FA-ABED-436A-BFBA-DBD306F027BF}"/>
+                <a16:creationId xmlns:a16="http://schemas.microsoft.com/office/drawing/2014/main" id="{38F21F36-5688-45C3-BC09-611577798347}"/>
               </a:ext>
             </a:extLst>
           </p:cNvPr>
@@ -7066,7 +8631,7 @@
           <p:cNvPr id="11" name="">
             <a:extLst xmlns:a="http://schemas.openxmlformats.org/drawingml/2006/main">
               <a:ext uri="{FF2B5EF4-FFF2-40B4-BE49-F238E27FC236}">
-                <a16:creationId xmlns:a16="http://schemas.microsoft.com/office/drawing/2014/main" id="{C9FD12F5-8D74-4591-8121-5249C7A90E25}"/>
+                <a16:creationId xmlns:a16="http://schemas.microsoft.com/office/drawing/2014/main" id="{0FCD4C89-37E6-46D4-A7BA-AA8D8EE947A1}"/>
               </a:ext>
             </a:extLst>
           </p:cNvPr>
@@ -7116,7 +8681,7 @@
           <p:cNvPr id="12" name="">
             <a:extLst xmlns:a="http://schemas.openxmlformats.org/drawingml/2006/main">
               <a:ext uri="{FF2B5EF4-FFF2-40B4-BE49-F238E27FC236}">
-                <a16:creationId xmlns:a16="http://schemas.microsoft.com/office/drawing/2014/main" id="{B0113925-D221-44E3-B751-3DAD0A79B20F}"/>
+                <a16:creationId xmlns:a16="http://schemas.microsoft.com/office/drawing/2014/main" id="{B6943486-A163-4DB9-A998-B98C45BEA907}"/>
               </a:ext>
             </a:extLst>
           </p:cNvPr>
@@ -7166,7 +8731,7 @@
           <p:cNvPr id="13" name="">
             <a:extLst xmlns:a="http://schemas.openxmlformats.org/drawingml/2006/main">
               <a:ext uri="{FF2B5EF4-FFF2-40B4-BE49-F238E27FC236}">
-                <a16:creationId xmlns:a16="http://schemas.microsoft.com/office/drawing/2014/main" id="{A4AADDF6-51D3-4C34-A003-BFB9AAB5DC39}"/>
+                <a16:creationId xmlns:a16="http://schemas.microsoft.com/office/drawing/2014/main" id="{C3F3EB1C-8F48-4465-9A33-772D65E2E3BD}"/>
               </a:ext>
             </a:extLst>
           </p:cNvPr>
@@ -7222,7 +8787,7 @@
           <p:cNvPr id="14" name="">
             <a:extLst xmlns:a="http://schemas.openxmlformats.org/drawingml/2006/main">
               <a:ext uri="{FF2B5EF4-FFF2-40B4-BE49-F238E27FC236}">
-                <a16:creationId xmlns:a16="http://schemas.microsoft.com/office/drawing/2014/main" id="{90DC1CD5-0C02-401B-8B1C-AD41C61CEF03}"/>
+                <a16:creationId xmlns:a16="http://schemas.microsoft.com/office/drawing/2014/main" id="{F6673487-24BD-4FCE-AD78-E6AED0D6BBB0}"/>
               </a:ext>
             </a:extLst>
           </p:cNvPr>
@@ -7272,7 +8837,7 @@
           <p:cNvPr id="15" name="">
             <a:extLst xmlns:a="http://schemas.openxmlformats.org/drawingml/2006/main">
               <a:ext uri="{FF2B5EF4-FFF2-40B4-BE49-F238E27FC236}">
-                <a16:creationId xmlns:a16="http://schemas.microsoft.com/office/drawing/2014/main" id="{890823A0-E393-4651-82C2-5BDECE9D08C9}"/>
+                <a16:creationId xmlns:a16="http://schemas.microsoft.com/office/drawing/2014/main" id="{A7863E96-A1C9-465A-8E7E-1B23E6508AC0}"/>
               </a:ext>
             </a:extLst>
           </p:cNvPr>
@@ -7322,7 +8887,7 @@
           <p:cNvPr id="16" name="">
             <a:extLst xmlns:a="http://schemas.openxmlformats.org/drawingml/2006/main">
               <a:ext uri="{FF2B5EF4-FFF2-40B4-BE49-F238E27FC236}">
-                <a16:creationId xmlns:a16="http://schemas.microsoft.com/office/drawing/2014/main" id="{99D3E450-A592-4650-A032-D7ACDBD89152}"/>
+                <a16:creationId xmlns:a16="http://schemas.microsoft.com/office/drawing/2014/main" id="{AE9C0572-1505-48BC-8F2D-F7D65A1F69D2}"/>
               </a:ext>
             </a:extLst>
           </p:cNvPr>
@@ -7378,7 +8943,7 @@
           <p:cNvPr id="17" name="">
             <a:extLst xmlns:a="http://schemas.openxmlformats.org/drawingml/2006/main">
               <a:ext uri="{FF2B5EF4-FFF2-40B4-BE49-F238E27FC236}">
-                <a16:creationId xmlns:a16="http://schemas.microsoft.com/office/drawing/2014/main" id="{A8D16FB4-BDEF-4171-8BA7-9FC05E10CE60}"/>
+                <a16:creationId xmlns:a16="http://schemas.microsoft.com/office/drawing/2014/main" id="{5D005743-0FD5-4295-8393-F64705369C7C}"/>
               </a:ext>
             </a:extLst>
           </p:cNvPr>
@@ -7428,7 +8993,7 @@
           <p:cNvPr id="18" name="">
             <a:extLst xmlns:a="http://schemas.openxmlformats.org/drawingml/2006/main">
               <a:ext uri="{FF2B5EF4-FFF2-40B4-BE49-F238E27FC236}">
-                <a16:creationId xmlns:a16="http://schemas.microsoft.com/office/drawing/2014/main" id="{DF4C9E42-FBB7-4533-B0CC-8A77DCC3165F}"/>
+                <a16:creationId xmlns:a16="http://schemas.microsoft.com/office/drawing/2014/main" id="{D291F02E-6BFD-4AF7-A431-345EED5696CA}"/>
               </a:ext>
             </a:extLst>
           </p:cNvPr>
@@ -7478,7 +9043,7 @@
           <p:cNvPr id="19" name="">
             <a:extLst xmlns:a="http://schemas.openxmlformats.org/drawingml/2006/main">
               <a:ext uri="{FF2B5EF4-FFF2-40B4-BE49-F238E27FC236}">
-                <a16:creationId xmlns:a16="http://schemas.microsoft.com/office/drawing/2014/main" id="{C4B1FE4D-FFE1-4237-823E-90A46458EC5C}"/>
+                <a16:creationId xmlns:a16="http://schemas.microsoft.com/office/drawing/2014/main" id="{F5F3303F-D9A9-4E62-9408-D54C13BBF943}"/>
               </a:ext>
             </a:extLst>
           </p:cNvPr>
@@ -7534,7 +9099,7 @@
           <p:cNvPr id="20" name="">
             <a:extLst xmlns:a="http://schemas.openxmlformats.org/drawingml/2006/main">
               <a:ext uri="{FF2B5EF4-FFF2-40B4-BE49-F238E27FC236}">
-                <a16:creationId xmlns:a16="http://schemas.microsoft.com/office/drawing/2014/main" id="{B36E48AD-EA82-4513-9DD5-9A64979FB870}"/>
+                <a16:creationId xmlns:a16="http://schemas.microsoft.com/office/drawing/2014/main" id="{29BF0BCD-3A38-4A91-AA67-FC81ED6C76B4}"/>
               </a:ext>
             </a:extLst>
           </p:cNvPr>
@@ -7584,7 +9149,7 @@
           <p:cNvPr id="21" name="">
             <a:extLst xmlns:a="http://schemas.openxmlformats.org/drawingml/2006/main">
               <a:ext uri="{FF2B5EF4-FFF2-40B4-BE49-F238E27FC236}">
-                <a16:creationId xmlns:a16="http://schemas.microsoft.com/office/drawing/2014/main" id="{974D6B4A-17F1-48C7-BD51-0A2DA6508419}"/>
+                <a16:creationId xmlns:a16="http://schemas.microsoft.com/office/drawing/2014/main" id="{C64AB10C-75B5-42E6-9968-02CE6F742112}"/>
               </a:ext>
             </a:extLst>
           </p:cNvPr>
@@ -7632,7 +9197,7 @@
     </p:spTree>
     <p:extLst>
       <p:ext uri="{BB962C8B-B14F-4D97-AF65-F5344CB8AC3E}">
-        <p14:creationId xmlns:p14="http://schemas.microsoft.com/office/powerpoint/2010/main" val="1519156132"/>
+        <p14:creationId xmlns:p14="http://schemas.microsoft.com/office/powerpoint/2010/main" val="518417793"/>
       </p:ext>
     </p:extLst>
   </p:cSld>
@@ -7663,7 +9228,7 @@
           <p:cNvPr id="1" name="">
             <a:extLst xmlns:a="http://schemas.openxmlformats.org/drawingml/2006/main">
               <a:ext uri="{FF2B5EF4-FFF2-40B4-BE49-F238E27FC236}">
-                <a16:creationId xmlns:a16="http://schemas.microsoft.com/office/drawing/2014/main" id="{C95988E2-1593-4445-BA51-B11F8204A378}"/>
+                <a16:creationId xmlns:a16="http://schemas.microsoft.com/office/drawing/2014/main" id="{29DBC436-C30D-4005-9298-E41651E8A08C}"/>
               </a:ext>
             </a:extLst>
           </p:cNvPr>
@@ -7696,7 +9261,7 @@
           <p:cNvPr id="2" name="">
             <a:extLst xmlns:a="http://schemas.openxmlformats.org/drawingml/2006/main">
               <a:ext uri="{FF2B5EF4-FFF2-40B4-BE49-F238E27FC236}">
-                <a16:creationId xmlns:a16="http://schemas.microsoft.com/office/drawing/2014/main" id="{FFE3C1BD-1F5E-4BF4-982D-57FE58C20654}"/>
+                <a16:creationId xmlns:a16="http://schemas.microsoft.com/office/drawing/2014/main" id="{BDE0C62A-C36F-44D7-9B45-2159B1CE36DF}"/>
               </a:ext>
             </a:extLst>
           </p:cNvPr>
@@ -7746,7 +9311,7 @@
           <p:cNvPr id="3" name="">
             <a:extLst xmlns:a="http://schemas.openxmlformats.org/drawingml/2006/main">
               <a:ext uri="{FF2B5EF4-FFF2-40B4-BE49-F238E27FC236}">
-                <a16:creationId xmlns:a16="http://schemas.microsoft.com/office/drawing/2014/main" id="{F37FFA94-A06E-4D7D-9460-A12307BE0303}"/>
+                <a16:creationId xmlns:a16="http://schemas.microsoft.com/office/drawing/2014/main" id="{E6E1F5D1-2014-4656-8C9E-58FF7497FE9B}"/>
               </a:ext>
             </a:extLst>
           </p:cNvPr>
@@ -7800,7 +9365,7 @@
           <p:nvPr/>
         </p:nvPicPr>
         <p:blipFill>
-          <a:blip xmlns:r="http://schemas.openxmlformats.org/officeDocument/2006/relationships" xmlns:a="http://schemas.openxmlformats.org/drawingml/2006/main" r:embed="Rdd5ec324df204788"/>
+          <a:blip xmlns:r="http://schemas.openxmlformats.org/officeDocument/2006/relationships" xmlns:a="http://schemas.openxmlformats.org/drawingml/2006/main" r:embed="Rfa9086b6d2d94015"/>
           <a:stretch xmlns:a="http://schemas.openxmlformats.org/drawingml/2006/main"/>
         </p:blipFill>
         <p:spPr>
@@ -7822,7 +9387,7 @@
           <p:nvPr/>
         </p:nvPicPr>
         <p:blipFill>
-          <a:blip xmlns:r="http://schemas.openxmlformats.org/officeDocument/2006/relationships" xmlns:a="http://schemas.openxmlformats.org/drawingml/2006/main" r:embed="R279e51b82a884b34"/>
+          <a:blip xmlns:r="http://schemas.openxmlformats.org/officeDocument/2006/relationships" xmlns:a="http://schemas.openxmlformats.org/drawingml/2006/main" r:embed="R60b2f1b8b5084a51"/>
           <a:stretch xmlns:a="http://schemas.openxmlformats.org/drawingml/2006/main"/>
         </p:blipFill>
         <p:spPr>
@@ -7840,7 +9405,7 @@
           <p:cNvPr id="6" name="">
             <a:extLst xmlns:a="http://schemas.openxmlformats.org/drawingml/2006/main">
               <a:ext uri="{FF2B5EF4-FFF2-40B4-BE49-F238E27FC236}">
-                <a16:creationId xmlns:a16="http://schemas.microsoft.com/office/drawing/2014/main" id="{14C7EEFA-1C33-4B2E-AB60-BC85F301F46A}"/>
+                <a16:creationId xmlns:a16="http://schemas.microsoft.com/office/drawing/2014/main" id="{4FF8F749-E33D-458C-9A2B-FC5203EF223B}"/>
               </a:ext>
             </a:extLst>
           </p:cNvPr>
@@ -7911,7 +9476,7 @@
     </p:spTree>
     <p:extLst>
       <p:ext uri="{BB962C8B-B14F-4D97-AF65-F5344CB8AC3E}">
-        <p14:creationId xmlns:p14="http://schemas.microsoft.com/office/powerpoint/2010/main" val="1964897760"/>
+        <p14:creationId xmlns:p14="http://schemas.microsoft.com/office/powerpoint/2010/main" val="445078597"/>
       </p:ext>
     </p:extLst>
   </p:cSld>
@@ -7942,7 +9507,7 @@
           <p:cNvPr id="1" name="">
             <a:extLst xmlns:a="http://schemas.openxmlformats.org/drawingml/2006/main">
               <a:ext uri="{FF2B5EF4-FFF2-40B4-BE49-F238E27FC236}">
-                <a16:creationId xmlns:a16="http://schemas.microsoft.com/office/drawing/2014/main" id="{599B2AF7-115B-4475-B4C7-C1F7A46C17E8}"/>
+                <a16:creationId xmlns:a16="http://schemas.microsoft.com/office/drawing/2014/main" id="{6E68760E-3660-4A30-8F45-DF80FDC73873}"/>
               </a:ext>
             </a:extLst>
           </p:cNvPr>
@@ -7975,7 +9540,7 @@
           <p:cNvPr id="2" name="">
             <a:extLst xmlns:a="http://schemas.openxmlformats.org/drawingml/2006/main">
               <a:ext uri="{FF2B5EF4-FFF2-40B4-BE49-F238E27FC236}">
-                <a16:creationId xmlns:a16="http://schemas.microsoft.com/office/drawing/2014/main" id="{A1BBB190-D0DD-40B7-AB16-FDB44E955B0B}"/>
+                <a16:creationId xmlns:a16="http://schemas.microsoft.com/office/drawing/2014/main" id="{2E2CCD60-A703-4467-9CAC-1A6F43BE2490}"/>
               </a:ext>
             </a:extLst>
           </p:cNvPr>
@@ -8025,7 +9590,7 @@
           <p:cNvPr id="3" name="">
             <a:extLst xmlns:a="http://schemas.openxmlformats.org/drawingml/2006/main">
               <a:ext uri="{FF2B5EF4-FFF2-40B4-BE49-F238E27FC236}">
-                <a16:creationId xmlns:a16="http://schemas.microsoft.com/office/drawing/2014/main" id="{F463F5C5-684A-454A-893B-EBCCB2787D90}"/>
+                <a16:creationId xmlns:a16="http://schemas.microsoft.com/office/drawing/2014/main" id="{04A98FB4-7357-4868-B16C-94683A52850F}"/>
               </a:ext>
             </a:extLst>
           </p:cNvPr>
@@ -8079,7 +9644,7 @@
           <p:nvPr/>
         </p:nvPicPr>
         <p:blipFill>
-          <a:blip xmlns:r="http://schemas.openxmlformats.org/officeDocument/2006/relationships" xmlns:a="http://schemas.openxmlformats.org/drawingml/2006/main" r:embed="Rfa8454effff1497c"/>
+          <a:blip xmlns:r="http://schemas.openxmlformats.org/officeDocument/2006/relationships" xmlns:a="http://schemas.openxmlformats.org/drawingml/2006/main" r:embed="R5f569076e8224cf0"/>
           <a:stretch xmlns:a="http://schemas.openxmlformats.org/drawingml/2006/main"/>
         </p:blipFill>
         <p:spPr>
@@ -8097,7 +9662,7 @@
           <p:cNvPr id="5" name="">
             <a:extLst xmlns:a="http://schemas.openxmlformats.org/drawingml/2006/main">
               <a:ext uri="{FF2B5EF4-FFF2-40B4-BE49-F238E27FC236}">
-                <a16:creationId xmlns:a16="http://schemas.microsoft.com/office/drawing/2014/main" id="{03C2A186-1A9F-43AD-8D5A-2CACB19F76B1}"/>
+                <a16:creationId xmlns:a16="http://schemas.microsoft.com/office/drawing/2014/main" id="{3D4950D5-7156-4313-8E22-3D80B3EC69F0}"/>
               </a:ext>
             </a:extLst>
           </p:cNvPr>
@@ -8179,7 +9744,7 @@
     </p:spTree>
     <p:extLst>
       <p:ext uri="{BB962C8B-B14F-4D97-AF65-F5344CB8AC3E}">
-        <p14:creationId xmlns:p14="http://schemas.microsoft.com/office/powerpoint/2010/main" val="1078932703"/>
+        <p14:creationId xmlns:p14="http://schemas.microsoft.com/office/powerpoint/2010/main" val="1316834963"/>
       </p:ext>
     </p:extLst>
   </p:cSld>
@@ -8210,7 +9775,7 @@
           <p:cNvPr id="1" name="">
             <a:extLst xmlns:a="http://schemas.openxmlformats.org/drawingml/2006/main">
               <a:ext uri="{FF2B5EF4-FFF2-40B4-BE49-F238E27FC236}">
-                <a16:creationId xmlns:a16="http://schemas.microsoft.com/office/drawing/2014/main" id="{C50A6549-98B5-4E53-8328-E2C68F9DDD8C}"/>
+                <a16:creationId xmlns:a16="http://schemas.microsoft.com/office/drawing/2014/main" id="{6DC33A35-DC77-45A2-A4DA-71259074DAD4}"/>
               </a:ext>
             </a:extLst>
           </p:cNvPr>
@@ -8243,7 +9808,7 @@
           <p:cNvPr id="2" name="">
             <a:extLst xmlns:a="http://schemas.openxmlformats.org/drawingml/2006/main">
               <a:ext uri="{FF2B5EF4-FFF2-40B4-BE49-F238E27FC236}">
-                <a16:creationId xmlns:a16="http://schemas.microsoft.com/office/drawing/2014/main" id="{0B0C7919-E5EC-48D7-BBB3-D11EF9E9306B}"/>
+                <a16:creationId xmlns:a16="http://schemas.microsoft.com/office/drawing/2014/main" id="{CA55BFAC-D1EE-4B8E-B708-CBA8764C3DF2}"/>
               </a:ext>
             </a:extLst>
           </p:cNvPr>
@@ -8293,7 +9858,7 @@
           <p:cNvPr id="3" name="">
             <a:extLst xmlns:a="http://schemas.openxmlformats.org/drawingml/2006/main">
               <a:ext uri="{FF2B5EF4-FFF2-40B4-BE49-F238E27FC236}">
-                <a16:creationId xmlns:a16="http://schemas.microsoft.com/office/drawing/2014/main" id="{74C03C84-3022-4F9D-B736-A4506AC03A5A}"/>
+                <a16:creationId xmlns:a16="http://schemas.microsoft.com/office/drawing/2014/main" id="{CB654C04-CAEB-4945-A90C-7BDE9A5AB3D8}"/>
               </a:ext>
             </a:extLst>
           </p:cNvPr>
@@ -8347,7 +9912,7 @@
           <p:nvPr/>
         </p:nvPicPr>
         <p:blipFill>
-          <a:blip xmlns:r="http://schemas.openxmlformats.org/officeDocument/2006/relationships" xmlns:a="http://schemas.openxmlformats.org/drawingml/2006/main" r:embed="R78f9dbc0e23f4672"/>
+          <a:blip xmlns:r="http://schemas.openxmlformats.org/officeDocument/2006/relationships" xmlns:a="http://schemas.openxmlformats.org/drawingml/2006/main" r:embed="Rcf52d3aea914404f"/>
           <a:stretch xmlns:a="http://schemas.openxmlformats.org/drawingml/2006/main"/>
         </p:blipFill>
         <p:spPr>
@@ -8369,7 +9934,7 @@
           <p:nvPr/>
         </p:nvPicPr>
         <p:blipFill>
-          <a:blip xmlns:r="http://schemas.openxmlformats.org/officeDocument/2006/relationships" xmlns:a="http://schemas.openxmlformats.org/drawingml/2006/main" r:embed="R406076abd29c4558"/>
+          <a:blip xmlns:r="http://schemas.openxmlformats.org/officeDocument/2006/relationships" xmlns:a="http://schemas.openxmlformats.org/drawingml/2006/main" r:embed="R00e89dd1e3e34e2a"/>
           <a:stretch xmlns:a="http://schemas.openxmlformats.org/drawingml/2006/main"/>
         </p:blipFill>
         <p:spPr>
@@ -8387,7 +9952,7 @@
           <p:cNvPr id="6" name="">
             <a:extLst xmlns:a="http://schemas.openxmlformats.org/drawingml/2006/main">
               <a:ext uri="{FF2B5EF4-FFF2-40B4-BE49-F238E27FC236}">
-                <a16:creationId xmlns:a16="http://schemas.microsoft.com/office/drawing/2014/main" id="{4C0FFC33-3365-40C9-9E31-B20D76E365D2}"/>
+                <a16:creationId xmlns:a16="http://schemas.microsoft.com/office/drawing/2014/main" id="{2E904867-B967-4812-B2EB-172A08D52F02}"/>
               </a:ext>
             </a:extLst>
           </p:cNvPr>
@@ -8441,7 +10006,7 @@
     </p:spTree>
     <p:extLst>
       <p:ext uri="{BB962C8B-B14F-4D97-AF65-F5344CB8AC3E}">
-        <p14:creationId xmlns:p14="http://schemas.microsoft.com/office/powerpoint/2010/main" val="1062910483"/>
+        <p14:creationId xmlns:p14="http://schemas.microsoft.com/office/powerpoint/2010/main" val="1598396950"/>
       </p:ext>
     </p:extLst>
   </p:cSld>
